--- a/Group_No_6A.pptx
+++ b/Group_No_6A.pptx
@@ -16,6 +16,7 @@
     <p:sldId id="264" r:id="rId11"/>
     <p:sldId id="265" r:id="rId12"/>
     <p:sldId id="266" r:id="rId13"/>
+    <p:sldId id="267" r:id="rId14"/>
   </p:sldIdLst>
   <p:sldSz cx="10080625" cy="5670550"/>
   <p:notesSz cx="7772400" cy="10058400"/>
@@ -68,10 +69,12 @@
                     </a:solidFill>
                     <a:uFillTx/>
                     <a:latin typeface="Arial"/>
+                    <a:ea typeface="DejaVu Sans"/>
                   </a:defRPr>
                 </a:pPr>
               </a:p>
             </c:txPr>
+            <c:dLblPos val="outEnd"/>
             <c:showLegendKey val="0"/>
             <c:showVal val="0"/>
             <c:showCatName val="0"/>
@@ -171,10 +174,12 @@
                     </a:solidFill>
                     <a:uFillTx/>
                     <a:latin typeface="Arial"/>
+                    <a:ea typeface="DejaVu Sans"/>
                   </a:defRPr>
                 </a:pPr>
               </a:p>
             </c:txPr>
+            <c:dLblPos val="outEnd"/>
             <c:showLegendKey val="0"/>
             <c:showVal val="0"/>
             <c:showCatName val="0"/>
@@ -274,10 +279,12 @@
                     </a:solidFill>
                     <a:uFillTx/>
                     <a:latin typeface="Arial"/>
+                    <a:ea typeface="DejaVu Sans"/>
                   </a:defRPr>
                 </a:pPr>
               </a:p>
             </c:txPr>
+            <c:dLblPos val="outEnd"/>
             <c:showLegendKey val="0"/>
             <c:showVal val="0"/>
             <c:showCatName val="0"/>
@@ -344,17 +351,17 @@
         </c:ser>
         <c:gapWidth val="100"/>
         <c:overlap val="0"/>
-        <c:axId val="84400313"/>
-        <c:axId val="25369157"/>
+        <c:axId val="8462887"/>
+        <c:axId val="40937315"/>
       </c:barChart>
       <c:catAx>
-        <c:axId val="84400313"/>
+        <c:axId val="8462887"/>
         <c:scaling>
           <c:orientation val="minMax"/>
         </c:scaling>
         <c:delete val="0"/>
         <c:axPos val="b"/>
-        <c:numFmt formatCode="[$-409]mm/dd/yyyy" sourceLinked="1"/>
+        <c:numFmt formatCode="[$-409]mm/dd/yyyy" sourceLinked="0"/>
         <c:majorTickMark val="out"/>
         <c:minorTickMark val="none"/>
         <c:tickLblPos val="nextTo"/>
@@ -376,11 +383,12 @@
                 </a:solidFill>
                 <a:uFillTx/>
                 <a:latin typeface="Arial"/>
+                <a:ea typeface="DejaVu Sans"/>
               </a:defRPr>
             </a:pPr>
           </a:p>
         </c:txPr>
-        <c:crossAx val="25369157"/>
+        <c:crossAx val="40937315"/>
         <c:crosses val="autoZero"/>
         <c:auto val="1"/>
         <c:lblAlgn val="ctr"/>
@@ -388,7 +396,7 @@
         <c:noMultiLvlLbl val="0"/>
       </c:catAx>
       <c:valAx>
-        <c:axId val="25369157"/>
+        <c:axId val="40937315"/>
         <c:scaling>
           <c:orientation val="minMax"/>
         </c:scaling>
@@ -403,7 +411,7 @@
             </a:ln>
           </c:spPr>
         </c:majorGridlines>
-        <c:numFmt formatCode="General" sourceLinked="1"/>
+        <c:numFmt formatCode="General" sourceLinked="0"/>
         <c:majorTickMark val="out"/>
         <c:minorTickMark val="none"/>
         <c:tickLblPos val="nextTo"/>
@@ -425,11 +433,12 @@
                 </a:solidFill>
                 <a:uFillTx/>
                 <a:latin typeface="Arial"/>
+                <a:ea typeface="DejaVu Sans"/>
               </a:defRPr>
             </a:pPr>
           </a:p>
         </c:txPr>
-        <c:crossAx val="84400313"/>
+        <c:crossAx val="8462887"/>
         <c:crosses val="autoZero"/>
         <c:crossBetween val="between"/>
       </c:valAx>
@@ -462,6 +471,7 @@
               </a:solidFill>
               <a:uFillTx/>
               <a:latin typeface="Arial"/>
+              <a:ea typeface="DejaVu Sans"/>
             </a:defRPr>
           </a:pPr>
         </a:p>
@@ -509,7 +519,7 @@
         <p:spPr>
           <a:xfrm>
             <a:off x="504000" y="560880"/>
-            <a:ext cx="9070560" cy="274680"/>
+            <a:ext cx="9070200" cy="274680"/>
           </a:xfrm>
           <a:prstGeom prst="rect">
             <a:avLst/>
@@ -525,7 +535,13 @@
           </a:bodyPr>
           <a:p>
             <a:pPr indent="0">
+              <a:lnSpc>
+                <a:spcPct val="100000"/>
+              </a:lnSpc>
               <a:buNone/>
+              <a:tabLst>
+                <a:tab algn="l" pos="0"/>
+              </a:tabLst>
             </a:pPr>
             <a:r>
               <a:rPr b="0" lang="en-US" sz="1800" strike="noStrike" u="none">
@@ -562,7 +578,7 @@
         <p:spPr>
           <a:xfrm>
             <a:off x="504000" y="1326600"/>
-            <a:ext cx="9071640" cy="3288240"/>
+            <a:ext cx="9071280" cy="3287880"/>
           </a:xfrm>
           <a:prstGeom prst="rect">
             <a:avLst/>
@@ -578,6 +594,9 @@
           </a:bodyPr>
           <a:p>
             <a:pPr marL="432000" indent="-324000">
+              <a:lnSpc>
+                <a:spcPct val="100000"/>
+              </a:lnSpc>
               <a:spcBef>
                 <a:spcPts val="1417"/>
               </a:spcBef>
@@ -610,6 +629,9 @@
           </a:p>
           <a:p>
             <a:pPr lvl="1" marL="864000" indent="-324000">
+              <a:lnSpc>
+                <a:spcPct val="100000"/>
+              </a:lnSpc>
               <a:spcBef>
                 <a:spcPts val="1134"/>
               </a:spcBef>
@@ -642,6 +664,9 @@
           </a:p>
           <a:p>
             <a:pPr lvl="2" marL="1296000" indent="-288000">
+              <a:lnSpc>
+                <a:spcPct val="100000"/>
+              </a:lnSpc>
               <a:spcBef>
                 <a:spcPts val="850"/>
               </a:spcBef>
@@ -674,6 +699,9 @@
           </a:p>
           <a:p>
             <a:pPr lvl="3" marL="1728000" indent="-216000">
+              <a:lnSpc>
+                <a:spcPct val="100000"/>
+              </a:lnSpc>
               <a:spcBef>
                 <a:spcPts val="567"/>
               </a:spcBef>
@@ -706,6 +734,9 @@
           </a:p>
           <a:p>
             <a:pPr lvl="4" marL="2160000" indent="-216000">
+              <a:lnSpc>
+                <a:spcPct val="100000"/>
+              </a:lnSpc>
               <a:spcBef>
                 <a:spcPts val="283"/>
               </a:spcBef>
@@ -738,6 +769,9 @@
           </a:p>
           <a:p>
             <a:pPr lvl="5" marL="2592000" indent="-216000">
+              <a:lnSpc>
+                <a:spcPct val="100000"/>
+              </a:lnSpc>
               <a:spcBef>
                 <a:spcPts val="283"/>
               </a:spcBef>
@@ -770,6 +804,9 @@
           </a:p>
           <a:p>
             <a:pPr lvl="6" marL="3024000" indent="-216000">
+              <a:lnSpc>
+                <a:spcPct val="100000"/>
+              </a:lnSpc>
               <a:spcBef>
                 <a:spcPts val="283"/>
               </a:spcBef>
@@ -815,7 +852,7 @@
         <p:spPr>
           <a:xfrm>
             <a:off x="3447360" y="5165280"/>
-            <a:ext cx="3193920" cy="389520"/>
+            <a:ext cx="3193560" cy="389160"/>
           </a:xfrm>
           <a:prstGeom prst="rect">
             <a:avLst/>
@@ -893,7 +930,7 @@
         <p:spPr>
           <a:xfrm>
             <a:off x="7227360" y="5165280"/>
-            <a:ext cx="2347200" cy="389520"/>
+            <a:ext cx="2346840" cy="389160"/>
           </a:xfrm>
           <a:prstGeom prst="rect">
             <a:avLst/>
@@ -936,7 +973,7 @@
                 <a:tab algn="l" pos="0"/>
               </a:tabLst>
             </a:pPr>
-            <a:fld id="{FB33ACC2-48D8-4E75-969A-9EB39832F4AE}" type="slidenum">
+            <a:fld id="{AFA0E869-E2A5-473A-A085-52CAFBD05CF5}" type="slidenum">
               <a:rPr b="0" lang="en-US" sz="1400" strike="noStrike" u="none">
                 <a:solidFill>
                   <a:srgbClr val="000000"/>
@@ -971,7 +1008,7 @@
         <p:spPr>
           <a:xfrm>
             <a:off x="504000" y="5165280"/>
-            <a:ext cx="2347200" cy="389520"/>
+            <a:ext cx="2346840" cy="389160"/>
           </a:xfrm>
           <a:prstGeom prst="rect">
             <a:avLst/>
@@ -987,7 +1024,13 @@
           </a:bodyPr>
           <a:lstStyle>
             <a:lvl1pPr indent="0">
+              <a:lnSpc>
+                <a:spcPct val="100000"/>
+              </a:lnSpc>
               <a:buNone/>
+              <a:tabLst>
+                <a:tab algn="l" pos="0"/>
+              </a:tabLst>
               <a:defRPr b="0" lang="en-US" sz="1400" strike="noStrike" u="none">
                 <a:solidFill>
                   <a:srgbClr val="000000"/>
@@ -1000,7 +1043,13 @@
           </a:lstStyle>
           <a:p>
             <a:pPr indent="0">
+              <a:lnSpc>
+                <a:spcPct val="100000"/>
+              </a:lnSpc>
               <a:buNone/>
+              <a:tabLst>
+                <a:tab algn="l" pos="0"/>
+              </a:tabLst>
             </a:pPr>
             <a:r>
               <a:rPr b="0" lang="en-US" sz="1400" strike="noStrike" u="none">
@@ -1059,7 +1108,7 @@
         <p:spPr>
           <a:xfrm>
             <a:off x="504000" y="560880"/>
-            <a:ext cx="9070560" cy="274680"/>
+            <a:ext cx="9070200" cy="274680"/>
           </a:xfrm>
           <a:prstGeom prst="rect">
             <a:avLst/>
@@ -1075,7 +1124,13 @@
           </a:bodyPr>
           <a:p>
             <a:pPr indent="0">
+              <a:lnSpc>
+                <a:spcPct val="100000"/>
+              </a:lnSpc>
               <a:buNone/>
+              <a:tabLst>
+                <a:tab algn="l" pos="0"/>
+              </a:tabLst>
             </a:pPr>
             <a:r>
               <a:rPr b="0" lang="en-US" sz="1800" strike="noStrike" u="none">
@@ -1112,7 +1167,7 @@
         <p:spPr>
           <a:xfrm>
             <a:off x="3447360" y="5165280"/>
-            <a:ext cx="3193920" cy="389520"/>
+            <a:ext cx="3193560" cy="389160"/>
           </a:xfrm>
           <a:prstGeom prst="rect">
             <a:avLst/>
@@ -1190,7 +1245,7 @@
         <p:spPr>
           <a:xfrm>
             <a:off x="7227360" y="5165280"/>
-            <a:ext cx="2347200" cy="389520"/>
+            <a:ext cx="2346840" cy="389160"/>
           </a:xfrm>
           <a:prstGeom prst="rect">
             <a:avLst/>
@@ -1233,7 +1288,7 @@
                 <a:tab algn="l" pos="0"/>
               </a:tabLst>
             </a:pPr>
-            <a:fld id="{28716FB0-DE8F-4023-94C3-5CF8B8471874}" type="slidenum">
+            <a:fld id="{0951E671-74EA-4627-935E-45AC3DD45675}" type="slidenum">
               <a:rPr b="0" lang="en-US" sz="1400" strike="noStrike" u="none">
                 <a:solidFill>
                   <a:srgbClr val="000000"/>
@@ -1268,7 +1323,7 @@
         <p:spPr>
           <a:xfrm>
             <a:off x="504000" y="5165280"/>
-            <a:ext cx="2347200" cy="389520"/>
+            <a:ext cx="2346840" cy="389160"/>
           </a:xfrm>
           <a:prstGeom prst="rect">
             <a:avLst/>
@@ -1284,7 +1339,13 @@
           </a:bodyPr>
           <a:lstStyle>
             <a:lvl1pPr indent="0">
+              <a:lnSpc>
+                <a:spcPct val="100000"/>
+              </a:lnSpc>
               <a:buNone/>
+              <a:tabLst>
+                <a:tab algn="l" pos="0"/>
+              </a:tabLst>
               <a:defRPr b="0" lang="en-US" sz="1400" strike="noStrike" u="none">
                 <a:solidFill>
                   <a:srgbClr val="000000"/>
@@ -1297,7 +1358,13 @@
           </a:lstStyle>
           <a:p>
             <a:pPr indent="0">
+              <a:lnSpc>
+                <a:spcPct val="100000"/>
+              </a:lnSpc>
               <a:buNone/>
+              <a:tabLst>
+                <a:tab algn="l" pos="0"/>
+              </a:tabLst>
             </a:pPr>
             <a:r>
               <a:rPr b="0" lang="en-US" sz="1400" strike="noStrike" u="none">
@@ -1334,7 +1401,7 @@
         <p:spPr>
           <a:xfrm>
             <a:off x="504000" y="1326600"/>
-            <a:ext cx="9072000" cy="3288600"/>
+            <a:ext cx="9071640" cy="3288240"/>
           </a:xfrm>
           <a:prstGeom prst="rect">
             <a:avLst/>
@@ -1350,6 +1417,9 @@
           </a:bodyPr>
           <a:p>
             <a:pPr marL="432000" indent="-324000">
+              <a:lnSpc>
+                <a:spcPct val="100000"/>
+              </a:lnSpc>
               <a:spcBef>
                 <a:spcPts val="1417"/>
               </a:spcBef>
@@ -1382,6 +1452,9 @@
           </a:p>
           <a:p>
             <a:pPr lvl="1" marL="864000" indent="-324000">
+              <a:lnSpc>
+                <a:spcPct val="100000"/>
+              </a:lnSpc>
               <a:spcBef>
                 <a:spcPts val="1134"/>
               </a:spcBef>
@@ -1414,6 +1487,9 @@
           </a:p>
           <a:p>
             <a:pPr lvl="2" marL="1296000" indent="-288000">
+              <a:lnSpc>
+                <a:spcPct val="100000"/>
+              </a:lnSpc>
               <a:spcBef>
                 <a:spcPts val="850"/>
               </a:spcBef>
@@ -1446,6 +1522,9 @@
           </a:p>
           <a:p>
             <a:pPr lvl="3" marL="1728000" indent="-216000">
+              <a:lnSpc>
+                <a:spcPct val="100000"/>
+              </a:lnSpc>
               <a:spcBef>
                 <a:spcPts val="567"/>
               </a:spcBef>
@@ -1478,6 +1557,9 @@
           </a:p>
           <a:p>
             <a:pPr lvl="4" marL="2160000" indent="-216000">
+              <a:lnSpc>
+                <a:spcPct val="100000"/>
+              </a:lnSpc>
               <a:spcBef>
                 <a:spcPts val="283"/>
               </a:spcBef>
@@ -1510,6 +1592,9 @@
           </a:p>
           <a:p>
             <a:pPr lvl="5" marL="2592000" indent="-216000">
+              <a:lnSpc>
+                <a:spcPct val="100000"/>
+              </a:lnSpc>
               <a:spcBef>
                 <a:spcPts val="283"/>
               </a:spcBef>
@@ -1542,6 +1627,9 @@
           </a:p>
           <a:p>
             <a:pPr lvl="6" marL="3024000" indent="-216000">
+              <a:lnSpc>
+                <a:spcPct val="100000"/>
+              </a:lnSpc>
               <a:spcBef>
                 <a:spcPts val="283"/>
               </a:spcBef>
@@ -1635,8 +1723,8 @@
         </p:nvSpPr>
         <p:spPr>
           <a:xfrm>
-            <a:off x="504000" y="73080"/>
-            <a:ext cx="9070560" cy="1251360"/>
+            <a:off x="504000" y="72720"/>
+            <a:ext cx="9070200" cy="1251720"/>
           </a:xfrm>
           <a:prstGeom prst="rect">
             <a:avLst/>
@@ -1694,8 +1782,8 @@
         </p:nvSpPr>
         <p:spPr>
           <a:xfrm>
-            <a:off x="504000" y="1325520"/>
-            <a:ext cx="9070560" cy="3289320"/>
+            <a:off x="504000" y="1325160"/>
+            <a:ext cx="9070200" cy="3289680"/>
           </a:xfrm>
           <a:prstGeom prst="rect">
             <a:avLst/>
@@ -1937,7 +2025,7 @@
       </p:grpSpPr>
       <p:sp>
         <p:nvSpPr>
-          <p:cNvPr id="31" name="PlaceHolder 1"/>
+          <p:cNvPr id="32" name="PlaceHolder 1"/>
           <p:cNvSpPr>
             <a:spLocks noGrp="1"/>
           </p:cNvSpPr>
@@ -1947,8 +2035,8 @@
         </p:nvSpPr>
         <p:spPr>
           <a:xfrm>
-            <a:off x="504000" y="73080"/>
-            <a:ext cx="9070560" cy="1250640"/>
+            <a:off x="504000" y="72720"/>
+            <a:ext cx="9070200" cy="1250640"/>
           </a:xfrm>
           <a:prstGeom prst="rect">
             <a:avLst/>
@@ -1981,7 +2069,7 @@
                 <a:uFillTx/>
                 <a:latin typeface="Arial"/>
               </a:rPr>
-              <a:t>Way Forward and Learning outcomes</a:t>
+              <a:t>Probability, Real Amplitudes and Imaginary Components</a:t>
             </a:r>
             <a:endParaRPr b="0" lang="en-US" sz="4400" strike="noStrike" u="none">
               <a:solidFill>
@@ -1996,7 +2084,7 @@
       </p:sp>
       <p:sp>
         <p:nvSpPr>
-          <p:cNvPr id="32" name="PlaceHolder 2"/>
+          <p:cNvPr id="33" name="PlaceHolder 2"/>
           <p:cNvSpPr>
             <a:spLocks noGrp="1"/>
           </p:cNvSpPr>
@@ -2007,7 +2095,7 @@
         <p:spPr>
           <a:xfrm>
             <a:off x="504000" y="1326600"/>
-            <a:ext cx="9071640" cy="3288240"/>
+            <a:ext cx="9071280" cy="3287880"/>
           </a:xfrm>
           <a:prstGeom prst="rect">
             <a:avLst/>
@@ -2019,280 +2107,280 @@
         </p:spPr>
         <p:txBody>
           <a:bodyPr lIns="0" rIns="0" tIns="0" bIns="0" anchor="t">
-            <a:normAutofit/>
+            <a:normAutofit fontScale="55000" lnSpcReduction="19999"/>
           </a:bodyPr>
           <a:p>
-            <a:pPr indent="-324000">
-              <a:lnSpc>
-                <a:spcPct val="100000"/>
-              </a:lnSpc>
-              <a:buClr>
-                <a:srgbClr val="000000"/>
-              </a:buClr>
+            <a:pPr marL="432000" indent="-324000">
+              <a:lnSpc>
+                <a:spcPct val="100000"/>
+              </a:lnSpc>
+              <a:spcBef>
+                <a:spcPts val="1417"/>
+              </a:spcBef>
+              <a:buClr>
+                <a:srgbClr val="000000"/>
+              </a:buClr>
+              <a:buSzPct val="45000"/>
               <a:buFont typeface="Wingdings" charset="2"/>
               <a:buChar char=""/>
             </a:pPr>
             <a:r>
-              <a:rPr b="0" lang="en-US" sz="1800" strike="noStrike" u="none">
-                <a:solidFill>
-                  <a:srgbClr val="000000"/>
-                </a:solidFill>
-                <a:effectLst/>
-                <a:uFillTx/>
-                <a:latin typeface="Arial"/>
-              </a:rPr>
-              <a:t>Understood the working principle of Grover's Search Algorithm.</a:t>
-            </a:r>
-            <a:endParaRPr b="0" lang="en-US" sz="1800" strike="noStrike" u="none">
-              <a:solidFill>
-                <a:srgbClr val="000000"/>
-              </a:solidFill>
-              <a:effectLst/>
-              <a:uFillTx/>
-              <a:latin typeface="Arial"/>
-            </a:endParaRPr>
-          </a:p>
-          <a:p>
-            <a:pPr indent="-324000">
-              <a:lnSpc>
-                <a:spcPct val="100000"/>
-              </a:lnSpc>
-              <a:buClr>
-                <a:srgbClr val="000000"/>
-              </a:buClr>
+              <a:rPr b="0" lang="en-US" sz="3200" strike="noStrike" u="none">
+                <a:solidFill>
+                  <a:srgbClr val="000000"/>
+                </a:solidFill>
+                <a:effectLst/>
+                <a:uFillTx/>
+                <a:latin typeface="Arial"/>
+              </a:rPr>
+              <a:t>The green curve represents the probability of measuring the marked state (|1101&gt;).</a:t>
+            </a:r>
+            <a:endParaRPr b="0" lang="en-US" sz="3200" strike="noStrike" u="none">
+              <a:solidFill>
+                <a:srgbClr val="000000"/>
+              </a:solidFill>
+              <a:effectLst/>
+              <a:uFillTx/>
+              <a:latin typeface="Arial"/>
+            </a:endParaRPr>
+          </a:p>
+          <a:p>
+            <a:pPr marL="432000" indent="-324000">
+              <a:lnSpc>
+                <a:spcPct val="100000"/>
+              </a:lnSpc>
+              <a:spcBef>
+                <a:spcPts val="1417"/>
+              </a:spcBef>
+              <a:buClr>
+                <a:srgbClr val="000000"/>
+              </a:buClr>
+              <a:buSzPct val="45000"/>
               <a:buFont typeface="Wingdings" charset="2"/>
               <a:buChar char=""/>
             </a:pPr>
             <a:r>
-              <a:rPr b="0" lang="en-US" sz="1800" strike="noStrike" u="none">
-                <a:solidFill>
-                  <a:srgbClr val="000000"/>
-                </a:solidFill>
-                <a:effectLst/>
-                <a:uFillTx/>
-                <a:latin typeface="Arial"/>
-              </a:rPr>
-              <a:t>Learned Oracle construction.</a:t>
-            </a:r>
-            <a:endParaRPr b="0" lang="en-US" sz="1800" strike="noStrike" u="none">
-              <a:solidFill>
-                <a:srgbClr val="000000"/>
-              </a:solidFill>
-              <a:effectLst/>
-              <a:uFillTx/>
-              <a:latin typeface="Arial"/>
-            </a:endParaRPr>
-          </a:p>
-          <a:p>
-            <a:pPr indent="-324000">
-              <a:lnSpc>
-                <a:spcPct val="100000"/>
-              </a:lnSpc>
-              <a:buClr>
-                <a:srgbClr val="000000"/>
-              </a:buClr>
+              <a:rPr b="0" lang="en-US" sz="3200" strike="noStrike" u="none">
+                <a:solidFill>
+                  <a:srgbClr val="000000"/>
+                </a:solidFill>
+                <a:effectLst/>
+                <a:uFillTx/>
+                <a:latin typeface="Arial"/>
+              </a:rPr>
+              <a:t>The red curve represents the real amplitude of the marked state.</a:t>
+            </a:r>
+            <a:endParaRPr b="0" lang="en-US" sz="3200" strike="noStrike" u="none">
+              <a:solidFill>
+                <a:srgbClr val="000000"/>
+              </a:solidFill>
+              <a:effectLst/>
+              <a:uFillTx/>
+              <a:latin typeface="Arial"/>
+            </a:endParaRPr>
+          </a:p>
+          <a:p>
+            <a:pPr marL="432000" indent="-324000">
+              <a:lnSpc>
+                <a:spcPct val="100000"/>
+              </a:lnSpc>
+              <a:spcBef>
+                <a:spcPts val="1417"/>
+              </a:spcBef>
+              <a:buClr>
+                <a:srgbClr val="000000"/>
+              </a:buClr>
+              <a:buSzPct val="45000"/>
               <a:buFont typeface="Wingdings" charset="2"/>
               <a:buChar char=""/>
             </a:pPr>
             <a:r>
-              <a:rPr b="0" lang="en-US" sz="1800" strike="noStrike" u="none">
-                <a:solidFill>
-                  <a:srgbClr val="000000"/>
-                </a:solidFill>
-                <a:effectLst/>
-                <a:uFillTx/>
-                <a:latin typeface="Arial"/>
-              </a:rPr>
-              <a:t>Learned the Diffusion operator.</a:t>
-            </a:r>
-            <a:endParaRPr b="0" lang="en-US" sz="1800" strike="noStrike" u="none">
-              <a:solidFill>
-                <a:srgbClr val="000000"/>
-              </a:solidFill>
-              <a:effectLst/>
-              <a:uFillTx/>
-              <a:latin typeface="Arial"/>
-            </a:endParaRPr>
-          </a:p>
-          <a:p>
-            <a:pPr indent="-324000">
-              <a:lnSpc>
-                <a:spcPct val="100000"/>
-              </a:lnSpc>
-              <a:buClr>
-                <a:srgbClr val="000000"/>
-              </a:buClr>
+              <a:rPr b="0" lang="en-US" sz="3200" strike="noStrike" u="none">
+                <a:solidFill>
+                  <a:srgbClr val="000000"/>
+                </a:solidFill>
+                <a:effectLst/>
+                <a:uFillTx/>
+                <a:latin typeface="Arial"/>
+              </a:rPr>
+              <a:t>The purple curve represents the average real amplitude of the search register.</a:t>
+            </a:r>
+            <a:endParaRPr b="0" lang="en-US" sz="3200" strike="noStrike" u="none">
+              <a:solidFill>
+                <a:srgbClr val="000000"/>
+              </a:solidFill>
+              <a:effectLst/>
+              <a:uFillTx/>
+              <a:latin typeface="Arial"/>
+            </a:endParaRPr>
+          </a:p>
+          <a:p>
+            <a:pPr marL="432000" indent="-324000">
+              <a:lnSpc>
+                <a:spcPct val="100000"/>
+              </a:lnSpc>
+              <a:spcBef>
+                <a:spcPts val="1417"/>
+              </a:spcBef>
+              <a:buClr>
+                <a:srgbClr val="000000"/>
+              </a:buClr>
+              <a:buSzPct val="45000"/>
               <a:buFont typeface="Wingdings" charset="2"/>
               <a:buChar char=""/>
             </a:pPr>
             <a:r>
-              <a:rPr b="0" lang="en-US" sz="1800" strike="noStrike" u="none">
-                <a:solidFill>
-                  <a:srgbClr val="000000"/>
-                </a:solidFill>
-                <a:effectLst/>
-                <a:uFillTx/>
-                <a:latin typeface="Arial"/>
-              </a:rPr>
-              <a:t>Understood amplitude amplification.</a:t>
-            </a:r>
-            <a:endParaRPr b="0" lang="en-US" sz="1800" strike="noStrike" u="none">
-              <a:solidFill>
-                <a:srgbClr val="000000"/>
-              </a:solidFill>
-              <a:effectLst/>
-              <a:uFillTx/>
-              <a:latin typeface="Arial"/>
-            </a:endParaRPr>
-          </a:p>
-          <a:p>
-            <a:pPr indent="-324000">
-              <a:lnSpc>
-                <a:spcPct val="100000"/>
-              </a:lnSpc>
-              <a:buClr>
-                <a:srgbClr val="000000"/>
-              </a:buClr>
+              <a:rPr b="0" lang="en-US" sz="3200" strike="noStrike" u="none">
+                <a:solidFill>
+                  <a:srgbClr val="000000"/>
+                </a:solidFill>
+                <a:effectLst/>
+                <a:uFillTx/>
+                <a:latin typeface="Arial"/>
+              </a:rPr>
+              <a:t>The probability of the marked state increases rapidly after successive Grover iterations.</a:t>
+            </a:r>
+            <a:endParaRPr b="0" lang="en-US" sz="3200" strike="noStrike" u="none">
+              <a:solidFill>
+                <a:srgbClr val="000000"/>
+              </a:solidFill>
+              <a:effectLst/>
+              <a:uFillTx/>
+              <a:latin typeface="Arial"/>
+            </a:endParaRPr>
+          </a:p>
+          <a:p>
+            <a:pPr marL="432000" indent="-324000">
+              <a:lnSpc>
+                <a:spcPct val="100000"/>
+              </a:lnSpc>
+              <a:spcBef>
+                <a:spcPts val="1417"/>
+              </a:spcBef>
+              <a:buClr>
+                <a:srgbClr val="000000"/>
+              </a:buClr>
+              <a:buSzPct val="45000"/>
               <a:buFont typeface="Wingdings" charset="2"/>
               <a:buChar char=""/>
             </a:pPr>
             <a:r>
-              <a:rPr b="0" lang="en-US" sz="1800" strike="noStrike" u="none">
-                <a:solidFill>
-                  <a:srgbClr val="000000"/>
-                </a:solidFill>
-                <a:effectLst/>
-                <a:uFillTx/>
-                <a:latin typeface="Arial"/>
-              </a:rPr>
-              <a:t>Analysed measurement statistics.</a:t>
-            </a:r>
-            <a:endParaRPr b="0" lang="en-US" sz="1800" strike="noStrike" u="none">
-              <a:solidFill>
-                <a:srgbClr val="000000"/>
-              </a:solidFill>
-              <a:effectLst/>
-              <a:uFillTx/>
-              <a:latin typeface="Arial"/>
-            </a:endParaRPr>
-          </a:p>
-          <a:p>
-            <a:pPr indent="0">
-              <a:lnSpc>
-                <a:spcPct val="100000"/>
-              </a:lnSpc>
-              <a:buNone/>
-            </a:pPr>
-            <a:endParaRPr b="0" lang="en-US" sz="1800" strike="noStrike" u="none">
-              <a:solidFill>
-                <a:srgbClr val="000000"/>
-              </a:solidFill>
-              <a:effectLst/>
-              <a:uFillTx/>
-              <a:latin typeface="Arial"/>
-            </a:endParaRPr>
-          </a:p>
-          <a:p>
-            <a:pPr indent="0">
-              <a:lnSpc>
-                <a:spcPct val="100000"/>
-              </a:lnSpc>
-              <a:buNone/>
-            </a:pPr>
-            <a:endParaRPr b="0" lang="en-US" sz="1800" strike="noStrike" u="none">
-              <a:solidFill>
-                <a:srgbClr val="000000"/>
-              </a:solidFill>
-              <a:effectLst/>
-              <a:uFillTx/>
-              <a:latin typeface="Arial"/>
-            </a:endParaRPr>
-          </a:p>
-          <a:p>
-            <a:pPr indent="-324000">
-              <a:lnSpc>
-                <a:spcPct val="100000"/>
-              </a:lnSpc>
-              <a:buClr>
-                <a:srgbClr val="000000"/>
-              </a:buClr>
+              <a:rPr b="0" lang="en-US" sz="3200" strike="noStrike" u="none">
+                <a:solidFill>
+                  <a:srgbClr val="000000"/>
+                </a:solidFill>
+                <a:effectLst/>
+                <a:uFillTx/>
+                <a:latin typeface="Arial"/>
+              </a:rPr>
+              <a:t>Beyond the optimal number of iterations, the probability decreases due to the oscillatory nature of Grover's algorithm.</a:t>
+            </a:r>
+            <a:endParaRPr b="0" lang="en-US" sz="3200" strike="noStrike" u="none">
+              <a:solidFill>
+                <a:srgbClr val="000000"/>
+              </a:solidFill>
+              <a:effectLst/>
+              <a:uFillTx/>
+              <a:latin typeface="Arial"/>
+            </a:endParaRPr>
+          </a:p>
+          <a:p>
+            <a:pPr marL="432000" indent="-324000">
+              <a:lnSpc>
+                <a:spcPct val="100000"/>
+              </a:lnSpc>
+              <a:spcBef>
+                <a:spcPts val="1417"/>
+              </a:spcBef>
+              <a:buClr>
+                <a:srgbClr val="000000"/>
+              </a:buClr>
+              <a:buSzPct val="45000"/>
               <a:buFont typeface="Wingdings" charset="2"/>
               <a:buChar char=""/>
             </a:pPr>
             <a:r>
-              <a:rPr b="0" lang="en-US" sz="1800" strike="noStrike" u="none">
-                <a:solidFill>
-                  <a:srgbClr val="000000"/>
-                </a:solidFill>
-                <a:effectLst/>
-                <a:uFillTx/>
-                <a:latin typeface="Arial"/>
-              </a:rPr>
-              <a:t>Extend the implementation to multiple marked states.</a:t>
-            </a:r>
-            <a:endParaRPr b="0" lang="en-US" sz="1800" strike="noStrike" u="none">
-              <a:solidFill>
-                <a:srgbClr val="000000"/>
-              </a:solidFill>
-              <a:effectLst/>
-              <a:uFillTx/>
-              <a:latin typeface="Arial"/>
-            </a:endParaRPr>
-          </a:p>
-          <a:p>
-            <a:pPr indent="-324000">
-              <a:lnSpc>
-                <a:spcPct val="100000"/>
-              </a:lnSpc>
-              <a:buClr>
-                <a:srgbClr val="000000"/>
-              </a:buClr>
+              <a:rPr b="0" lang="en-US" sz="3200" strike="noStrike" u="none">
+                <a:solidFill>
+                  <a:srgbClr val="000000"/>
+                </a:solidFill>
+                <a:effectLst/>
+                <a:uFillTx/>
+                <a:latin typeface="Arial"/>
+              </a:rPr>
+              <a:t>Imaginary amplitudes remain approximately zero throughout the computation.</a:t>
+            </a:r>
+            <a:endParaRPr b="0" lang="en-US" sz="3200" strike="noStrike" u="none">
+              <a:solidFill>
+                <a:srgbClr val="000000"/>
+              </a:solidFill>
+              <a:effectLst/>
+              <a:uFillTx/>
+              <a:latin typeface="Arial"/>
+            </a:endParaRPr>
+          </a:p>
+          <a:p>
+            <a:pPr marL="432000" indent="-324000">
+              <a:lnSpc>
+                <a:spcPct val="100000"/>
+              </a:lnSpc>
+              <a:spcBef>
+                <a:spcPts val="1417"/>
+              </a:spcBef>
+              <a:buClr>
+                <a:srgbClr val="000000"/>
+              </a:buClr>
+              <a:buSzPct val="45000"/>
               <a:buFont typeface="Wingdings" charset="2"/>
               <a:buChar char=""/>
             </a:pPr>
             <a:r>
-              <a:rPr b="0" lang="en-US" sz="1800" strike="noStrike" u="none">
-                <a:solidFill>
-                  <a:srgbClr val="000000"/>
-                </a:solidFill>
-                <a:effectLst/>
-                <a:uFillTx/>
-                <a:latin typeface="Arial"/>
-              </a:rPr>
-              <a:t>Increase the search space using more qubits.</a:t>
-            </a:r>
-            <a:endParaRPr b="0" lang="en-US" sz="1800" strike="noStrike" u="none">
-              <a:solidFill>
-                <a:srgbClr val="000000"/>
-              </a:solidFill>
-              <a:effectLst/>
-              <a:uFillTx/>
-              <a:latin typeface="Arial"/>
-            </a:endParaRPr>
-          </a:p>
-          <a:p>
-            <a:pPr indent="-324000">
-              <a:lnSpc>
-                <a:spcPct val="100000"/>
-              </a:lnSpc>
-              <a:buClr>
-                <a:srgbClr val="000000"/>
-              </a:buClr>
+              <a:rPr b="0" lang="en-US" sz="3200" strike="noStrike" u="none">
+                <a:solidFill>
+                  <a:srgbClr val="000000"/>
+                </a:solidFill>
+                <a:effectLst/>
+                <a:uFillTx/>
+                <a:latin typeface="Arial"/>
+              </a:rPr>
+              <a:t>This confirms that the implementation behaves as expected.</a:t>
+            </a:r>
+            <a:endParaRPr b="0" lang="en-US" sz="3200" strike="noStrike" u="none">
+              <a:solidFill>
+                <a:srgbClr val="000000"/>
+              </a:solidFill>
+              <a:effectLst/>
+              <a:uFillTx/>
+              <a:latin typeface="Arial"/>
+            </a:endParaRPr>
+          </a:p>
+          <a:p>
+            <a:pPr marL="432000" indent="-324000">
+              <a:lnSpc>
+                <a:spcPct val="100000"/>
+              </a:lnSpc>
+              <a:spcBef>
+                <a:spcPts val="1417"/>
+              </a:spcBef>
+              <a:buClr>
+                <a:srgbClr val="000000"/>
+              </a:buClr>
+              <a:buSzPct val="45000"/>
               <a:buFont typeface="Wingdings" charset="2"/>
               <a:buChar char=""/>
             </a:pPr>
             <a:r>
-              <a:rPr b="0" lang="en-US" sz="1800" strike="noStrike" u="none">
-                <a:solidFill>
-                  <a:srgbClr val="000000"/>
-                </a:solidFill>
-                <a:effectLst/>
-                <a:uFillTx/>
-                <a:latin typeface="Arial"/>
-              </a:rPr>
-              <a:t>Compare the algorithm with classical search methods.</a:t>
-            </a:r>
-            <a:endParaRPr b="0" lang="en-US" sz="1800" strike="noStrike" u="none">
+              <a:rPr b="0" lang="en-US" sz="3200" strike="noStrike" u="none">
+                <a:solidFill>
+                  <a:srgbClr val="000000"/>
+                </a:solidFill>
+                <a:effectLst/>
+                <a:uFillTx/>
+                <a:latin typeface="Arial"/>
+              </a:rPr>
+              <a:t>The evolution occurs almost entirely in the real amplitude space.</a:t>
+            </a:r>
+            <a:endParaRPr b="0" lang="en-US" sz="3200" strike="noStrike" u="none">
               <a:solidFill>
                 <a:srgbClr val="000000"/>
               </a:solidFill>
@@ -2335,7 +2423,7 @@
       </p:grpSpPr>
       <p:sp>
         <p:nvSpPr>
-          <p:cNvPr id="33" name="PlaceHolder 1"/>
+          <p:cNvPr id="34" name="PlaceHolder 1"/>
           <p:cNvSpPr>
             <a:spLocks noGrp="1"/>
           </p:cNvSpPr>
@@ -2345,8 +2433,8 @@
         </p:nvSpPr>
         <p:spPr>
           <a:xfrm>
-            <a:off x="504000" y="385560"/>
-            <a:ext cx="9070560" cy="625680"/>
+            <a:off x="504000" y="72720"/>
+            <a:ext cx="9070200" cy="1251000"/>
           </a:xfrm>
           <a:prstGeom prst="rect">
             <a:avLst/>
@@ -2379,7 +2467,7 @@
                 <a:uFillTx/>
                 <a:latin typeface="Arial"/>
               </a:rPr>
-              <a:t>References</a:t>
+              <a:t>Way Forward and Learning outcomes</a:t>
             </a:r>
             <a:endParaRPr b="0" lang="en-US" sz="4400" strike="noStrike" u="none">
               <a:solidFill>
@@ -2394,7 +2482,7 @@
       </p:sp>
       <p:sp>
         <p:nvSpPr>
-          <p:cNvPr id="34" name="PlaceHolder 2"/>
+          <p:cNvPr id="35" name="PlaceHolder 2"/>
           <p:cNvSpPr>
             <a:spLocks noGrp="1"/>
           </p:cNvSpPr>
@@ -2405,7 +2493,7 @@
         <p:spPr>
           <a:xfrm>
             <a:off x="504000" y="1326600"/>
-            <a:ext cx="9071640" cy="3288240"/>
+            <a:ext cx="9071280" cy="3287880"/>
           </a:xfrm>
           <a:prstGeom prst="rect">
             <a:avLst/>
@@ -2420,39 +2508,7 @@
             <a:normAutofit/>
           </a:bodyPr>
           <a:p>
-            <a:pPr indent="0">
-              <a:lnSpc>
-                <a:spcPct val="100000"/>
-              </a:lnSpc>
-              <a:buNone/>
-            </a:pPr>
-            <a:endParaRPr b="0" lang="en-US" sz="2200" strike="noStrike" u="none">
-              <a:solidFill>
-                <a:srgbClr val="000000"/>
-              </a:solidFill>
-              <a:effectLst/>
-              <a:uFillTx/>
-              <a:latin typeface="Arial"/>
-            </a:endParaRPr>
-          </a:p>
-          <a:p>
-            <a:pPr indent="0">
-              <a:lnSpc>
-                <a:spcPct val="100000"/>
-              </a:lnSpc>
-              <a:buNone/>
-            </a:pPr>
-            <a:endParaRPr b="0" lang="en-US" sz="2200" strike="noStrike" u="none">
-              <a:solidFill>
-                <a:srgbClr val="000000"/>
-              </a:solidFill>
-              <a:effectLst/>
-              <a:uFillTx/>
-              <a:latin typeface="Arial"/>
-            </a:endParaRPr>
-          </a:p>
-          <a:p>
-            <a:pPr indent="-324000">
+            <a:pPr marL="432000" indent="-324000">
               <a:lnSpc>
                 <a:spcPct val="100000"/>
               </a:lnSpc>
@@ -2463,43 +2519,27 @@
               <a:buChar char=""/>
             </a:pPr>
             <a:r>
-              <a:rPr b="0" lang="en-US" sz="2200" strike="noStrike" u="none">
-                <a:solidFill>
-                  <a:srgbClr val="000000"/>
-                </a:solidFill>
-                <a:effectLst/>
-                <a:uFillTx/>
-                <a:latin typeface="Arial"/>
-              </a:rPr>
-              <a:t>Qiskit Documentation.</a:t>
-            </a:r>
-            <a:endParaRPr b="0" lang="en-US" sz="2200" strike="noStrike" u="none">
-              <a:solidFill>
-                <a:srgbClr val="000000"/>
-              </a:solidFill>
-              <a:effectLst/>
-              <a:uFillTx/>
-              <a:latin typeface="Arial"/>
-            </a:endParaRPr>
-          </a:p>
-          <a:p>
-            <a:pPr indent="0">
-              <a:lnSpc>
-                <a:spcPct val="100000"/>
-              </a:lnSpc>
-              <a:buNone/>
-            </a:pPr>
-            <a:endParaRPr b="0" lang="en-US" sz="2200" strike="noStrike" u="none">
-              <a:solidFill>
-                <a:srgbClr val="000000"/>
-              </a:solidFill>
-              <a:effectLst/>
-              <a:uFillTx/>
-              <a:latin typeface="Arial"/>
-            </a:endParaRPr>
-          </a:p>
-          <a:p>
-            <a:pPr indent="-324000">
+              <a:rPr b="0" lang="en-US" sz="1800" strike="noStrike" u="none">
+                <a:solidFill>
+                  <a:srgbClr val="000000"/>
+                </a:solidFill>
+                <a:effectLst/>
+                <a:uFillTx/>
+                <a:latin typeface="Arial"/>
+              </a:rPr>
+              <a:t>Understood the working principle of Grover's Search Algorithm.</a:t>
+            </a:r>
+            <a:endParaRPr b="0" lang="en-US" sz="1800" strike="noStrike" u="none">
+              <a:solidFill>
+                <a:srgbClr val="000000"/>
+              </a:solidFill>
+              <a:effectLst/>
+              <a:uFillTx/>
+              <a:latin typeface="Arial"/>
+            </a:endParaRPr>
+          </a:p>
+          <a:p>
+            <a:pPr marL="432000" indent="-324000">
               <a:lnSpc>
                 <a:spcPct val="100000"/>
               </a:lnSpc>
@@ -2510,6 +2550,429 @@
               <a:buChar char=""/>
             </a:pPr>
             <a:r>
+              <a:rPr b="0" lang="en-US" sz="1800" strike="noStrike" u="none">
+                <a:solidFill>
+                  <a:srgbClr val="000000"/>
+                </a:solidFill>
+                <a:effectLst/>
+                <a:uFillTx/>
+                <a:latin typeface="Arial"/>
+              </a:rPr>
+              <a:t>Learned Oracle construction.</a:t>
+            </a:r>
+            <a:endParaRPr b="0" lang="en-US" sz="1800" strike="noStrike" u="none">
+              <a:solidFill>
+                <a:srgbClr val="000000"/>
+              </a:solidFill>
+              <a:effectLst/>
+              <a:uFillTx/>
+              <a:latin typeface="Arial"/>
+            </a:endParaRPr>
+          </a:p>
+          <a:p>
+            <a:pPr marL="432000" indent="-324000">
+              <a:lnSpc>
+                <a:spcPct val="100000"/>
+              </a:lnSpc>
+              <a:buClr>
+                <a:srgbClr val="000000"/>
+              </a:buClr>
+              <a:buFont typeface="Wingdings" charset="2"/>
+              <a:buChar char=""/>
+            </a:pPr>
+            <a:r>
+              <a:rPr b="0" lang="en-US" sz="1800" strike="noStrike" u="none">
+                <a:solidFill>
+                  <a:srgbClr val="000000"/>
+                </a:solidFill>
+                <a:effectLst/>
+                <a:uFillTx/>
+                <a:latin typeface="Arial"/>
+              </a:rPr>
+              <a:t>Learned the Diffusion operator.</a:t>
+            </a:r>
+            <a:endParaRPr b="0" lang="en-US" sz="1800" strike="noStrike" u="none">
+              <a:solidFill>
+                <a:srgbClr val="000000"/>
+              </a:solidFill>
+              <a:effectLst/>
+              <a:uFillTx/>
+              <a:latin typeface="Arial"/>
+            </a:endParaRPr>
+          </a:p>
+          <a:p>
+            <a:pPr marL="432000" indent="-324000">
+              <a:lnSpc>
+                <a:spcPct val="100000"/>
+              </a:lnSpc>
+              <a:buClr>
+                <a:srgbClr val="000000"/>
+              </a:buClr>
+              <a:buFont typeface="Wingdings" charset="2"/>
+              <a:buChar char=""/>
+            </a:pPr>
+            <a:r>
+              <a:rPr b="0" lang="en-US" sz="1800" strike="noStrike" u="none">
+                <a:solidFill>
+                  <a:srgbClr val="000000"/>
+                </a:solidFill>
+                <a:effectLst/>
+                <a:uFillTx/>
+                <a:latin typeface="Arial"/>
+              </a:rPr>
+              <a:t>Understood amplitude amplification.</a:t>
+            </a:r>
+            <a:endParaRPr b="0" lang="en-US" sz="1800" strike="noStrike" u="none">
+              <a:solidFill>
+                <a:srgbClr val="000000"/>
+              </a:solidFill>
+              <a:effectLst/>
+              <a:uFillTx/>
+              <a:latin typeface="Arial"/>
+            </a:endParaRPr>
+          </a:p>
+          <a:p>
+            <a:pPr marL="432000" indent="-324000">
+              <a:lnSpc>
+                <a:spcPct val="100000"/>
+              </a:lnSpc>
+              <a:buClr>
+                <a:srgbClr val="000000"/>
+              </a:buClr>
+              <a:buFont typeface="Wingdings" charset="2"/>
+              <a:buChar char=""/>
+            </a:pPr>
+            <a:r>
+              <a:rPr b="0" lang="en-US" sz="1800" strike="noStrike" u="none">
+                <a:solidFill>
+                  <a:srgbClr val="000000"/>
+                </a:solidFill>
+                <a:effectLst/>
+                <a:uFillTx/>
+                <a:latin typeface="Arial"/>
+              </a:rPr>
+              <a:t>Analysed measurement statistics.</a:t>
+            </a:r>
+            <a:endParaRPr b="0" lang="en-US" sz="1800" strike="noStrike" u="none">
+              <a:solidFill>
+                <a:srgbClr val="000000"/>
+              </a:solidFill>
+              <a:effectLst/>
+              <a:uFillTx/>
+              <a:latin typeface="Arial"/>
+            </a:endParaRPr>
+          </a:p>
+          <a:p>
+            <a:pPr indent="0">
+              <a:lnSpc>
+                <a:spcPct val="100000"/>
+              </a:lnSpc>
+              <a:buNone/>
+              <a:tabLst>
+                <a:tab algn="l" pos="0"/>
+              </a:tabLst>
+            </a:pPr>
+            <a:endParaRPr b="0" lang="en-US" sz="1800" strike="noStrike" u="none">
+              <a:solidFill>
+                <a:srgbClr val="000000"/>
+              </a:solidFill>
+              <a:effectLst/>
+              <a:uFillTx/>
+              <a:latin typeface="Arial"/>
+            </a:endParaRPr>
+          </a:p>
+          <a:p>
+            <a:pPr indent="0">
+              <a:lnSpc>
+                <a:spcPct val="100000"/>
+              </a:lnSpc>
+              <a:buNone/>
+              <a:tabLst>
+                <a:tab algn="l" pos="0"/>
+              </a:tabLst>
+            </a:pPr>
+            <a:endParaRPr b="0" lang="en-US" sz="1800" strike="noStrike" u="none">
+              <a:solidFill>
+                <a:srgbClr val="000000"/>
+              </a:solidFill>
+              <a:effectLst/>
+              <a:uFillTx/>
+              <a:latin typeface="Arial"/>
+            </a:endParaRPr>
+          </a:p>
+          <a:p>
+            <a:pPr marL="432000" indent="-324000">
+              <a:lnSpc>
+                <a:spcPct val="100000"/>
+              </a:lnSpc>
+              <a:buClr>
+                <a:srgbClr val="000000"/>
+              </a:buClr>
+              <a:buFont typeface="Wingdings" charset="2"/>
+              <a:buChar char=""/>
+              <a:tabLst>
+                <a:tab algn="l" pos="0"/>
+              </a:tabLst>
+            </a:pPr>
+            <a:r>
+              <a:rPr b="0" lang="en-US" sz="1800" strike="noStrike" u="none">
+                <a:solidFill>
+                  <a:srgbClr val="000000"/>
+                </a:solidFill>
+                <a:effectLst/>
+                <a:uFillTx/>
+                <a:latin typeface="Arial"/>
+              </a:rPr>
+              <a:t>Extend the implementation to multiple marked states.</a:t>
+            </a:r>
+            <a:endParaRPr b="0" lang="en-US" sz="1800" strike="noStrike" u="none">
+              <a:solidFill>
+                <a:srgbClr val="000000"/>
+              </a:solidFill>
+              <a:effectLst/>
+              <a:uFillTx/>
+              <a:latin typeface="Arial"/>
+            </a:endParaRPr>
+          </a:p>
+          <a:p>
+            <a:pPr marL="432000" indent="-324000">
+              <a:lnSpc>
+                <a:spcPct val="100000"/>
+              </a:lnSpc>
+              <a:buClr>
+                <a:srgbClr val="000000"/>
+              </a:buClr>
+              <a:buFont typeface="Wingdings" charset="2"/>
+              <a:buChar char=""/>
+              <a:tabLst>
+                <a:tab algn="l" pos="0"/>
+              </a:tabLst>
+            </a:pPr>
+            <a:r>
+              <a:rPr b="0" lang="en-US" sz="1800" strike="noStrike" u="none">
+                <a:solidFill>
+                  <a:srgbClr val="000000"/>
+                </a:solidFill>
+                <a:effectLst/>
+                <a:uFillTx/>
+                <a:latin typeface="Arial"/>
+              </a:rPr>
+              <a:t>Increase the search space using more qubits.</a:t>
+            </a:r>
+            <a:endParaRPr b="0" lang="en-US" sz="1800" strike="noStrike" u="none">
+              <a:solidFill>
+                <a:srgbClr val="000000"/>
+              </a:solidFill>
+              <a:effectLst/>
+              <a:uFillTx/>
+              <a:latin typeface="Arial"/>
+            </a:endParaRPr>
+          </a:p>
+          <a:p>
+            <a:pPr marL="432000" indent="-324000">
+              <a:lnSpc>
+                <a:spcPct val="100000"/>
+              </a:lnSpc>
+              <a:buClr>
+                <a:srgbClr val="000000"/>
+              </a:buClr>
+              <a:buFont typeface="Wingdings" charset="2"/>
+              <a:buChar char=""/>
+              <a:tabLst>
+                <a:tab algn="l" pos="0"/>
+              </a:tabLst>
+            </a:pPr>
+            <a:r>
+              <a:rPr b="0" lang="en-US" sz="1800" strike="noStrike" u="none">
+                <a:solidFill>
+                  <a:srgbClr val="000000"/>
+                </a:solidFill>
+                <a:effectLst/>
+                <a:uFillTx/>
+                <a:latin typeface="Arial"/>
+              </a:rPr>
+              <a:t>Compare the algorithm with classical search methods.</a:t>
+            </a:r>
+            <a:endParaRPr b="0" lang="en-US" sz="1800" strike="noStrike" u="none">
+              <a:solidFill>
+                <a:srgbClr val="000000"/>
+              </a:solidFill>
+              <a:effectLst/>
+              <a:uFillTx/>
+              <a:latin typeface="Arial"/>
+            </a:endParaRPr>
+          </a:p>
+        </p:txBody>
+      </p:sp>
+    </p:spTree>
+  </p:cSld>
+  <mc:AlternateContent>
+    <mc:Choice Requires="p14">
+      <p:transition spd="slow" p14:dur="2000"/>
+    </mc:Choice>
+    <mc:Fallback>
+      <p:transition spd="slow"/>
+    </mc:Fallback>
+  </mc:AlternateContent>
+</p:sld>
+</file>
+
+<file path=ppt/slides/slide12.xml><?xml version="1.0" encoding="utf-8"?>
+<p:sld xmlns:a="http://schemas.openxmlformats.org/drawingml/2006/main" xmlns:p="http://schemas.openxmlformats.org/presentationml/2006/main" xmlns:r="http://schemas.openxmlformats.org/officeDocument/2006/relationships" xmlns:p14="http://schemas.microsoft.com/office/powerpoint/2010/main" xmlns:p15="http://schemas.microsoft.com/office/powerpoint/2012/main" xmlns:mc="http://schemas.openxmlformats.org/markup-compatibility/2006">
+  <p:cSld>
+    <p:spTree>
+      <p:nvGrpSpPr>
+        <p:cNvPr id="1" name=""/>
+        <p:cNvGrpSpPr/>
+        <p:nvPr/>
+      </p:nvGrpSpPr>
+      <p:grpSpPr>
+        <a:xfrm>
+          <a:off x="0" y="0"/>
+          <a:ext cx="0" cy="0"/>
+          <a:chOff x="0" y="0"/>
+          <a:chExt cx="0" cy="0"/>
+        </a:xfrm>
+      </p:grpSpPr>
+      <p:sp>
+        <p:nvSpPr>
+          <p:cNvPr id="36" name="PlaceHolder 1"/>
+          <p:cNvSpPr>
+            <a:spLocks noGrp="1"/>
+          </p:cNvSpPr>
+          <p:nvPr>
+            <p:ph type="title"/>
+          </p:nvPr>
+        </p:nvSpPr>
+        <p:spPr>
+          <a:xfrm>
+            <a:off x="504000" y="385200"/>
+            <a:ext cx="9070200" cy="626040"/>
+          </a:xfrm>
+          <a:prstGeom prst="rect">
+            <a:avLst/>
+          </a:prstGeom>
+          <a:noFill/>
+          <a:ln w="0">
+            <a:noFill/>
+          </a:ln>
+        </p:spPr>
+        <p:txBody>
+          <a:bodyPr lIns="0" rIns="0" tIns="0" bIns="0" anchor="ctr">
+            <a:spAutoFit/>
+          </a:bodyPr>
+          <a:p>
+            <a:pPr indent="0" algn="ctr">
+              <a:lnSpc>
+                <a:spcPct val="100000"/>
+              </a:lnSpc>
+              <a:buNone/>
+              <a:tabLst>
+                <a:tab algn="l" pos="0"/>
+              </a:tabLst>
+            </a:pPr>
+            <a:r>
+              <a:rPr b="0" lang="en-US" sz="4400" strike="noStrike" u="none">
+                <a:solidFill>
+                  <a:srgbClr val="000000"/>
+                </a:solidFill>
+                <a:effectLst/>
+                <a:uFillTx/>
+                <a:latin typeface="Arial"/>
+              </a:rPr>
+              <a:t>References</a:t>
+            </a:r>
+            <a:endParaRPr b="0" lang="en-US" sz="4400" strike="noStrike" u="none">
+              <a:solidFill>
+                <a:srgbClr val="000000"/>
+              </a:solidFill>
+              <a:effectLst/>
+              <a:uFillTx/>
+              <a:latin typeface="Arial"/>
+            </a:endParaRPr>
+          </a:p>
+        </p:txBody>
+      </p:sp>
+      <p:sp>
+        <p:nvSpPr>
+          <p:cNvPr id="37" name="PlaceHolder 2"/>
+          <p:cNvSpPr>
+            <a:spLocks noGrp="1"/>
+          </p:cNvSpPr>
+          <p:nvPr>
+            <p:ph/>
+          </p:nvPr>
+        </p:nvSpPr>
+        <p:spPr>
+          <a:xfrm>
+            <a:off x="504000" y="1326600"/>
+            <a:ext cx="9071280" cy="3287880"/>
+          </a:xfrm>
+          <a:prstGeom prst="rect">
+            <a:avLst/>
+          </a:prstGeom>
+          <a:noFill/>
+          <a:ln w="0">
+            <a:noFill/>
+          </a:ln>
+        </p:spPr>
+        <p:txBody>
+          <a:bodyPr lIns="0" rIns="0" tIns="0" bIns="0" anchor="t">
+            <a:normAutofit/>
+          </a:bodyPr>
+          <a:p>
+            <a:pPr indent="0">
+              <a:lnSpc>
+                <a:spcPct val="100000"/>
+              </a:lnSpc>
+              <a:buNone/>
+              <a:tabLst>
+                <a:tab algn="l" pos="0"/>
+              </a:tabLst>
+            </a:pPr>
+            <a:endParaRPr b="0" lang="en-US" sz="2200" strike="noStrike" u="none">
+              <a:solidFill>
+                <a:srgbClr val="000000"/>
+              </a:solidFill>
+              <a:effectLst/>
+              <a:uFillTx/>
+              <a:latin typeface="Arial"/>
+            </a:endParaRPr>
+          </a:p>
+          <a:p>
+            <a:pPr indent="0">
+              <a:lnSpc>
+                <a:spcPct val="100000"/>
+              </a:lnSpc>
+              <a:buNone/>
+              <a:tabLst>
+                <a:tab algn="l" pos="0"/>
+              </a:tabLst>
+            </a:pPr>
+            <a:endParaRPr b="0" lang="en-US" sz="2200" strike="noStrike" u="none">
+              <a:solidFill>
+                <a:srgbClr val="000000"/>
+              </a:solidFill>
+              <a:effectLst/>
+              <a:uFillTx/>
+              <a:latin typeface="Arial"/>
+            </a:endParaRPr>
+          </a:p>
+          <a:p>
+            <a:pPr marL="432000" indent="-324000">
+              <a:lnSpc>
+                <a:spcPct val="100000"/>
+              </a:lnSpc>
+              <a:buClr>
+                <a:srgbClr val="000000"/>
+              </a:buClr>
+              <a:buFont typeface="Wingdings" charset="2"/>
+              <a:buChar char=""/>
+              <a:tabLst>
+                <a:tab algn="l" pos="0"/>
+              </a:tabLst>
+            </a:pPr>
+            <a:r>
               <a:rPr b="0" lang="en-US" sz="2200" strike="noStrike" u="none">
                 <a:solidFill>
                   <a:srgbClr val="000000"/>
@@ -2518,6 +2981,59 @@
                 <a:uFillTx/>
                 <a:latin typeface="Arial"/>
               </a:rPr>
+              <a:t>Qiskit Documentation.</a:t>
+            </a:r>
+            <a:endParaRPr b="0" lang="en-US" sz="2200" strike="noStrike" u="none">
+              <a:solidFill>
+                <a:srgbClr val="000000"/>
+              </a:solidFill>
+              <a:effectLst/>
+              <a:uFillTx/>
+              <a:latin typeface="Arial"/>
+            </a:endParaRPr>
+          </a:p>
+          <a:p>
+            <a:pPr indent="0">
+              <a:lnSpc>
+                <a:spcPct val="100000"/>
+              </a:lnSpc>
+              <a:buNone/>
+              <a:tabLst>
+                <a:tab algn="l" pos="0"/>
+              </a:tabLst>
+            </a:pPr>
+            <a:endParaRPr b="0" lang="en-US" sz="2200" strike="noStrike" u="none">
+              <a:solidFill>
+                <a:srgbClr val="000000"/>
+              </a:solidFill>
+              <a:effectLst/>
+              <a:uFillTx/>
+              <a:latin typeface="Arial"/>
+            </a:endParaRPr>
+          </a:p>
+          <a:p>
+            <a:pPr marL="432000" indent="-324000">
+              <a:lnSpc>
+                <a:spcPct val="100000"/>
+              </a:lnSpc>
+              <a:buClr>
+                <a:srgbClr val="000000"/>
+              </a:buClr>
+              <a:buFont typeface="Wingdings" charset="2"/>
+              <a:buChar char=""/>
+              <a:tabLst>
+                <a:tab algn="l" pos="0"/>
+              </a:tabLst>
+            </a:pPr>
+            <a:r>
+              <a:rPr b="0" lang="en-US" sz="2200" strike="noStrike" u="none">
+                <a:solidFill>
+                  <a:srgbClr val="000000"/>
+                </a:solidFill>
+                <a:effectLst/>
+                <a:uFillTx/>
+                <a:latin typeface="Arial"/>
+              </a:rPr>
               <a:t>Lov Grover, A Fast Quantum Mechanical Algorithm for Database Search.</a:t>
             </a:r>
             <a:endParaRPr b="0" lang="en-US" sz="2200" strike="noStrike" u="none">
@@ -2535,6 +3051,9 @@
                 <a:spcPct val="100000"/>
               </a:lnSpc>
               <a:buNone/>
+              <a:tabLst>
+                <a:tab algn="l" pos="0"/>
+              </a:tabLst>
             </a:pPr>
             <a:endParaRPr b="0" lang="en-US" sz="2200" strike="noStrike" u="none">
               <a:solidFill>
@@ -2589,8 +3108,8 @@
         </p:nvSpPr>
         <p:spPr>
           <a:xfrm>
-            <a:off x="504000" y="73080"/>
-            <a:ext cx="9070560" cy="1250640"/>
+            <a:off x="504000" y="72720"/>
+            <a:ext cx="9070200" cy="1251000"/>
           </a:xfrm>
           <a:prstGeom prst="rect">
             <a:avLst/>
@@ -2649,7 +3168,7 @@
         <p:spPr>
           <a:xfrm>
             <a:off x="504000" y="1326600"/>
-            <a:ext cx="9071640" cy="3288240"/>
+            <a:ext cx="9071280" cy="3287880"/>
           </a:xfrm>
           <a:prstGeom prst="rect">
             <a:avLst/>
@@ -2687,18 +3206,7 @@
                 <a:uFillTx/>
                 <a:latin typeface="Arial"/>
               </a:rPr>
-              <a:t>Given a 4-qubit search space containing 2^4=16 possible </a:t>
-            </a:r>
-            <a:r>
-              <a:rPr b="0" lang="en-US" sz="2600" strike="noStrike" u="none">
-                <a:solidFill>
-                  <a:srgbClr val="000000"/>
-                </a:solidFill>
-                <a:effectLst/>
-                <a:uFillTx/>
-                <a:latin typeface="Arial"/>
-              </a:rPr>
-              <a:t>quantum basis states.</a:t>
+              <a:t>Given a 4-qubit search space containing 2^4=16 possible quantum basis states.</a:t>
             </a:r>
             <a:endParaRPr b="0" lang="en-US" sz="2600" strike="noStrike" u="none">
               <a:solidFill>
@@ -2733,18 +3241,7 @@
                 <a:uFillTx/>
                 <a:latin typeface="Arial"/>
               </a:rPr>
-              <a:t>The objective is to search the marked state ∣1101⟩ using </a:t>
-            </a:r>
-            <a:r>
-              <a:rPr b="0" lang="en-US" sz="2600" strike="noStrike" u="none">
-                <a:solidFill>
-                  <a:srgbClr val="000000"/>
-                </a:solidFill>
-                <a:effectLst/>
-                <a:uFillTx/>
-                <a:latin typeface="Arial"/>
-              </a:rPr>
-              <a:t>Grover's quantum search algorithm.</a:t>
+              <a:t>The objective is to search the marked state ∣1101⟩ using Grover's quantum search algorithm.</a:t>
             </a:r>
             <a:endParaRPr b="0" lang="en-US" sz="2600" strike="noStrike" u="none">
               <a:solidFill>
@@ -2849,18 +3346,7 @@
                 <a:uFillTx/>
                 <a:latin typeface="Arial"/>
               </a:rPr>
-              <a:t>Grover's algorithm performs search in O(N) oracle </a:t>
-            </a:r>
-            <a:r>
-              <a:rPr b="0" lang="en-US" sz="2800" strike="noStrike" u="none">
-                <a:solidFill>
-                  <a:srgbClr val="000000"/>
-                </a:solidFill>
-                <a:effectLst/>
-                <a:uFillTx/>
-                <a:latin typeface="Arial"/>
-              </a:rPr>
-              <a:t>queries.</a:t>
+              <a:t>Grover's algorithm performs search in O(N) oracle queries.</a:t>
             </a:r>
             <a:endParaRPr b="0" lang="en-US" sz="2800" strike="noStrike" u="none">
               <a:solidFill>
@@ -2937,8 +3423,8 @@
         </p:nvSpPr>
         <p:spPr>
           <a:xfrm>
-            <a:off x="504000" y="385560"/>
-            <a:ext cx="9070560" cy="625680"/>
+            <a:off x="504000" y="385200"/>
+            <a:ext cx="9070200" cy="626040"/>
           </a:xfrm>
           <a:prstGeom prst="rect">
             <a:avLst/>
@@ -2997,7 +3483,7 @@
         <p:spPr>
           <a:xfrm>
             <a:off x="504000" y="1326600"/>
-            <a:ext cx="9071640" cy="3288240"/>
+            <a:ext cx="9071280" cy="3287880"/>
           </a:xfrm>
           <a:prstGeom prst="rect">
             <a:avLst/>
@@ -3462,113 +3948,51 @@
           </a:p>
         </p:txBody>
       </p:sp>
-      <mc:AlternateContent>
-        <mc:Choice xmlns:a14="http://schemas.microsoft.com/office/drawing/2010/main" Requires="a14">
-          <p:sp>
-            <p:nvSpPr>
-              <p:cNvPr id="16" name=""/>
-              <p:cNvSpPr txBox="1"/>
-              <p:nvPr/>
-            </p:nvSpPr>
-            <p:spPr>
-              <a:xfrm>
-                <a:off x="2161080" y="3769920"/>
-                <a:ext cx="663840" cy="411120"/>
-              </a:xfrm>
-              <a:prstGeom prst="rect">
-                <a:avLst/>
-              </a:prstGeom>
-            </p:spPr>
-            <p:txBody>
-              <a:bodyPr/>
-              <a:p>
-                <a14:m>
-                  <m:oMath xmlns:m="http://schemas.openxmlformats.org/officeDocument/2006/math">
-                    <m:f>
-                      <m:num>
-                        <m:r>
-                          <m:t xml:space="preserve">1</m:t>
-                        </m:r>
-                      </m:num>
-                      <m:den>
-                        <m:rad>
-                          <m:radPr>
-                            <m:degHide m:val="1"/>
-                          </m:radPr>
-                          <m:deg/>
-                          <m:e>
-                            <m:r>
-                              <m:t xml:space="preserve">16</m:t>
-                            </m:r>
-                          </m:e>
-                        </m:rad>
-                      </m:den>
-                    </m:f>
-                    <m:nary>
-                      <m:naryPr>
-                        <m:chr m:val="∑"/>
-                      </m:naryPr>
-                      <m:sub>
-                        <m:r>
-                          <m:t xml:space="preserve">x</m:t>
-                        </m:r>
-                        <m:r>
-                          <m:t xml:space="preserve">=</m:t>
-                        </m:r>
-                        <m:r>
-                          <m:t xml:space="preserve">0</m:t>
-                        </m:r>
-                      </m:sub>
-                      <m:sup>
-                        <m:r>
-                          <m:t xml:space="preserve">15</m:t>
-                        </m:r>
-                      </m:sup>
-                      <m:e>
-                        <m:d>
-                          <m:dPr>
-                            <m:begChr m:val="|"/>
-                            <m:endChr m:val="⟩"/>
-                          </m:dPr>
-                          <m:e>
-                            <m:r>
-                              <m:t xml:space="preserve">x</m:t>
-                            </m:r>
-                          </m:e>
-                        </m:d>
-                      </m:e>
-                    </m:nary>
-                  </m:oMath>
-                </a14:m>
-              </a:p>
-            </p:txBody>
-          </p:sp>
-        </mc:Choice>
-        <mc:Fallback>
-          <p:sp>
-            <p:nvSpPr>
-              <p:cNvPr id="16" name=""/>
-              <p:cNvSpPr txBox="1"/>
-              <p:nvPr/>
-            </p:nvSpPr>
-            <p:spPr>
-              <a:xfrm>
-                <a:off x="2161080" y="3769920"/>
-                <a:ext cx="663840" cy="411120"/>
-              </a:xfrm>
-              <a:prstGeom prst="rect">
-                <a:avLst/>
-              </a:prstGeom>
-              <a:blipFill>
-                <a:blip r:embed="rId1"/>
-                <a:stretch>
-                  <a:fillRect/>
-                </a:stretch>
-              </a:blipFill>
-            </p:spPr>
-          </p:sp>
-        </mc:Fallback>
-      </mc:AlternateContent>
+      <p:sp>
+        <p:nvSpPr>
+          <p:cNvPr id="16" name=""/>
+          <p:cNvSpPr/>
+          <p:nvPr/>
+        </p:nvSpPr>
+        <p:spPr>
+          <a:xfrm>
+            <a:off x="2161080" y="3769920"/>
+            <a:ext cx="663480" cy="410760"/>
+          </a:xfrm>
+          <a:prstGeom prst="rect">
+            <a:avLst/>
+          </a:prstGeom>
+          <a:blipFill rotWithShape="0">
+            <a:blip r:embed="rId1"/>
+            <a:srcRect/>
+            <a:stretch/>
+          </a:blipFill>
+          <a:ln w="0">
+            <a:noFill/>
+          </a:ln>
+        </p:spPr>
+        <p:style>
+          <a:lnRef idx="0"/>
+          <a:fillRef idx="0"/>
+          <a:effectRef idx="0"/>
+          <a:fontRef idx="minor"/>
+        </p:style>
+        <p:txBody>
+          <a:bodyPr lIns="90000" rIns="90000" tIns="45000" bIns="45000" anchor="t">
+            <a:noAutofit/>
+          </a:bodyPr>
+          <a:p>
+            <a:endParaRPr b="0" lang="en-US" sz="1800" strike="noStrike" u="none">
+              <a:solidFill>
+                <a:srgbClr val="000000"/>
+              </a:solidFill>
+              <a:effectLst/>
+              <a:uFillTx/>
+              <a:latin typeface="Arial"/>
+            </a:endParaRPr>
+          </a:p>
+        </p:txBody>
+      </p:sp>
     </p:spTree>
   </p:cSld>
   <mc:AlternateContent>
@@ -3611,8 +4035,8 @@
         </p:nvSpPr>
         <p:spPr>
           <a:xfrm>
-            <a:off x="504000" y="363240"/>
-            <a:ext cx="9070560" cy="670680"/>
+            <a:off x="504000" y="362880"/>
+            <a:ext cx="9070200" cy="671040"/>
           </a:xfrm>
           <a:prstGeom prst="rect">
             <a:avLst/>
@@ -3671,7 +4095,7 @@
         <p:spPr>
           <a:xfrm>
             <a:off x="504000" y="1326600"/>
-            <a:ext cx="9071640" cy="3288240"/>
+            <a:ext cx="9071280" cy="3287880"/>
           </a:xfrm>
           <a:prstGeom prst="rect">
             <a:avLst/>
@@ -3686,7 +4110,7 @@
             <a:normAutofit fontScale="70000" lnSpcReduction="19999"/>
           </a:bodyPr>
           <a:p>
-            <a:pPr marL="360000">
+            <a:pPr marL="360000" indent="-324000">
               <a:lnSpc>
                 <a:spcPct val="100000"/>
               </a:lnSpc>
@@ -3720,11 +4144,10 @@
               <a:effectLst/>
               <a:uFillTx/>
               <a:latin typeface="Arial"/>
-              <a:ea typeface="WenQuanYi Zen Hei"/>
-            </a:endParaRPr>
-          </a:p>
-          <a:p>
-            <a:pPr marL="360000">
+            </a:endParaRPr>
+          </a:p>
+          <a:p>
+            <a:pPr marL="360000" indent="-324000">
               <a:lnSpc>
                 <a:spcPct val="100000"/>
               </a:lnSpc>
@@ -3758,11 +4181,10 @@
               <a:effectLst/>
               <a:uFillTx/>
               <a:latin typeface="Arial"/>
-              <a:ea typeface="WenQuanYi Zen Hei"/>
-            </a:endParaRPr>
-          </a:p>
-          <a:p>
-            <a:pPr marL="360000">
+            </a:endParaRPr>
+          </a:p>
+          <a:p>
+            <a:pPr marL="360000" indent="-324000">
               <a:lnSpc>
                 <a:spcPct val="100000"/>
               </a:lnSpc>
@@ -3796,11 +4218,10 @@
               <a:effectLst/>
               <a:uFillTx/>
               <a:latin typeface="Arial"/>
-              <a:ea typeface="WenQuanYi Zen Hei"/>
-            </a:endParaRPr>
-          </a:p>
-          <a:p>
-            <a:pPr marL="360000">
+            </a:endParaRPr>
+          </a:p>
+          <a:p>
+            <a:pPr marL="360000" indent="-324000">
               <a:lnSpc>
                 <a:spcPct val="100000"/>
               </a:lnSpc>
@@ -3834,11 +4255,10 @@
               <a:effectLst/>
               <a:uFillTx/>
               <a:latin typeface="Arial"/>
-              <a:ea typeface="WenQuanYi Zen Hei"/>
-            </a:endParaRPr>
-          </a:p>
-          <a:p>
-            <a:pPr marL="720000">
+            </a:endParaRPr>
+          </a:p>
+          <a:p>
+            <a:pPr marL="720000" indent="-324000">
               <a:lnSpc>
                 <a:spcPct val="100000"/>
               </a:lnSpc>
@@ -3873,11 +4293,10 @@
               <a:effectLst/>
               <a:uFillTx/>
               <a:latin typeface="Arial"/>
-              <a:ea typeface="WenQuanYi Zen Hei"/>
-            </a:endParaRPr>
-          </a:p>
-          <a:p>
-            <a:pPr marL="360000">
+            </a:endParaRPr>
+          </a:p>
+          <a:p>
+            <a:pPr marL="360000" indent="-324000">
               <a:lnSpc>
                 <a:spcPct val="100000"/>
               </a:lnSpc>
@@ -3901,6 +4320,7 @@
                 <a:effectLst/>
                 <a:uFillTx/>
                 <a:latin typeface="Arial"/>
+                <a:ea typeface="WenQuanYi Zen Hei"/>
               </a:rPr>
               <a:t>Diffusion</a:t>
             </a:r>
@@ -3911,11 +4331,10 @@
               <a:effectLst/>
               <a:uFillTx/>
               <a:latin typeface="Arial"/>
-              <a:ea typeface="WenQuanYi Zen Hei"/>
-            </a:endParaRPr>
-          </a:p>
-          <a:p>
-            <a:pPr marL="720000">
+            </a:endParaRPr>
+          </a:p>
+          <a:p>
+            <a:pPr marL="720000" indent="-324000">
               <a:lnSpc>
                 <a:spcPct val="100000"/>
               </a:lnSpc>
@@ -3950,11 +4369,10 @@
               <a:effectLst/>
               <a:uFillTx/>
               <a:latin typeface="Arial"/>
-              <a:ea typeface="WenQuanYi Zen Hei"/>
-            </a:endParaRPr>
-          </a:p>
-          <a:p>
-            <a:pPr marL="720000">
+            </a:endParaRPr>
+          </a:p>
+          <a:p>
+            <a:pPr marL="720000" indent="-324000">
               <a:lnSpc>
                 <a:spcPct val="100000"/>
               </a:lnSpc>
@@ -3989,11 +4407,10 @@
               <a:effectLst/>
               <a:uFillTx/>
               <a:latin typeface="Arial"/>
-              <a:ea typeface="WenQuanYi Zen Hei"/>
-            </a:endParaRPr>
-          </a:p>
-          <a:p>
-            <a:pPr marL="360000">
+            </a:endParaRPr>
+          </a:p>
+          <a:p>
+            <a:pPr marL="360000" indent="-324000">
               <a:lnSpc>
                 <a:spcPct val="100000"/>
               </a:lnSpc>
@@ -4017,6 +4434,7 @@
                 <a:effectLst/>
                 <a:uFillTx/>
                 <a:latin typeface="Arial"/>
+                <a:ea typeface="WenQuanYi Zen Hei"/>
               </a:rPr>
               <a:t>Repeat k times</a:t>
             </a:r>
@@ -4027,11 +4445,10 @@
               <a:effectLst/>
               <a:uFillTx/>
               <a:latin typeface="Arial"/>
-              <a:ea typeface="WenQuanYi Zen Hei"/>
-            </a:endParaRPr>
-          </a:p>
-          <a:p>
-            <a:pPr marL="360000">
+            </a:endParaRPr>
+          </a:p>
+          <a:p>
+            <a:pPr marL="360000" indent="-324000">
               <a:lnSpc>
                 <a:spcPct val="100000"/>
               </a:lnSpc>
@@ -4055,6 +4472,7 @@
                 <a:effectLst/>
                 <a:uFillTx/>
                 <a:latin typeface="Arial"/>
+                <a:ea typeface="WenQuanYi Zen Hei"/>
               </a:rPr>
               <a:t>Measurement</a:t>
             </a:r>
@@ -4065,7 +4483,6 @@
               <a:effectLst/>
               <a:uFillTx/>
               <a:latin typeface="Arial"/>
-              <a:ea typeface="WenQuanYi Zen Hei"/>
             </a:endParaRPr>
           </a:p>
         </p:txBody>
@@ -4112,8 +4529,8 @@
         </p:nvSpPr>
         <p:spPr>
           <a:xfrm>
-            <a:off x="504000" y="385560"/>
-            <a:ext cx="9070560" cy="625320"/>
+            <a:off x="504000" y="385200"/>
+            <a:ext cx="9070200" cy="625680"/>
           </a:xfrm>
           <a:prstGeom prst="rect">
             <a:avLst/>
@@ -4129,7 +4546,13 @@
           </a:bodyPr>
           <a:p>
             <a:pPr indent="0" algn="ctr">
+              <a:lnSpc>
+                <a:spcPct val="100000"/>
+              </a:lnSpc>
               <a:buNone/>
+              <a:tabLst>
+                <a:tab algn="l" pos="0"/>
+              </a:tabLst>
             </a:pPr>
             <a:r>
               <a:rPr b="0" lang="en-US" sz="4400" strike="noStrike" u="none">
@@ -4161,7 +4584,7 @@
         </p:nvGraphicFramePr>
         <p:xfrm>
           <a:off x="504000" y="1326600"/>
-          <a:ext cx="9071640" cy="3288240"/>
+          <a:ext cx="9071280" cy="3287880"/>
         </p:xfrm>
         <a:graphic>
           <a:graphicData uri="http://schemas.openxmlformats.org/drawingml/2006/chart">
@@ -4182,7 +4605,7 @@
         <p:spPr>
           <a:xfrm>
             <a:off x="0" y="1303560"/>
-            <a:ext cx="10080360" cy="3725640"/>
+            <a:ext cx="10080000" cy="3725280"/>
           </a:xfrm>
           <a:prstGeom prst="rect">
             <a:avLst/>
@@ -4235,8 +4658,8 @@
         </p:nvSpPr>
         <p:spPr>
           <a:xfrm>
-            <a:off x="504000" y="385560"/>
-            <a:ext cx="9070560" cy="625320"/>
+            <a:off x="504000" y="385200"/>
+            <a:ext cx="9070200" cy="625680"/>
           </a:xfrm>
           <a:prstGeom prst="rect">
             <a:avLst/>
@@ -4252,7 +4675,13 @@
           </a:bodyPr>
           <a:p>
             <a:pPr indent="0" algn="ctr">
+              <a:lnSpc>
+                <a:spcPct val="100000"/>
+              </a:lnSpc>
               <a:buNone/>
+              <a:tabLst>
+                <a:tab algn="l" pos="0"/>
+              </a:tabLst>
             </a:pPr>
             <a:r>
               <a:rPr b="0" lang="en-US" sz="4400" strike="noStrike" u="none">
@@ -4289,7 +4718,7 @@
         <p:spPr>
           <a:xfrm>
             <a:off x="504000" y="1326600"/>
-            <a:ext cx="9071640" cy="3288240"/>
+            <a:ext cx="9071280" cy="3287880"/>
           </a:xfrm>
           <a:prstGeom prst="rect">
             <a:avLst/>
@@ -4305,6 +4734,9 @@
           </a:bodyPr>
           <a:p>
             <a:pPr marL="432000" indent="-324000">
+              <a:lnSpc>
+                <a:spcPct val="100000"/>
+              </a:lnSpc>
               <a:spcBef>
                 <a:spcPts val="1417"/>
               </a:spcBef>
@@ -4337,6 +4769,9 @@
           </a:p>
           <a:p>
             <a:pPr marL="432000" indent="-324000">
+              <a:lnSpc>
+                <a:spcPct val="100000"/>
+              </a:lnSpc>
               <a:spcBef>
                 <a:spcPts val="1417"/>
               </a:spcBef>
@@ -4369,6 +4804,9 @@
           </a:p>
           <a:p>
             <a:pPr marL="432000" indent="-324000">
+              <a:lnSpc>
+                <a:spcPct val="100000"/>
+              </a:lnSpc>
               <a:spcBef>
                 <a:spcPts val="1417"/>
               </a:spcBef>
@@ -4401,6 +4839,9 @@
           </a:p>
           <a:p>
             <a:pPr marL="432000" indent="-324000">
+              <a:lnSpc>
+                <a:spcPct val="100000"/>
+              </a:lnSpc>
               <a:spcBef>
                 <a:spcPts val="1417"/>
               </a:spcBef>
@@ -4433,6 +4874,9 @@
           </a:p>
           <a:p>
             <a:pPr marL="432000" indent="-324000">
+              <a:lnSpc>
+                <a:spcPct val="100000"/>
+              </a:lnSpc>
               <a:spcBef>
                 <a:spcPts val="1417"/>
               </a:spcBef>
@@ -4465,6 +4909,9 @@
           </a:p>
           <a:p>
             <a:pPr marL="432000" indent="-324000">
+              <a:lnSpc>
+                <a:spcPct val="100000"/>
+              </a:lnSpc>
               <a:spcBef>
                 <a:spcPts val="1417"/>
               </a:spcBef>
@@ -4539,8 +4986,8 @@
         </p:nvSpPr>
         <p:spPr>
           <a:xfrm>
-            <a:off x="504000" y="385560"/>
-            <a:ext cx="9070560" cy="625320"/>
+            <a:off x="504000" y="385200"/>
+            <a:ext cx="9070200" cy="625680"/>
           </a:xfrm>
           <a:prstGeom prst="rect">
             <a:avLst/>
@@ -4556,7 +5003,13 @@
           </a:bodyPr>
           <a:p>
             <a:pPr indent="0" algn="ctr">
+              <a:lnSpc>
+                <a:spcPct val="100000"/>
+              </a:lnSpc>
               <a:buNone/>
+              <a:tabLst>
+                <a:tab algn="l" pos="0"/>
+              </a:tabLst>
             </a:pPr>
             <a:r>
               <a:rPr b="0" lang="en-US" sz="4400" strike="noStrike" u="none">
@@ -4593,7 +5046,7 @@
         <p:spPr>
           <a:xfrm>
             <a:off x="504000" y="1326600"/>
-            <a:ext cx="9071640" cy="3288240"/>
+            <a:ext cx="9071280" cy="3287880"/>
           </a:xfrm>
           <a:prstGeom prst="rect">
             <a:avLst/>
@@ -4609,6 +5062,9 @@
           </a:bodyPr>
           <a:p>
             <a:pPr marL="432000" indent="-324000">
+              <a:lnSpc>
+                <a:spcPct val="100000"/>
+              </a:lnSpc>
               <a:spcBef>
                 <a:spcPts val="1417"/>
               </a:spcBef>
@@ -4641,6 +5097,9 @@
           </a:p>
           <a:p>
             <a:pPr marL="432000" indent="-324000">
+              <a:lnSpc>
+                <a:spcPct val="100000"/>
+              </a:lnSpc>
               <a:spcBef>
                 <a:spcPts val="1417"/>
               </a:spcBef>
@@ -4673,6 +5132,9 @@
           </a:p>
           <a:p>
             <a:pPr marL="432000" indent="-324000">
+              <a:lnSpc>
+                <a:spcPct val="100000"/>
+              </a:lnSpc>
               <a:spcBef>
                 <a:spcPts val="1417"/>
               </a:spcBef>
@@ -4705,6 +5167,9 @@
           </a:p>
           <a:p>
             <a:pPr marL="432000" indent="-324000">
+              <a:lnSpc>
+                <a:spcPct val="100000"/>
+              </a:lnSpc>
               <a:spcBef>
                 <a:spcPts val="1417"/>
               </a:spcBef>
@@ -4737,6 +5202,9 @@
           </a:p>
           <a:p>
             <a:pPr marL="432000" indent="-324000">
+              <a:lnSpc>
+                <a:spcPct val="100000"/>
+              </a:lnSpc>
               <a:spcBef>
                 <a:spcPts val="1417"/>
               </a:spcBef>
@@ -4811,8 +5279,8 @@
         </p:nvSpPr>
         <p:spPr>
           <a:xfrm>
-            <a:off x="504000" y="363240"/>
-            <a:ext cx="9070560" cy="670680"/>
+            <a:off x="504000" y="385560"/>
+            <a:ext cx="9070200" cy="625320"/>
           </a:xfrm>
           <a:prstGeom prst="rect">
             <a:avLst/>
@@ -4828,13 +5296,7 @@
           </a:bodyPr>
           <a:p>
             <a:pPr indent="0" algn="ctr">
-              <a:lnSpc>
-                <a:spcPct val="100000"/>
-              </a:lnSpc>
               <a:buNone/>
-              <a:tabLst>
-                <a:tab algn="l" pos="0"/>
-              </a:tabLst>
             </a:pPr>
             <a:r>
               <a:rPr b="0" lang="en-US" sz="4400" strike="noStrike" u="none">
@@ -4845,7 +5307,7 @@
                 <a:uFillTx/>
                 <a:latin typeface="Arial"/>
               </a:rPr>
-              <a:t>Results</a:t>
+              <a:t>Measurement Outcome</a:t>
             </a:r>
             <a:endParaRPr b="0" lang="en-US" sz="4400" strike="noStrike" u="none">
               <a:solidFill>
@@ -4870,8 +5332,8 @@
         </p:nvSpPr>
         <p:spPr>
           <a:xfrm>
-            <a:off x="504000" y="1326600"/>
-            <a:ext cx="9071640" cy="3288240"/>
+            <a:off x="1143000" y="1371600"/>
+            <a:ext cx="9071280" cy="3287880"/>
           </a:xfrm>
           <a:prstGeom prst="rect">
             <a:avLst/>
@@ -4882,44 +5344,17 @@
           </a:ln>
         </p:spPr>
         <p:txBody>
-          <a:bodyPr lIns="0" rIns="0" tIns="0" bIns="0" anchor="t" anchorCtr="1">
+          <a:bodyPr lIns="0" rIns="0" tIns="0" bIns="0" anchor="t">
             <a:normAutofit/>
           </a:bodyPr>
           <a:p>
-            <a:pPr marL="432000" indent="0" algn="ctr">
+            <a:pPr indent="0">
               <a:spcBef>
                 <a:spcPts val="1417"/>
               </a:spcBef>
               <a:buNone/>
             </a:pPr>
-            <a:r>
-              <a:rPr b="0" lang="en-US" sz="1300" strike="noStrike" u="none">
-                <a:solidFill>
-                  <a:srgbClr val="000000"/>
-                </a:solidFill>
-                <a:effectLst/>
-                <a:uFillTx/>
-                <a:latin typeface="Arial"/>
-              </a:rPr>
-              <a:t>Probability and Real Amplitudes and Imaginary Components</a:t>
-            </a:r>
-            <a:endParaRPr b="0" lang="en-US" sz="1300" strike="noStrike" u="none">
-              <a:solidFill>
-                <a:srgbClr val="000000"/>
-              </a:solidFill>
-              <a:effectLst/>
-              <a:uFillTx/>
-              <a:latin typeface="Arial"/>
-            </a:endParaRPr>
-          </a:p>
-          <a:p>
-            <a:pPr indent="0">
-              <a:spcBef>
-                <a:spcPts val="1417"/>
-              </a:spcBef>
-              <a:buNone/>
-            </a:pPr>
-            <a:endParaRPr b="0" lang="en-US" sz="3200" strike="noStrike" u="none">
+            <a:endParaRPr b="1" lang="en-US" sz="3200" strike="noStrike" u="none">
               <a:solidFill>
                 <a:srgbClr val="000000"/>
               </a:solidFill>
@@ -4942,8 +5377,8 @@
         </p:blipFill>
         <p:spPr>
           <a:xfrm>
-            <a:off x="1641240" y="1600200"/>
-            <a:ext cx="6816960" cy="3200400"/>
+            <a:off x="228600" y="1371600"/>
+            <a:ext cx="9372600" cy="3657600"/>
           </a:xfrm>
           <a:prstGeom prst="rect">
             <a:avLst/>
@@ -4996,8 +5431,8 @@
         </p:nvSpPr>
         <p:spPr>
           <a:xfrm>
-            <a:off x="504000" y="73080"/>
-            <a:ext cx="9070560" cy="1250280"/>
+            <a:off x="504000" y="362880"/>
+            <a:ext cx="9070200" cy="671040"/>
           </a:xfrm>
           <a:prstGeom prst="rect">
             <a:avLst/>
@@ -5013,7 +5448,13 @@
           </a:bodyPr>
           <a:p>
             <a:pPr indent="0" algn="ctr">
+              <a:lnSpc>
+                <a:spcPct val="100000"/>
+              </a:lnSpc>
               <a:buNone/>
+              <a:tabLst>
+                <a:tab algn="l" pos="0"/>
+              </a:tabLst>
             </a:pPr>
             <a:r>
               <a:rPr b="0" lang="en-US" sz="4400" strike="noStrike" u="none">
@@ -5024,7 +5465,7 @@
                 <a:uFillTx/>
                 <a:latin typeface="Arial"/>
               </a:rPr>
-              <a:t>Probability, Real Amplitudes and Imaginary Components</a:t>
+              <a:t>Results</a:t>
             </a:r>
             <a:endParaRPr b="0" lang="en-US" sz="4400" strike="noStrike" u="none">
               <a:solidFill>
@@ -5050,7 +5491,7 @@
         <p:spPr>
           <a:xfrm>
             <a:off x="504000" y="1326600"/>
-            <a:ext cx="9071640" cy="3288240"/>
+            <a:ext cx="9071280" cy="3287880"/>
           </a:xfrm>
           <a:prstGeom prst="rect">
             <a:avLst/>
@@ -5061,278 +5502,55 @@
           </a:ln>
         </p:spPr>
         <p:txBody>
-          <a:bodyPr lIns="0" rIns="0" tIns="0" bIns="0" anchor="t">
-            <a:normAutofit fontScale="55000" lnSpcReduction="19999"/>
+          <a:bodyPr lIns="0" rIns="0" tIns="0" bIns="0" anchor="t" anchorCtr="1">
+            <a:normAutofit/>
           </a:bodyPr>
           <a:p>
-            <a:pPr marL="432000" indent="-324000">
+            <a:pPr marL="432000" indent="0" algn="ctr">
+              <a:lnSpc>
+                <a:spcPct val="100000"/>
+              </a:lnSpc>
               <a:spcBef>
                 <a:spcPts val="1417"/>
               </a:spcBef>
-              <a:buClr>
-                <a:srgbClr val="000000"/>
-              </a:buClr>
-              <a:buSzPct val="45000"/>
-              <a:buFont typeface="Wingdings" charset="2"/>
-              <a:buChar char=""/>
-            </a:pPr>
-            <a:r>
-              <a:rPr b="0" lang="en-US" sz="3200" strike="noStrike" u="none">
-                <a:solidFill>
-                  <a:srgbClr val="000000"/>
-                </a:solidFill>
-                <a:effectLst/>
-                <a:uFillTx/>
-                <a:latin typeface="Arial"/>
-              </a:rPr>
-              <a:t>The green curve represents the probability of measuring the marked state (|1101&gt;).</a:t>
-            </a:r>
-            <a:endParaRPr b="0" lang="en-US" sz="3200" strike="noStrike" u="none">
-              <a:solidFill>
-                <a:srgbClr val="000000"/>
-              </a:solidFill>
-              <a:effectLst/>
-              <a:uFillTx/>
-              <a:latin typeface="Arial"/>
-            </a:endParaRPr>
-          </a:p>
-          <a:p>
-            <a:pPr marL="432000" indent="-324000">
+              <a:buNone/>
+              <a:tabLst>
+                <a:tab algn="l" pos="0"/>
+              </a:tabLst>
+            </a:pPr>
+            <a:r>
+              <a:rPr b="0" lang="en-US" sz="1300" strike="noStrike" u="none">
+                <a:solidFill>
+                  <a:srgbClr val="000000"/>
+                </a:solidFill>
+                <a:effectLst/>
+                <a:uFillTx/>
+                <a:latin typeface="Arial"/>
+              </a:rPr>
+              <a:t>Probability and Real Amplitudes and Imaginary Components</a:t>
+            </a:r>
+            <a:endParaRPr b="0" lang="en-US" sz="1300" strike="noStrike" u="none">
+              <a:solidFill>
+                <a:srgbClr val="000000"/>
+              </a:solidFill>
+              <a:effectLst/>
+              <a:uFillTx/>
+              <a:latin typeface="Arial"/>
+            </a:endParaRPr>
+          </a:p>
+          <a:p>
+            <a:pPr marL="432000" indent="0">
+              <a:lnSpc>
+                <a:spcPct val="100000"/>
+              </a:lnSpc>
               <a:spcBef>
                 <a:spcPts val="1417"/>
               </a:spcBef>
-              <a:buClr>
-                <a:srgbClr val="000000"/>
-              </a:buClr>
-              <a:buSzPct val="45000"/>
-              <a:buFont typeface="Wingdings" charset="2"/>
-              <a:buChar char=""/>
-            </a:pPr>
-            <a:r>
-              <a:rPr b="0" lang="en-US" sz="3200" strike="noStrike" u="none">
-                <a:solidFill>
-                  <a:srgbClr val="000000"/>
-                </a:solidFill>
-                <a:effectLst/>
-                <a:uFillTx/>
-                <a:latin typeface="Arial"/>
-              </a:rPr>
-              <a:t>The red curve represents the real amplitude of the marked state.</a:t>
-            </a:r>
-            <a:endParaRPr b="0" lang="en-US" sz="3200" strike="noStrike" u="none">
-              <a:solidFill>
-                <a:srgbClr val="000000"/>
-              </a:solidFill>
-              <a:effectLst/>
-              <a:uFillTx/>
-              <a:latin typeface="Arial"/>
-            </a:endParaRPr>
-          </a:p>
-          <a:p>
-            <a:pPr marL="432000" indent="-324000">
-              <a:spcBef>
-                <a:spcPts val="1417"/>
-              </a:spcBef>
-              <a:buClr>
-                <a:srgbClr val="000000"/>
-              </a:buClr>
-              <a:buSzPct val="45000"/>
-              <a:buFont typeface="Wingdings" charset="2"/>
-              <a:buChar char=""/>
-            </a:pPr>
-            <a:r>
-              <a:rPr b="0" lang="en-US" sz="3200" strike="noStrike" u="none">
-                <a:solidFill>
-                  <a:srgbClr val="000000"/>
-                </a:solidFill>
-                <a:effectLst/>
-                <a:uFillTx/>
-                <a:latin typeface="Arial"/>
-              </a:rPr>
-              <a:t>The purple curve represents the average real amplitude of the search register.</a:t>
-            </a:r>
-            <a:endParaRPr b="0" lang="en-US" sz="3200" strike="noStrike" u="none">
-              <a:solidFill>
-                <a:srgbClr val="000000"/>
-              </a:solidFill>
-              <a:effectLst/>
-              <a:uFillTx/>
-              <a:latin typeface="Arial"/>
-            </a:endParaRPr>
-          </a:p>
-          <a:p>
-            <a:pPr marL="432000" indent="-324000">
-              <a:spcBef>
-                <a:spcPts val="1417"/>
-              </a:spcBef>
-              <a:buClr>
-                <a:srgbClr val="000000"/>
-              </a:buClr>
-              <a:buSzPct val="45000"/>
-              <a:buFont typeface="Wingdings" charset="2"/>
-              <a:buChar char=""/>
-            </a:pPr>
-            <a:r>
-              <a:rPr b="0" lang="en-US" sz="3200" strike="noStrike" u="none">
-                <a:solidFill>
-                  <a:srgbClr val="000000"/>
-                </a:solidFill>
-                <a:effectLst/>
-                <a:uFillTx/>
-                <a:latin typeface="Arial"/>
-              </a:rPr>
-              <a:t>The probability of the marked state increases rapidly after successive Grover </a:t>
-            </a:r>
-            <a:r>
-              <a:rPr b="0" lang="en-US" sz="3200" strike="noStrike" u="none">
-                <a:solidFill>
-                  <a:srgbClr val="000000"/>
-                </a:solidFill>
-                <a:effectLst/>
-                <a:uFillTx/>
-                <a:latin typeface="Arial"/>
-              </a:rPr>
-              <a:t>iterations.</a:t>
-            </a:r>
-            <a:endParaRPr b="0" lang="en-US" sz="3200" strike="noStrike" u="none">
-              <a:solidFill>
-                <a:srgbClr val="000000"/>
-              </a:solidFill>
-              <a:effectLst/>
-              <a:uFillTx/>
-              <a:latin typeface="Arial"/>
-            </a:endParaRPr>
-          </a:p>
-          <a:p>
-            <a:pPr marL="432000" indent="-324000">
-              <a:spcBef>
-                <a:spcPts val="1417"/>
-              </a:spcBef>
-              <a:buClr>
-                <a:srgbClr val="000000"/>
-              </a:buClr>
-              <a:buSzPct val="45000"/>
-              <a:buFont typeface="Wingdings" charset="2"/>
-              <a:buChar char=""/>
-            </a:pPr>
-            <a:r>
-              <a:rPr b="0" lang="en-US" sz="3200" strike="noStrike" u="none">
-                <a:solidFill>
-                  <a:srgbClr val="000000"/>
-                </a:solidFill>
-                <a:effectLst/>
-                <a:uFillTx/>
-                <a:latin typeface="Arial"/>
-              </a:rPr>
-              <a:t>Beyond the optimal number of iterations, the probability decreases due to the </a:t>
-            </a:r>
-            <a:r>
-              <a:rPr b="0" lang="en-US" sz="3200" strike="noStrike" u="none">
-                <a:solidFill>
-                  <a:srgbClr val="000000"/>
-                </a:solidFill>
-                <a:effectLst/>
-                <a:uFillTx/>
-                <a:latin typeface="Arial"/>
-              </a:rPr>
-              <a:t>oscillatory nature of Grover's algorithm.</a:t>
-            </a:r>
-            <a:endParaRPr b="0" lang="en-US" sz="3200" strike="noStrike" u="none">
-              <a:solidFill>
-                <a:srgbClr val="000000"/>
-              </a:solidFill>
-              <a:effectLst/>
-              <a:uFillTx/>
-              <a:latin typeface="Arial"/>
-            </a:endParaRPr>
-          </a:p>
-          <a:p>
-            <a:pPr marL="432000" indent="-324000">
-              <a:spcBef>
-                <a:spcPts val="1417"/>
-              </a:spcBef>
-              <a:buClr>
-                <a:srgbClr val="000000"/>
-              </a:buClr>
-              <a:buSzPct val="45000"/>
-              <a:buFont typeface="Wingdings" charset="2"/>
-              <a:buChar char=""/>
-            </a:pPr>
-            <a:r>
-              <a:rPr b="0" lang="en-US" sz="3200" strike="noStrike" u="none">
-                <a:solidFill>
-                  <a:srgbClr val="000000"/>
-                </a:solidFill>
-                <a:effectLst/>
-                <a:uFillTx/>
-                <a:latin typeface="Arial"/>
-              </a:rPr>
-              <a:t>Imaginary amplitudes remain approximately zero throughout the computation.</a:t>
-            </a:r>
-            <a:endParaRPr b="0" lang="en-US" sz="3200" strike="noStrike" u="none">
-              <a:solidFill>
-                <a:srgbClr val="000000"/>
-              </a:solidFill>
-              <a:effectLst/>
-              <a:uFillTx/>
-              <a:latin typeface="Arial"/>
-            </a:endParaRPr>
-          </a:p>
-          <a:p>
-            <a:pPr marL="432000" indent="-324000">
-              <a:spcBef>
-                <a:spcPts val="1417"/>
-              </a:spcBef>
-              <a:buClr>
-                <a:srgbClr val="000000"/>
-              </a:buClr>
-              <a:buSzPct val="45000"/>
-              <a:buFont typeface="Wingdings" charset="2"/>
-              <a:buChar char=""/>
-            </a:pPr>
-            <a:r>
-              <a:rPr b="0" lang="en-US" sz="3200" strike="noStrike" u="none">
-                <a:solidFill>
-                  <a:srgbClr val="000000"/>
-                </a:solidFill>
-                <a:effectLst/>
-                <a:uFillTx/>
-                <a:latin typeface="Arial"/>
-              </a:rPr>
-              <a:t>This confirms that the implementation behaves as expected.</a:t>
-            </a:r>
-            <a:endParaRPr b="0" lang="en-US" sz="3200" strike="noStrike" u="none">
-              <a:solidFill>
-                <a:srgbClr val="000000"/>
-              </a:solidFill>
-              <a:effectLst/>
-              <a:uFillTx/>
-              <a:latin typeface="Arial"/>
-            </a:endParaRPr>
-          </a:p>
-          <a:p>
-            <a:pPr marL="432000" indent="-324000">
-              <a:spcBef>
-                <a:spcPts val="1417"/>
-              </a:spcBef>
-              <a:buClr>
-                <a:srgbClr val="000000"/>
-              </a:buClr>
-              <a:buSzPct val="45000"/>
-              <a:buFont typeface="Wingdings" charset="2"/>
-              <a:buChar char=""/>
-            </a:pPr>
-            <a:r>
-              <a:rPr b="0" lang="en-US" sz="3200" strike="noStrike" u="none">
-                <a:solidFill>
-                  <a:srgbClr val="000000"/>
-                </a:solidFill>
-                <a:effectLst/>
-                <a:uFillTx/>
-                <a:latin typeface="Arial"/>
-              </a:rPr>
-              <a:t>The evolution occurs almost entirely in the real amplitude space.</a:t>
-            </a:r>
+              <a:buNone/>
+              <a:tabLst>
+                <a:tab algn="l" pos="0"/>
+              </a:tabLst>
+            </a:pPr>
             <a:endParaRPr b="0" lang="en-US" sz="3200" strike="noStrike" u="none">
               <a:solidFill>
                 <a:srgbClr val="000000"/>
@@ -5344,6 +5562,30 @@
           </a:p>
         </p:txBody>
       </p:sp>
+      <p:pic>
+        <p:nvPicPr>
+          <p:cNvPr id="31" name="" descr=""/>
+          <p:cNvPicPr/>
+          <p:nvPr/>
+        </p:nvPicPr>
+        <p:blipFill>
+          <a:blip r:embed="rId1"/>
+          <a:stretch/>
+        </p:blipFill>
+        <p:spPr>
+          <a:xfrm>
+            <a:off x="1641240" y="1600200"/>
+            <a:ext cx="6816600" cy="3200040"/>
+          </a:xfrm>
+          <a:prstGeom prst="rect">
+            <a:avLst/>
+          </a:prstGeom>
+          <a:noFill/>
+          <a:ln w="0">
+            <a:noFill/>
+          </a:ln>
+        </p:spPr>
+      </p:pic>
     </p:spTree>
   </p:cSld>
   <mc:AlternateContent>

--- a/Group_No_6A.pptx
+++ b/Group_No_6A.pptx
@@ -1,35 +1,133 @@
 
 <file path=ppt/presentation.xml><?xml version="1.0" encoding="utf-8"?>
-<p:presentation xmlns:a="http://schemas.openxmlformats.org/drawingml/2006/main" xmlns:p="http://schemas.openxmlformats.org/presentationml/2006/main" xmlns:r="http://schemas.openxmlformats.org/officeDocument/2006/relationships" xmlns:p14="http://schemas.microsoft.com/office/powerpoint/2010/main" xmlns:p15="http://schemas.microsoft.com/office/powerpoint/2012/main" xmlns:mc="http://schemas.openxmlformats.org/markup-compatibility/2006">
+<p:presentation xmlns:a="http://schemas.openxmlformats.org/drawingml/2006/main" xmlns:r="http://schemas.openxmlformats.org/officeDocument/2006/relationships" xmlns:p="http://schemas.openxmlformats.org/presentationml/2006/main">
   <p:sldMasterIdLst>
-    <p:sldMasterId id="2147483648" r:id="rId2"/>
+    <p:sldMasterId id="2147483648" r:id="rId1"/>
   </p:sldMasterIdLst>
   <p:sldIdLst>
-    <p:sldId id="256" r:id="rId3"/>
-    <p:sldId id="257" r:id="rId4"/>
-    <p:sldId id="258" r:id="rId5"/>
-    <p:sldId id="259" r:id="rId6"/>
-    <p:sldId id="260" r:id="rId7"/>
-    <p:sldId id="261" r:id="rId8"/>
+    <p:sldId id="256" r:id="rId2"/>
+    <p:sldId id="257" r:id="rId3"/>
+    <p:sldId id="258" r:id="rId4"/>
+    <p:sldId id="259" r:id="rId5"/>
+    <p:sldId id="260" r:id="rId6"/>
+    <p:sldId id="261" r:id="rId7"/>
+    <p:sldId id="263" r:id="rId8"/>
     <p:sldId id="262" r:id="rId9"/>
-    <p:sldId id="263" r:id="rId10"/>
-    <p:sldId id="264" r:id="rId11"/>
-    <p:sldId id="265" r:id="rId12"/>
-    <p:sldId id="266" r:id="rId13"/>
-    <p:sldId id="267" r:id="rId14"/>
+    <p:sldId id="264" r:id="rId10"/>
+    <p:sldId id="265" r:id="rId11"/>
+    <p:sldId id="266" r:id="rId12"/>
+    <p:sldId id="267" r:id="rId13"/>
   </p:sldIdLst>
   <p:sldSz cx="10080625" cy="5670550"/>
   <p:notesSz cx="7772400" cy="10058400"/>
+  <p:defaultTextStyle>
+    <a:defPPr>
+      <a:defRPr lang="en-US"/>
+    </a:defPPr>
+    <a:lvl1pPr marL="0" algn="l" defTabSz="914400" rtl="0" eaLnBrk="1" latinLnBrk="0" hangingPunct="1">
+      <a:defRPr sz="1800" kern="1200">
+        <a:solidFill>
+          <a:schemeClr val="tx1"/>
+        </a:solidFill>
+        <a:latin typeface="+mn-lt"/>
+        <a:ea typeface="+mn-ea"/>
+        <a:cs typeface="+mn-cs"/>
+      </a:defRPr>
+    </a:lvl1pPr>
+    <a:lvl2pPr marL="457200" algn="l" defTabSz="914400" rtl="0" eaLnBrk="1" latinLnBrk="0" hangingPunct="1">
+      <a:defRPr sz="1800" kern="1200">
+        <a:solidFill>
+          <a:schemeClr val="tx1"/>
+        </a:solidFill>
+        <a:latin typeface="+mn-lt"/>
+        <a:ea typeface="+mn-ea"/>
+        <a:cs typeface="+mn-cs"/>
+      </a:defRPr>
+    </a:lvl2pPr>
+    <a:lvl3pPr marL="914400" algn="l" defTabSz="914400" rtl="0" eaLnBrk="1" latinLnBrk="0" hangingPunct="1">
+      <a:defRPr sz="1800" kern="1200">
+        <a:solidFill>
+          <a:schemeClr val="tx1"/>
+        </a:solidFill>
+        <a:latin typeface="+mn-lt"/>
+        <a:ea typeface="+mn-ea"/>
+        <a:cs typeface="+mn-cs"/>
+      </a:defRPr>
+    </a:lvl3pPr>
+    <a:lvl4pPr marL="1371600" algn="l" defTabSz="914400" rtl="0" eaLnBrk="1" latinLnBrk="0" hangingPunct="1">
+      <a:defRPr sz="1800" kern="1200">
+        <a:solidFill>
+          <a:schemeClr val="tx1"/>
+        </a:solidFill>
+        <a:latin typeface="+mn-lt"/>
+        <a:ea typeface="+mn-ea"/>
+        <a:cs typeface="+mn-cs"/>
+      </a:defRPr>
+    </a:lvl4pPr>
+    <a:lvl5pPr marL="1828800" algn="l" defTabSz="914400" rtl="0" eaLnBrk="1" latinLnBrk="0" hangingPunct="1">
+      <a:defRPr sz="1800" kern="1200">
+        <a:solidFill>
+          <a:schemeClr val="tx1"/>
+        </a:solidFill>
+        <a:latin typeface="+mn-lt"/>
+        <a:ea typeface="+mn-ea"/>
+        <a:cs typeface="+mn-cs"/>
+      </a:defRPr>
+    </a:lvl5pPr>
+    <a:lvl6pPr marL="2286000" algn="l" defTabSz="914400" rtl="0" eaLnBrk="1" latinLnBrk="0" hangingPunct="1">
+      <a:defRPr sz="1800" kern="1200">
+        <a:solidFill>
+          <a:schemeClr val="tx1"/>
+        </a:solidFill>
+        <a:latin typeface="+mn-lt"/>
+        <a:ea typeface="+mn-ea"/>
+        <a:cs typeface="+mn-cs"/>
+      </a:defRPr>
+    </a:lvl6pPr>
+    <a:lvl7pPr marL="2743200" algn="l" defTabSz="914400" rtl="0" eaLnBrk="1" latinLnBrk="0" hangingPunct="1">
+      <a:defRPr sz="1800" kern="1200">
+        <a:solidFill>
+          <a:schemeClr val="tx1"/>
+        </a:solidFill>
+        <a:latin typeface="+mn-lt"/>
+        <a:ea typeface="+mn-ea"/>
+        <a:cs typeface="+mn-cs"/>
+      </a:defRPr>
+    </a:lvl7pPr>
+    <a:lvl8pPr marL="3200400" algn="l" defTabSz="914400" rtl="0" eaLnBrk="1" latinLnBrk="0" hangingPunct="1">
+      <a:defRPr sz="1800" kern="1200">
+        <a:solidFill>
+          <a:schemeClr val="tx1"/>
+        </a:solidFill>
+        <a:latin typeface="+mn-lt"/>
+        <a:ea typeface="+mn-ea"/>
+        <a:cs typeface="+mn-cs"/>
+      </a:defRPr>
+    </a:lvl8pPr>
+    <a:lvl9pPr marL="3657600" algn="l" defTabSz="914400" rtl="0" eaLnBrk="1" latinLnBrk="0" hangingPunct="1">
+      <a:defRPr sz="1800" kern="1200">
+        <a:solidFill>
+          <a:schemeClr val="tx1"/>
+        </a:solidFill>
+        <a:latin typeface="+mn-lt"/>
+        <a:ea typeface="+mn-ea"/>
+        <a:cs typeface="+mn-cs"/>
+      </a:defRPr>
+    </a:lvl9pPr>
+  </p:defaultTextStyle>
 </p:presentation>
 </file>
 
 <file path=ppt/charts/chart1.xml><?xml version="1.0" encoding="utf-8"?>
-<c:chartSpace xmlns:c="http://schemas.openxmlformats.org/drawingml/2006/chart" xmlns:a="http://schemas.openxmlformats.org/drawingml/2006/main" xmlns:r="http://schemas.openxmlformats.org/officeDocument/2006/relationships">
+<c:chartSpace xmlns:c="http://schemas.openxmlformats.org/drawingml/2006/chart" xmlns:a="http://schemas.openxmlformats.org/drawingml/2006/main" xmlns:r="http://schemas.openxmlformats.org/officeDocument/2006/relationships" xmlns:c16r2="http://schemas.microsoft.com/office/drawing/2015/06/chart">
+  <c:date1904 val="1"/>
   <c:lang val="en-US"/>
   <c:roundedCorners val="0"/>
+  <c:style val="2"/>
   <c:chart>
     <c:autoTitleDeleted val="1"/>
     <c:plotArea>
+      <c:layout/>
       <c:barChart>
         <c:barDir val="col"/>
         <c:grouping val="clustered"/>
@@ -58,12 +156,19 @@
           </c:spPr>
           <c:invertIfNegative val="0"/>
           <c:dLbls>
+            <c:spPr>
+              <a:noFill/>
+              <a:ln>
+                <a:noFill/>
+              </a:ln>
+              <a:effectLst/>
+            </c:spPr>
             <c:txPr>
               <a:bodyPr wrap="none"/>
               <a:lstStyle/>
               <a:p>
                 <a:pPr>
-                  <a:defRPr b="0" sz="1000" strike="noStrike" u="none">
+                  <a:defRPr sz="1000" b="0" u="none" strike="noStrike">
                     <a:solidFill>
                       <a:srgbClr val="000000"/>
                     </a:solidFill>
@@ -72,6 +177,7 @@
                     <a:ea typeface="DejaVu Sans"/>
                   </a:defRPr>
                 </a:pPr>
+                <a:endParaRPr lang="en-US"/>
               </a:p>
             </c:txPr>
             <c:dLblPos val="outEnd"/>
@@ -80,20 +186,21 @@
             <c:showCatName val="0"/>
             <c:showSerName val="0"/>
             <c:showPercent val="0"/>
+            <c:showBubbleSize val="1"/>
             <c:separator> </c:separator>
-            <c:showLeaderLines val="1"/>
-            <c:leaderLines>
-              <c:spPr>
-                <a:ln w="0">
-                  <a:solidFill>
-                    <a:srgbClr val="000000"/>
-                  </a:solidFill>
-                </a:ln>
-              </c:spPr>
-            </c:leaderLines>
+            <c:showLeaderLines val="0"/>
             <c:extLst>
               <c:ext xmlns:c15="http://schemas.microsoft.com/office/drawing/2012/chart" uri="{CE6537A1-D6FC-4f65-9D91-7224C49458BB}">
                 <c15:showLeaderLines val="1"/>
+                <c15:leaderLines>
+                  <c:spPr>
+                    <a:ln w="0">
+                      <a:solidFill>
+                        <a:srgbClr val="000000"/>
+                      </a:solidFill>
+                    </a:ln>
+                  </c:spPr>
+                </c15:leaderLines>
               </c:ext>
             </c:extLst>
           </c:dLbls>
@@ -138,6 +245,11 @@
               </c:numCache>
             </c:numRef>
           </c:val>
+          <c:extLst>
+            <c:ext xmlns:c16="http://schemas.microsoft.com/office/drawing/2014/chart" uri="{C3380CC4-5D6E-409C-BE32-E72D297353CC}">
+              <c16:uniqueId val="{00000000-0190-48B2-9F78-986D9E5A4AEB}"/>
+            </c:ext>
+          </c:extLst>
         </c:ser>
         <c:ser>
           <c:idx val="1"/>
@@ -155,7 +267,7 @@
           </c:tx>
           <c:spPr>
             <a:solidFill>
-              <a:srgbClr val="ff420e"/>
+              <a:srgbClr val="FF420E"/>
             </a:solidFill>
             <a:ln w="0">
               <a:noFill/>
@@ -163,12 +275,19 @@
           </c:spPr>
           <c:invertIfNegative val="0"/>
           <c:dLbls>
+            <c:spPr>
+              <a:noFill/>
+              <a:ln>
+                <a:noFill/>
+              </a:ln>
+              <a:effectLst/>
+            </c:spPr>
             <c:txPr>
               <a:bodyPr wrap="none"/>
               <a:lstStyle/>
               <a:p>
                 <a:pPr>
-                  <a:defRPr b="0" sz="1000" strike="noStrike" u="none">
+                  <a:defRPr sz="1000" b="0" u="none" strike="noStrike">
                     <a:solidFill>
                       <a:srgbClr val="000000"/>
                     </a:solidFill>
@@ -177,6 +296,7 @@
                     <a:ea typeface="DejaVu Sans"/>
                   </a:defRPr>
                 </a:pPr>
+                <a:endParaRPr lang="en-US"/>
               </a:p>
             </c:txPr>
             <c:dLblPos val="outEnd"/>
@@ -185,20 +305,21 @@
             <c:showCatName val="0"/>
             <c:showSerName val="0"/>
             <c:showPercent val="0"/>
+            <c:showBubbleSize val="1"/>
             <c:separator> </c:separator>
-            <c:showLeaderLines val="1"/>
-            <c:leaderLines>
-              <c:spPr>
-                <a:ln w="0">
-                  <a:solidFill>
-                    <a:srgbClr val="000000"/>
-                  </a:solidFill>
-                </a:ln>
-              </c:spPr>
-            </c:leaderLines>
+            <c:showLeaderLines val="0"/>
             <c:extLst>
               <c:ext xmlns:c15="http://schemas.microsoft.com/office/drawing/2012/chart" uri="{CE6537A1-D6FC-4f65-9D91-7224C49458BB}">
                 <c15:showLeaderLines val="1"/>
+                <c15:leaderLines>
+                  <c:spPr>
+                    <a:ln w="0">
+                      <a:solidFill>
+                        <a:srgbClr val="000000"/>
+                      </a:solidFill>
+                    </a:ln>
+                  </c:spPr>
+                </c15:leaderLines>
               </c:ext>
             </c:extLst>
           </c:dLbls>
@@ -232,7 +353,7 @@
                   <c:v>3.2</c:v>
                 </c:pt>
                 <c:pt idx="1">
-                  <c:v>8.8</c:v>
+                  <c:v>8.8000000000000007</c:v>
                 </c:pt>
                 <c:pt idx="2">
                   <c:v>1.5</c:v>
@@ -243,6 +364,11 @@
               </c:numCache>
             </c:numRef>
           </c:val>
+          <c:extLst>
+            <c:ext xmlns:c16="http://schemas.microsoft.com/office/drawing/2014/chart" uri="{C3380CC4-5D6E-409C-BE32-E72D297353CC}">
+              <c16:uniqueId val="{00000001-0190-48B2-9F78-986D9E5A4AEB}"/>
+            </c:ext>
+          </c:extLst>
         </c:ser>
         <c:ser>
           <c:idx val="2"/>
@@ -260,7 +386,7 @@
           </c:tx>
           <c:spPr>
             <a:solidFill>
-              <a:srgbClr val="ffd320"/>
+              <a:srgbClr val="FFD320"/>
             </a:solidFill>
             <a:ln w="0">
               <a:noFill/>
@@ -268,12 +394,19 @@
           </c:spPr>
           <c:invertIfNegative val="0"/>
           <c:dLbls>
+            <c:spPr>
+              <a:noFill/>
+              <a:ln>
+                <a:noFill/>
+              </a:ln>
+              <a:effectLst/>
+            </c:spPr>
             <c:txPr>
               <a:bodyPr wrap="none"/>
               <a:lstStyle/>
               <a:p>
                 <a:pPr>
-                  <a:defRPr b="0" sz="1000" strike="noStrike" u="none">
+                  <a:defRPr sz="1000" b="0" u="none" strike="noStrike">
                     <a:solidFill>
                       <a:srgbClr val="000000"/>
                     </a:solidFill>
@@ -282,6 +415,7 @@
                     <a:ea typeface="DejaVu Sans"/>
                   </a:defRPr>
                 </a:pPr>
+                <a:endParaRPr lang="en-US"/>
               </a:p>
             </c:txPr>
             <c:dLblPos val="outEnd"/>
@@ -290,20 +424,21 @@
             <c:showCatName val="0"/>
             <c:showSerName val="0"/>
             <c:showPercent val="0"/>
+            <c:showBubbleSize val="1"/>
             <c:separator> </c:separator>
-            <c:showLeaderLines val="1"/>
-            <c:leaderLines>
-              <c:spPr>
-                <a:ln w="0">
-                  <a:solidFill>
-                    <a:srgbClr val="000000"/>
-                  </a:solidFill>
-                </a:ln>
-              </c:spPr>
-            </c:leaderLines>
+            <c:showLeaderLines val="0"/>
             <c:extLst>
               <c:ext xmlns:c15="http://schemas.microsoft.com/office/drawing/2012/chart" uri="{CE6537A1-D6FC-4f65-9D91-7224C49458BB}">
                 <c15:showLeaderLines val="1"/>
+                <c15:leaderLines>
+                  <c:spPr>
+                    <a:ln w="0">
+                      <a:solidFill>
+                        <a:srgbClr val="000000"/>
+                      </a:solidFill>
+                    </a:ln>
+                  </c:spPr>
+                </c15:leaderLines>
               </c:ext>
             </c:extLst>
           </c:dLbls>
@@ -348,9 +483,21 @@
               </c:numCache>
             </c:numRef>
           </c:val>
+          <c:extLst>
+            <c:ext xmlns:c16="http://schemas.microsoft.com/office/drawing/2014/chart" uri="{C3380CC4-5D6E-409C-BE32-E72D297353CC}">
+              <c16:uniqueId val="{00000002-0190-48B2-9F78-986D9E5A4AEB}"/>
+            </c:ext>
+          </c:extLst>
         </c:ser>
+        <c:dLbls>
+          <c:showLegendKey val="0"/>
+          <c:showVal val="0"/>
+          <c:showCatName val="0"/>
+          <c:showSerName val="0"/>
+          <c:showPercent val="0"/>
+          <c:showBubbleSize val="0"/>
+        </c:dLbls>
         <c:gapWidth val="100"/>
-        <c:overlap val="0"/>
         <c:axId val="8462887"/>
         <c:axId val="40937315"/>
       </c:barChart>
@@ -368,7 +515,7 @@
         <c:spPr>
           <a:ln w="0">
             <a:solidFill>
-              <a:srgbClr val="b3b3b3"/>
+              <a:srgbClr val="B3B3B3"/>
             </a:solidFill>
           </a:ln>
         </c:spPr>
@@ -377,7 +524,7 @@
           <a:lstStyle/>
           <a:p>
             <a:pPr>
-              <a:defRPr b="0" sz="1000" strike="noStrike" u="none">
+              <a:defRPr sz="1000" b="0" u="none" strike="noStrike">
                 <a:solidFill>
                   <a:srgbClr val="000000"/>
                 </a:solidFill>
@@ -386,6 +533,7 @@
                 <a:ea typeface="DejaVu Sans"/>
               </a:defRPr>
             </a:pPr>
+            <a:endParaRPr lang="en-US"/>
           </a:p>
         </c:txPr>
         <c:crossAx val="40937315"/>
@@ -406,7 +554,7 @@
           <c:spPr>
             <a:ln w="0">
               <a:solidFill>
-                <a:srgbClr val="b3b3b3"/>
+                <a:srgbClr val="B3B3B3"/>
               </a:solidFill>
             </a:ln>
           </c:spPr>
@@ -418,7 +566,7 @@
         <c:spPr>
           <a:ln w="0">
             <a:solidFill>
-              <a:srgbClr val="b3b3b3"/>
+              <a:srgbClr val="B3B3B3"/>
             </a:solidFill>
           </a:ln>
         </c:spPr>
@@ -427,7 +575,7 @@
           <a:lstStyle/>
           <a:p>
             <a:pPr>
-              <a:defRPr b="0" sz="1000" strike="noStrike" u="none">
+              <a:defRPr sz="1000" b="0" u="none" strike="noStrike">
                 <a:solidFill>
                   <a:srgbClr val="000000"/>
                 </a:solidFill>
@@ -436,6 +584,7 @@
                 <a:ea typeface="DejaVu Sans"/>
               </a:defRPr>
             </a:pPr>
+            <a:endParaRPr lang="en-US"/>
           </a:p>
         </c:txPr>
         <c:crossAx val="8462887"/>
@@ -446,7 +595,7 @@
         <a:noFill/>
         <a:ln w="0">
           <a:solidFill>
-            <a:srgbClr val="b3b3b3"/>
+            <a:srgbClr val="B3B3B3"/>
           </a:solidFill>
         </a:ln>
       </c:spPr>
@@ -465,7 +614,7 @@
         <a:lstStyle/>
         <a:p>
           <a:pPr>
-            <a:defRPr b="0" sz="1000" strike="noStrike" u="none">
+            <a:defRPr sz="1000" b="0" u="none" strike="noStrike">
               <a:solidFill>
                 <a:srgbClr val="000000"/>
               </a:solidFill>
@@ -474,11 +623,13 @@
               <a:ea typeface="DejaVu Sans"/>
             </a:defRPr>
           </a:pPr>
+          <a:endParaRPr lang="en-US"/>
         </a:p>
       </c:txPr>
     </c:legend>
     <c:plotVisOnly val="1"/>
     <c:dispBlanksAs val="gap"/>
+    <c:showDLblsOverMax val="1"/>
   </c:chart>
   <c:spPr>
     <a:noFill/>
@@ -490,7 +641,7 @@
 </file>
 
 <file path=ppt/slideLayouts/slideLayout1.xml><?xml version="1.0" encoding="utf-8"?>
-<p:sldLayout xmlns:a="http://schemas.openxmlformats.org/drawingml/2006/main" xmlns:p="http://schemas.openxmlformats.org/presentationml/2006/main" xmlns:r="http://schemas.openxmlformats.org/officeDocument/2006/relationships" xmlns:p14="http://schemas.microsoft.com/office/powerpoint/2010/main" xmlns:p15="http://schemas.microsoft.com/office/powerpoint/2012/main" xmlns:mc="http://schemas.openxmlformats.org/markup-compatibility/2006" type="tx" preserve="1">
+<p:sldLayout xmlns:a="http://schemas.openxmlformats.org/drawingml/2006/main" xmlns:r="http://schemas.openxmlformats.org/officeDocument/2006/relationships" xmlns:p="http://schemas.openxmlformats.org/presentationml/2006/main" type="tx" preserve="1">
   <p:cSld name="Default">
     <p:spTree>
       <p:nvGrpSpPr>
@@ -508,7 +659,7 @@
       </p:grpSpPr>
       <p:sp>
         <p:nvSpPr>
-          <p:cNvPr id="0" name="PlaceHolder 1"/>
+          <p:cNvPr id="5" name="PlaceHolder 1"/>
           <p:cNvSpPr>
             <a:spLocks noGrp="1"/>
           </p:cNvSpPr>
@@ -530,9 +681,10 @@
           </a:ln>
         </p:spPr>
         <p:txBody>
-          <a:bodyPr lIns="0" rIns="0" tIns="0" bIns="0" anchor="ctr">
+          <a:bodyPr lIns="0" tIns="0" rIns="0" bIns="0" anchor="ctr">
             <a:spAutoFit/>
           </a:bodyPr>
+          <a:lstStyle/>
           <a:p>
             <a:pPr indent="0">
               <a:lnSpc>
@@ -540,11 +692,11 @@
               </a:lnSpc>
               <a:buNone/>
               <a:tabLst>
-                <a:tab algn="l" pos="0"/>
+                <a:tab pos="0" algn="l"/>
               </a:tabLst>
             </a:pPr>
             <a:r>
-              <a:rPr b="0" lang="en-US" sz="1800" strike="noStrike" u="none">
+              <a:rPr lang="en-US" sz="1800" b="0" u="none" strike="noStrike">
                 <a:solidFill>
                   <a:srgbClr val="000000"/>
                 </a:solidFill>
@@ -554,20 +706,12 @@
               </a:rPr>
               <a:t>Click to edit the title text format</a:t>
             </a:r>
-            <a:endParaRPr b="0" lang="en-US" sz="1800" strike="noStrike" u="none">
-              <a:solidFill>
-                <a:srgbClr val="000000"/>
-              </a:solidFill>
-              <a:effectLst/>
-              <a:uFillTx/>
-              <a:latin typeface="Arial"/>
-            </a:endParaRPr>
           </a:p>
         </p:txBody>
       </p:sp>
       <p:sp>
         <p:nvSpPr>
-          <p:cNvPr id="1" name="PlaceHolder 2"/>
+          <p:cNvPr id="6" name="PlaceHolder 2"/>
           <p:cNvSpPr>
             <a:spLocks noGrp="1"/>
           </p:cNvSpPr>
@@ -589,9 +733,10 @@
           </a:ln>
         </p:spPr>
         <p:txBody>
-          <a:bodyPr lIns="0" rIns="0" tIns="0" bIns="0" anchor="t">
+          <a:bodyPr lIns="0" tIns="0" rIns="0" bIns="0" anchor="t">
             <a:normAutofit/>
           </a:bodyPr>
+          <a:lstStyle/>
           <a:p>
             <a:pPr marL="432000" indent="-324000">
               <a:lnSpc>
@@ -608,7 +753,7 @@
               <a:buChar char=""/>
             </a:pPr>
             <a:r>
-              <a:rPr b="0" lang="en-US" sz="1800" strike="noStrike" u="none">
+              <a:rPr lang="en-US" sz="1800" b="0" u="none" strike="noStrike">
                 <a:solidFill>
                   <a:srgbClr val="000000"/>
                 </a:solidFill>
@@ -618,17 +763,9 @@
               </a:rPr>
               <a:t>Click to edit the outline text format</a:t>
             </a:r>
-            <a:endParaRPr b="0" lang="en-US" sz="1800" strike="noStrike" u="none">
-              <a:solidFill>
-                <a:srgbClr val="000000"/>
-              </a:solidFill>
-              <a:effectLst/>
-              <a:uFillTx/>
-              <a:latin typeface="Arial"/>
-            </a:endParaRPr>
-          </a:p>
-          <a:p>
-            <a:pPr lvl="1" marL="864000" indent="-324000">
+          </a:p>
+          <a:p>
+            <a:pPr marL="864000" lvl="1" indent="-324000">
               <a:lnSpc>
                 <a:spcPct val="100000"/>
               </a:lnSpc>
@@ -643,7 +780,7 @@
               <a:buChar char=""/>
             </a:pPr>
             <a:r>
-              <a:rPr b="0" lang="en-US" sz="1800" strike="noStrike" u="none">
+              <a:rPr lang="en-US" sz="1800" b="0" u="none" strike="noStrike">
                 <a:solidFill>
                   <a:srgbClr val="000000"/>
                 </a:solidFill>
@@ -653,17 +790,9 @@
               </a:rPr>
               <a:t>Second Outline Level</a:t>
             </a:r>
-            <a:endParaRPr b="0" lang="en-US" sz="1800" strike="noStrike" u="none">
-              <a:solidFill>
-                <a:srgbClr val="000000"/>
-              </a:solidFill>
-              <a:effectLst/>
-              <a:uFillTx/>
-              <a:latin typeface="Arial"/>
-            </a:endParaRPr>
-          </a:p>
-          <a:p>
-            <a:pPr lvl="2" marL="1296000" indent="-288000">
+          </a:p>
+          <a:p>
+            <a:pPr marL="1296000" lvl="2" indent="-288000">
               <a:lnSpc>
                 <a:spcPct val="100000"/>
               </a:lnSpc>
@@ -678,7 +807,7 @@
               <a:buChar char=""/>
             </a:pPr>
             <a:r>
-              <a:rPr b="0" lang="en-US" sz="1800" strike="noStrike" u="none">
+              <a:rPr lang="en-US" sz="1800" b="0" u="none" strike="noStrike">
                 <a:solidFill>
                   <a:srgbClr val="000000"/>
                 </a:solidFill>
@@ -688,17 +817,9 @@
               </a:rPr>
               <a:t>Third Outline Level</a:t>
             </a:r>
-            <a:endParaRPr b="0" lang="en-US" sz="1800" strike="noStrike" u="none">
-              <a:solidFill>
-                <a:srgbClr val="000000"/>
-              </a:solidFill>
-              <a:effectLst/>
-              <a:uFillTx/>
-              <a:latin typeface="Arial"/>
-            </a:endParaRPr>
-          </a:p>
-          <a:p>
-            <a:pPr lvl="3" marL="1728000" indent="-216000">
+          </a:p>
+          <a:p>
+            <a:pPr marL="1728000" lvl="3" indent="-216000">
               <a:lnSpc>
                 <a:spcPct val="100000"/>
               </a:lnSpc>
@@ -713,7 +834,7 @@
               <a:buChar char=""/>
             </a:pPr>
             <a:r>
-              <a:rPr b="0" lang="en-US" sz="1800" strike="noStrike" u="none">
+              <a:rPr lang="en-US" sz="1800" b="0" u="none" strike="noStrike">
                 <a:solidFill>
                   <a:srgbClr val="000000"/>
                 </a:solidFill>
@@ -723,17 +844,9 @@
               </a:rPr>
               <a:t>Fourth Outline Level</a:t>
             </a:r>
-            <a:endParaRPr b="0" lang="en-US" sz="1800" strike="noStrike" u="none">
-              <a:solidFill>
-                <a:srgbClr val="000000"/>
-              </a:solidFill>
-              <a:effectLst/>
-              <a:uFillTx/>
-              <a:latin typeface="Arial"/>
-            </a:endParaRPr>
-          </a:p>
-          <a:p>
-            <a:pPr lvl="4" marL="2160000" indent="-216000">
+          </a:p>
+          <a:p>
+            <a:pPr marL="2160000" lvl="4" indent="-216000">
               <a:lnSpc>
                 <a:spcPct val="100000"/>
               </a:lnSpc>
@@ -748,7 +861,7 @@
               <a:buChar char=""/>
             </a:pPr>
             <a:r>
-              <a:rPr b="0" lang="en-US" sz="1800" strike="noStrike" u="none">
+              <a:rPr lang="en-US" sz="1800" b="0" u="none" strike="noStrike">
                 <a:solidFill>
                   <a:srgbClr val="000000"/>
                 </a:solidFill>
@@ -758,17 +871,9 @@
               </a:rPr>
               <a:t>Fifth Outline Level</a:t>
             </a:r>
-            <a:endParaRPr b="0" lang="en-US" sz="1800" strike="noStrike" u="none">
-              <a:solidFill>
-                <a:srgbClr val="000000"/>
-              </a:solidFill>
-              <a:effectLst/>
-              <a:uFillTx/>
-              <a:latin typeface="Arial"/>
-            </a:endParaRPr>
-          </a:p>
-          <a:p>
-            <a:pPr lvl="5" marL="2592000" indent="-216000">
+          </a:p>
+          <a:p>
+            <a:pPr marL="2592000" lvl="5" indent="-216000">
               <a:lnSpc>
                 <a:spcPct val="100000"/>
               </a:lnSpc>
@@ -783,7 +888,7 @@
               <a:buChar char=""/>
             </a:pPr>
             <a:r>
-              <a:rPr b="0" lang="en-US" sz="1800" strike="noStrike" u="none">
+              <a:rPr lang="en-US" sz="1800" b="0" u="none" strike="noStrike">
                 <a:solidFill>
                   <a:srgbClr val="000000"/>
                 </a:solidFill>
@@ -793,17 +898,9 @@
               </a:rPr>
               <a:t>Sixth Outline Level</a:t>
             </a:r>
-            <a:endParaRPr b="0" lang="en-US" sz="1800" strike="noStrike" u="none">
-              <a:solidFill>
-                <a:srgbClr val="000000"/>
-              </a:solidFill>
-              <a:effectLst/>
-              <a:uFillTx/>
-              <a:latin typeface="Arial"/>
-            </a:endParaRPr>
-          </a:p>
-          <a:p>
-            <a:pPr lvl="6" marL="3024000" indent="-216000">
+          </a:p>
+          <a:p>
+            <a:pPr marL="3024000" lvl="6" indent="-216000">
               <a:lnSpc>
                 <a:spcPct val="100000"/>
               </a:lnSpc>
@@ -818,7 +915,7 @@
               <a:buChar char=""/>
             </a:pPr>
             <a:r>
-              <a:rPr b="0" lang="en-US" sz="1800" strike="noStrike" u="none">
+              <a:rPr lang="en-US" sz="1800" b="0" u="none" strike="noStrike">
                 <a:solidFill>
                   <a:srgbClr val="000000"/>
                 </a:solidFill>
@@ -828,14 +925,6 @@
               </a:rPr>
               <a:t>Seventh Outline Level</a:t>
             </a:r>
-            <a:endParaRPr b="0" lang="en-US" sz="1800" strike="noStrike" u="none">
-              <a:solidFill>
-                <a:srgbClr val="000000"/>
-              </a:solidFill>
-              <a:effectLst/>
-              <a:uFillTx/>
-              <a:latin typeface="Arial"/>
-            </a:endParaRPr>
           </a:p>
         </p:txBody>
       </p:sp>
@@ -863,7 +952,7 @@
           </a:ln>
         </p:spPr>
         <p:txBody>
-          <a:bodyPr lIns="0" rIns="0" tIns="0" bIns="0" anchor="t">
+          <a:bodyPr lIns="0" tIns="0" rIns="0" bIns="0" anchor="t">
             <a:noAutofit/>
           </a:bodyPr>
           <a:lstStyle>
@@ -873,9 +962,9 @@
               </a:lnSpc>
               <a:buNone/>
               <a:tabLst>
-                <a:tab algn="l" pos="0"/>
+                <a:tab pos="0" algn="l"/>
               </a:tabLst>
-              <a:defRPr b="0" lang="en-US" sz="1400" strike="noStrike" u="none">
+              <a:defRPr lang="en-US" sz="1400" b="0" u="none" strike="noStrike">
                 <a:solidFill>
                   <a:srgbClr val="000000"/>
                 </a:solidFill>
@@ -892,11 +981,11 @@
               </a:lnSpc>
               <a:buNone/>
               <a:tabLst>
-                <a:tab algn="l" pos="0"/>
+                <a:tab pos="0" algn="l"/>
               </a:tabLst>
             </a:pPr>
             <a:r>
-              <a:rPr b="0" lang="en-US" sz="1400" strike="noStrike" u="none">
+              <a:rPr lang="en-US" sz="1400" b="0" u="none" strike="noStrike">
                 <a:solidFill>
                   <a:srgbClr val="000000"/>
                 </a:solidFill>
@@ -906,14 +995,6 @@
               </a:rPr>
               <a:t>&lt;footer&gt;</a:t>
             </a:r>
-            <a:endParaRPr b="0" lang="en-US" sz="1400" strike="noStrike" u="none">
-              <a:solidFill>
-                <a:srgbClr val="000000"/>
-              </a:solidFill>
-              <a:effectLst/>
-              <a:uFillTx/>
-              <a:latin typeface="Times New Roman"/>
-            </a:endParaRPr>
           </a:p>
         </p:txBody>
       </p:sp>
@@ -941,7 +1022,7 @@
           </a:ln>
         </p:spPr>
         <p:txBody>
-          <a:bodyPr lIns="0" rIns="0" tIns="0" bIns="0" anchor="t">
+          <a:bodyPr lIns="0" tIns="0" rIns="0" bIns="0" anchor="t">
             <a:noAutofit/>
           </a:bodyPr>
           <a:lstStyle>
@@ -951,9 +1032,9 @@
               </a:lnSpc>
               <a:buNone/>
               <a:tabLst>
-                <a:tab algn="l" pos="0"/>
+                <a:tab pos="0" algn="l"/>
               </a:tabLst>
-              <a:defRPr b="0" lang="en-US" sz="1400" strike="noStrike" u="none">
+              <a:defRPr lang="en-US" sz="1400" b="0" u="none" strike="noStrike">
                 <a:solidFill>
                   <a:srgbClr val="000000"/>
                 </a:solidFill>
@@ -970,11 +1051,11 @@
               </a:lnSpc>
               <a:buNone/>
               <a:tabLst>
-                <a:tab algn="l" pos="0"/>
+                <a:tab pos="0" algn="l"/>
               </a:tabLst>
             </a:pPr>
             <a:fld id="{AFA0E869-E2A5-473A-A085-52CAFBD05CF5}" type="slidenum">
-              <a:rPr b="0" lang="en-US" sz="1400" strike="noStrike" u="none">
+              <a:rPr lang="en-US" sz="1400" b="0" u="none" strike="noStrike">
                 <a:solidFill>
                   <a:srgbClr val="000000"/>
                 </a:solidFill>
@@ -982,9 +1063,9 @@
                 <a:uFillTx/>
                 <a:latin typeface="Times New Roman"/>
               </a:rPr>
-              <a:t>&lt;number&gt;</a:t>
+              <a:t>‹#›</a:t>
             </a:fld>
-            <a:endParaRPr b="0" lang="en-US" sz="1400" strike="noStrike" u="none">
+            <a:endParaRPr lang="en-US" sz="1400" b="0" u="none" strike="noStrike">
               <a:solidFill>
                 <a:srgbClr val="000000"/>
               </a:solidFill>
@@ -1019,7 +1100,7 @@
           </a:ln>
         </p:spPr>
         <p:txBody>
-          <a:bodyPr lIns="0" rIns="0" tIns="0" bIns="0" anchor="t">
+          <a:bodyPr lIns="0" tIns="0" rIns="0" bIns="0" anchor="t">
             <a:noAutofit/>
           </a:bodyPr>
           <a:lstStyle>
@@ -1029,9 +1110,9 @@
               </a:lnSpc>
               <a:buNone/>
               <a:tabLst>
-                <a:tab algn="l" pos="0"/>
+                <a:tab pos="0" algn="l"/>
               </a:tabLst>
-              <a:defRPr b="0" lang="en-US" sz="1400" strike="noStrike" u="none">
+              <a:defRPr lang="en-US" sz="1400" b="0" u="none" strike="noStrike">
                 <a:solidFill>
                   <a:srgbClr val="000000"/>
                 </a:solidFill>
@@ -1048,11 +1129,11 @@
               </a:lnSpc>
               <a:buNone/>
               <a:tabLst>
-                <a:tab algn="l" pos="0"/>
+                <a:tab pos="0" algn="l"/>
               </a:tabLst>
             </a:pPr>
             <a:r>
-              <a:rPr b="0" lang="en-US" sz="1400" strike="noStrike" u="none">
+              <a:rPr lang="en-US" sz="1400" b="0" u="none" strike="noStrike">
                 <a:solidFill>
                   <a:srgbClr val="000000"/>
                 </a:solidFill>
@@ -1062,24 +1143,19 @@
               </a:rPr>
               <a:t>&lt;date/time&gt;</a:t>
             </a:r>
-            <a:endParaRPr b="0" lang="en-US" sz="1400" strike="noStrike" u="none">
-              <a:solidFill>
-                <a:srgbClr val="000000"/>
-              </a:solidFill>
-              <a:effectLst/>
-              <a:uFillTx/>
-              <a:latin typeface="Times New Roman"/>
-            </a:endParaRPr>
           </a:p>
         </p:txBody>
       </p:sp>
     </p:spTree>
   </p:cSld>
+  <p:clrMapOvr>
+    <a:masterClrMapping/>
+  </p:clrMapOvr>
 </p:sldLayout>
 </file>
 
 <file path=ppt/slideLayouts/slideLayout2.xml><?xml version="1.0" encoding="utf-8"?>
-<p:sldLayout xmlns:a="http://schemas.openxmlformats.org/drawingml/2006/main" xmlns:p="http://schemas.openxmlformats.org/presentationml/2006/main" xmlns:r="http://schemas.openxmlformats.org/officeDocument/2006/relationships" xmlns:p14="http://schemas.microsoft.com/office/powerpoint/2010/main" xmlns:p15="http://schemas.microsoft.com/office/powerpoint/2012/main" xmlns:mc="http://schemas.openxmlformats.org/markup-compatibility/2006" type="title" preserve="1">
+<p:sldLayout xmlns:a="http://schemas.openxmlformats.org/drawingml/2006/main" xmlns:r="http://schemas.openxmlformats.org/officeDocument/2006/relationships" xmlns:p="http://schemas.openxmlformats.org/presentationml/2006/main" type="title" preserve="1">
   <p:cSld name="Default 1">
     <p:spTree>
       <p:nvGrpSpPr>
@@ -1119,9 +1195,10 @@
           </a:ln>
         </p:spPr>
         <p:txBody>
-          <a:bodyPr lIns="0" rIns="0" tIns="0" bIns="0" anchor="ctr">
+          <a:bodyPr lIns="0" tIns="0" rIns="0" bIns="0" anchor="ctr">
             <a:spAutoFit/>
           </a:bodyPr>
+          <a:lstStyle/>
           <a:p>
             <a:pPr indent="0">
               <a:lnSpc>
@@ -1129,11 +1206,11 @@
               </a:lnSpc>
               <a:buNone/>
               <a:tabLst>
-                <a:tab algn="l" pos="0"/>
+                <a:tab pos="0" algn="l"/>
               </a:tabLst>
             </a:pPr>
             <a:r>
-              <a:rPr b="0" lang="en-US" sz="1800" strike="noStrike" u="none">
+              <a:rPr lang="en-US" sz="1800" b="0" u="none" strike="noStrike">
                 <a:solidFill>
                   <a:srgbClr val="000000"/>
                 </a:solidFill>
@@ -1143,14 +1220,6 @@
               </a:rPr>
               <a:t>Click to edit the title text format</a:t>
             </a:r>
-            <a:endParaRPr b="0" lang="en-US" sz="1800" strike="noStrike" u="none">
-              <a:solidFill>
-                <a:srgbClr val="000000"/>
-              </a:solidFill>
-              <a:effectLst/>
-              <a:uFillTx/>
-              <a:latin typeface="Arial"/>
-            </a:endParaRPr>
           </a:p>
         </p:txBody>
       </p:sp>
@@ -1178,7 +1247,7 @@
           </a:ln>
         </p:spPr>
         <p:txBody>
-          <a:bodyPr lIns="0" rIns="0" tIns="0" bIns="0" anchor="t">
+          <a:bodyPr lIns="0" tIns="0" rIns="0" bIns="0" anchor="t">
             <a:noAutofit/>
           </a:bodyPr>
           <a:lstStyle>
@@ -1188,9 +1257,9 @@
               </a:lnSpc>
               <a:buNone/>
               <a:tabLst>
-                <a:tab algn="l" pos="0"/>
+                <a:tab pos="0" algn="l"/>
               </a:tabLst>
-              <a:defRPr b="0" lang="en-US" sz="1400" strike="noStrike" u="none">
+              <a:defRPr lang="en-US" sz="1400" b="0" u="none" strike="noStrike">
                 <a:solidFill>
                   <a:srgbClr val="000000"/>
                 </a:solidFill>
@@ -1207,11 +1276,11 @@
               </a:lnSpc>
               <a:buNone/>
               <a:tabLst>
-                <a:tab algn="l" pos="0"/>
+                <a:tab pos="0" algn="l"/>
               </a:tabLst>
             </a:pPr>
             <a:r>
-              <a:rPr b="0" lang="en-US" sz="1400" strike="noStrike" u="none">
+              <a:rPr lang="en-US" sz="1400" b="0" u="none" strike="noStrike">
                 <a:solidFill>
                   <a:srgbClr val="000000"/>
                 </a:solidFill>
@@ -1221,14 +1290,6 @@
               </a:rPr>
               <a:t>&lt;footer&gt;</a:t>
             </a:r>
-            <a:endParaRPr b="0" lang="en-US" sz="1400" strike="noStrike" u="none">
-              <a:solidFill>
-                <a:srgbClr val="000000"/>
-              </a:solidFill>
-              <a:effectLst/>
-              <a:uFillTx/>
-              <a:latin typeface="Times New Roman"/>
-            </a:endParaRPr>
           </a:p>
         </p:txBody>
       </p:sp>
@@ -1256,7 +1317,7 @@
           </a:ln>
         </p:spPr>
         <p:txBody>
-          <a:bodyPr lIns="0" rIns="0" tIns="0" bIns="0" anchor="t">
+          <a:bodyPr lIns="0" tIns="0" rIns="0" bIns="0" anchor="t">
             <a:noAutofit/>
           </a:bodyPr>
           <a:lstStyle>
@@ -1266,9 +1327,9 @@
               </a:lnSpc>
               <a:buNone/>
               <a:tabLst>
-                <a:tab algn="l" pos="0"/>
+                <a:tab pos="0" algn="l"/>
               </a:tabLst>
-              <a:defRPr b="0" lang="en-US" sz="1400" strike="noStrike" u="none">
+              <a:defRPr lang="en-US" sz="1400" b="0" u="none" strike="noStrike">
                 <a:solidFill>
                   <a:srgbClr val="000000"/>
                 </a:solidFill>
@@ -1285,11 +1346,11 @@
               </a:lnSpc>
               <a:buNone/>
               <a:tabLst>
-                <a:tab algn="l" pos="0"/>
+                <a:tab pos="0" algn="l"/>
               </a:tabLst>
             </a:pPr>
             <a:fld id="{0951E671-74EA-4627-935E-45AC3DD45675}" type="slidenum">
-              <a:rPr b="0" lang="en-US" sz="1400" strike="noStrike" u="none">
+              <a:rPr lang="en-US" sz="1400" b="0" u="none" strike="noStrike">
                 <a:solidFill>
                   <a:srgbClr val="000000"/>
                 </a:solidFill>
@@ -1297,9 +1358,9 @@
                 <a:uFillTx/>
                 <a:latin typeface="Times New Roman"/>
               </a:rPr>
-              <a:t>&lt;number&gt;</a:t>
+              <a:t>‹#›</a:t>
             </a:fld>
-            <a:endParaRPr b="0" lang="en-US" sz="1400" strike="noStrike" u="none">
+            <a:endParaRPr lang="en-US" sz="1400" b="0" u="none" strike="noStrike">
               <a:solidFill>
                 <a:srgbClr val="000000"/>
               </a:solidFill>
@@ -1334,7 +1395,7 @@
           </a:ln>
         </p:spPr>
         <p:txBody>
-          <a:bodyPr lIns="0" rIns="0" tIns="0" bIns="0" anchor="t">
+          <a:bodyPr lIns="0" tIns="0" rIns="0" bIns="0" anchor="t">
             <a:noAutofit/>
           </a:bodyPr>
           <a:lstStyle>
@@ -1344,9 +1405,9 @@
               </a:lnSpc>
               <a:buNone/>
               <a:tabLst>
-                <a:tab algn="l" pos="0"/>
+                <a:tab pos="0" algn="l"/>
               </a:tabLst>
-              <a:defRPr b="0" lang="en-US" sz="1400" strike="noStrike" u="none">
+              <a:defRPr lang="en-US" sz="1400" b="0" u="none" strike="noStrike">
                 <a:solidFill>
                   <a:srgbClr val="000000"/>
                 </a:solidFill>
@@ -1363,11 +1424,11 @@
               </a:lnSpc>
               <a:buNone/>
               <a:tabLst>
-                <a:tab algn="l" pos="0"/>
+                <a:tab pos="0" algn="l"/>
               </a:tabLst>
             </a:pPr>
             <a:r>
-              <a:rPr b="0" lang="en-US" sz="1400" strike="noStrike" u="none">
+              <a:rPr lang="en-US" sz="1400" b="0" u="none" strike="noStrike">
                 <a:solidFill>
                   <a:srgbClr val="000000"/>
                 </a:solidFill>
@@ -1377,14 +1438,6 @@
               </a:rPr>
               <a:t>&lt;date/time&gt;</a:t>
             </a:r>
-            <a:endParaRPr b="0" lang="en-US" sz="1400" strike="noStrike" u="none">
-              <a:solidFill>
-                <a:srgbClr val="000000"/>
-              </a:solidFill>
-              <a:effectLst/>
-              <a:uFillTx/>
-              <a:latin typeface="Times New Roman"/>
-            </a:endParaRPr>
           </a:p>
         </p:txBody>
       </p:sp>
@@ -1412,9 +1465,10 @@
           </a:ln>
         </p:spPr>
         <p:txBody>
-          <a:bodyPr lIns="0" rIns="0" tIns="0" bIns="0" anchor="t">
+          <a:bodyPr lIns="0" tIns="0" rIns="0" bIns="0" anchor="t">
             <a:normAutofit/>
           </a:bodyPr>
+          <a:lstStyle/>
           <a:p>
             <a:pPr marL="432000" indent="-324000">
               <a:lnSpc>
@@ -1431,7 +1485,7 @@
               <a:buChar char=""/>
             </a:pPr>
             <a:r>
-              <a:rPr b="0" lang="en-US" sz="3200" strike="noStrike" u="none">
+              <a:rPr lang="en-US" sz="3200" b="0" u="none" strike="noStrike">
                 <a:solidFill>
                   <a:srgbClr val="000000"/>
                 </a:solidFill>
@@ -1441,17 +1495,9 @@
               </a:rPr>
               <a:t>Click to edit the outline text format</a:t>
             </a:r>
-            <a:endParaRPr b="0" lang="en-US" sz="3200" strike="noStrike" u="none">
-              <a:solidFill>
-                <a:srgbClr val="000000"/>
-              </a:solidFill>
-              <a:effectLst/>
-              <a:uFillTx/>
-              <a:latin typeface="Arial"/>
-            </a:endParaRPr>
-          </a:p>
-          <a:p>
-            <a:pPr lvl="1" marL="864000" indent="-324000">
+          </a:p>
+          <a:p>
+            <a:pPr marL="864000" lvl="1" indent="-324000">
               <a:lnSpc>
                 <a:spcPct val="100000"/>
               </a:lnSpc>
@@ -1466,7 +1512,7 @@
               <a:buChar char=""/>
             </a:pPr>
             <a:r>
-              <a:rPr b="0" lang="en-US" sz="2800" strike="noStrike" u="none">
+              <a:rPr lang="en-US" sz="2800" b="0" u="none" strike="noStrike">
                 <a:solidFill>
                   <a:srgbClr val="000000"/>
                 </a:solidFill>
@@ -1476,17 +1522,9 @@
               </a:rPr>
               <a:t>Second Outline Level</a:t>
             </a:r>
-            <a:endParaRPr b="0" lang="en-US" sz="2800" strike="noStrike" u="none">
-              <a:solidFill>
-                <a:srgbClr val="000000"/>
-              </a:solidFill>
-              <a:effectLst/>
-              <a:uFillTx/>
-              <a:latin typeface="Arial"/>
-            </a:endParaRPr>
-          </a:p>
-          <a:p>
-            <a:pPr lvl="2" marL="1296000" indent="-288000">
+          </a:p>
+          <a:p>
+            <a:pPr marL="1296000" lvl="2" indent="-288000">
               <a:lnSpc>
                 <a:spcPct val="100000"/>
               </a:lnSpc>
@@ -1501,7 +1539,7 @@
               <a:buChar char=""/>
             </a:pPr>
             <a:r>
-              <a:rPr b="0" lang="en-US" sz="2400" strike="noStrike" u="none">
+              <a:rPr lang="en-US" sz="2400" b="0" u="none" strike="noStrike">
                 <a:solidFill>
                   <a:srgbClr val="000000"/>
                 </a:solidFill>
@@ -1511,17 +1549,9 @@
               </a:rPr>
               <a:t>Third Outline Level</a:t>
             </a:r>
-            <a:endParaRPr b="0" lang="en-US" sz="2400" strike="noStrike" u="none">
-              <a:solidFill>
-                <a:srgbClr val="000000"/>
-              </a:solidFill>
-              <a:effectLst/>
-              <a:uFillTx/>
-              <a:latin typeface="Arial"/>
-            </a:endParaRPr>
-          </a:p>
-          <a:p>
-            <a:pPr lvl="3" marL="1728000" indent="-216000">
+          </a:p>
+          <a:p>
+            <a:pPr marL="1728000" lvl="3" indent="-216000">
               <a:lnSpc>
                 <a:spcPct val="100000"/>
               </a:lnSpc>
@@ -1536,7 +1566,7 @@
               <a:buChar char=""/>
             </a:pPr>
             <a:r>
-              <a:rPr b="0" lang="en-US" sz="2000" strike="noStrike" u="none">
+              <a:rPr lang="en-US" sz="2000" b="0" u="none" strike="noStrike">
                 <a:solidFill>
                   <a:srgbClr val="000000"/>
                 </a:solidFill>
@@ -1546,17 +1576,9 @@
               </a:rPr>
               <a:t>Fourth Outline Level</a:t>
             </a:r>
-            <a:endParaRPr b="0" lang="en-US" sz="2000" strike="noStrike" u="none">
-              <a:solidFill>
-                <a:srgbClr val="000000"/>
-              </a:solidFill>
-              <a:effectLst/>
-              <a:uFillTx/>
-              <a:latin typeface="Arial"/>
-            </a:endParaRPr>
-          </a:p>
-          <a:p>
-            <a:pPr lvl="4" marL="2160000" indent="-216000">
+          </a:p>
+          <a:p>
+            <a:pPr marL="2160000" lvl="4" indent="-216000">
               <a:lnSpc>
                 <a:spcPct val="100000"/>
               </a:lnSpc>
@@ -1571,7 +1593,7 @@
               <a:buChar char=""/>
             </a:pPr>
             <a:r>
-              <a:rPr b="0" lang="en-US" sz="2000" strike="noStrike" u="none">
+              <a:rPr lang="en-US" sz="2000" b="0" u="none" strike="noStrike">
                 <a:solidFill>
                   <a:srgbClr val="000000"/>
                 </a:solidFill>
@@ -1581,17 +1603,9 @@
               </a:rPr>
               <a:t>Fifth Outline Level</a:t>
             </a:r>
-            <a:endParaRPr b="0" lang="en-US" sz="2000" strike="noStrike" u="none">
-              <a:solidFill>
-                <a:srgbClr val="000000"/>
-              </a:solidFill>
-              <a:effectLst/>
-              <a:uFillTx/>
-              <a:latin typeface="Arial"/>
-            </a:endParaRPr>
-          </a:p>
-          <a:p>
-            <a:pPr lvl="5" marL="2592000" indent="-216000">
+          </a:p>
+          <a:p>
+            <a:pPr marL="2592000" lvl="5" indent="-216000">
               <a:lnSpc>
                 <a:spcPct val="100000"/>
               </a:lnSpc>
@@ -1606,7 +1620,7 @@
               <a:buChar char=""/>
             </a:pPr>
             <a:r>
-              <a:rPr b="0" lang="en-US" sz="2000" strike="noStrike" u="none">
+              <a:rPr lang="en-US" sz="2000" b="0" u="none" strike="noStrike">
                 <a:solidFill>
                   <a:srgbClr val="000000"/>
                 </a:solidFill>
@@ -1616,17 +1630,9 @@
               </a:rPr>
               <a:t>Sixth Outline Level</a:t>
             </a:r>
-            <a:endParaRPr b="0" lang="en-US" sz="2000" strike="noStrike" u="none">
-              <a:solidFill>
-                <a:srgbClr val="000000"/>
-              </a:solidFill>
-              <a:effectLst/>
-              <a:uFillTx/>
-              <a:latin typeface="Arial"/>
-            </a:endParaRPr>
-          </a:p>
-          <a:p>
-            <a:pPr lvl="6" marL="3024000" indent="-216000">
+          </a:p>
+          <a:p>
+            <a:pPr marL="3024000" lvl="6" indent="-216000">
               <a:lnSpc>
                 <a:spcPct val="100000"/>
               </a:lnSpc>
@@ -1641,7 +1647,7 @@
               <a:buChar char=""/>
             </a:pPr>
             <a:r>
-              <a:rPr b="0" lang="en-US" sz="2000" strike="noStrike" u="none">
+              <a:rPr lang="en-US" sz="2000" b="0" u="none" strike="noStrike">
                 <a:solidFill>
                   <a:srgbClr val="000000"/>
                 </a:solidFill>
@@ -1651,25 +1657,25 @@
               </a:rPr>
               <a:t>Seventh Outline Level</a:t>
             </a:r>
-            <a:endParaRPr b="0" lang="en-US" sz="2000" strike="noStrike" u="none">
-              <a:solidFill>
-                <a:srgbClr val="000000"/>
-              </a:solidFill>
-              <a:effectLst/>
-              <a:uFillTx/>
-              <a:latin typeface="Arial"/>
-            </a:endParaRPr>
           </a:p>
         </p:txBody>
       </p:sp>
     </p:spTree>
   </p:cSld>
+  <p:clrMapOvr>
+    <a:masterClrMapping/>
+  </p:clrMapOvr>
 </p:sldLayout>
 </file>
 
 <file path=ppt/slideMasters/slideMaster1.xml><?xml version="1.0" encoding="utf-8"?>
-<p:sldMaster xmlns:a="http://schemas.openxmlformats.org/drawingml/2006/main" xmlns:p="http://schemas.openxmlformats.org/presentationml/2006/main" xmlns:r="http://schemas.openxmlformats.org/officeDocument/2006/relationships" xmlns:p14="http://schemas.microsoft.com/office/powerpoint/2010/main" xmlns:p15="http://schemas.microsoft.com/office/powerpoint/2012/main" xmlns:mc="http://schemas.openxmlformats.org/markup-compatibility/2006">
+<p:sldMaster xmlns:a="http://schemas.openxmlformats.org/drawingml/2006/main" xmlns:r="http://schemas.openxmlformats.org/officeDocument/2006/relationships" xmlns:p="http://schemas.openxmlformats.org/presentationml/2006/main">
   <p:cSld>
+    <p:bg>
+      <p:bgRef idx="1001">
+        <a:schemeClr val="bg1"/>
+      </p:bgRef>
+    </p:bg>
     <p:spTree>
       <p:nvGrpSpPr>
         <p:cNvPr id="1" name=""/>
@@ -1688,14 +1694,294 @@
   </p:cSld>
   <p:clrMap bg1="lt1" tx1="dk1" bg2="lt2" tx2="dk2" accent1="accent1" accent2="accent2" accent3="accent3" accent4="accent4" accent5="accent5" accent6="accent6" hlink="hlink" folHlink="folHlink"/>
   <p:sldLayoutIdLst>
-    <p:sldLayoutId id="2147483649" r:id="rId2"/>
-    <p:sldLayoutId id="2147483650" r:id="rId3"/>
+    <p:sldLayoutId id="2147483649" r:id="rId1"/>
+    <p:sldLayoutId id="2147483650" r:id="rId2"/>
   </p:sldLayoutIdLst>
+  <p:txStyles>
+    <p:titleStyle>
+      <a:lvl1pPr algn="l" defTabSz="914400" rtl="0" eaLnBrk="1" latinLnBrk="0" hangingPunct="1">
+        <a:lnSpc>
+          <a:spcPct val="90000"/>
+        </a:lnSpc>
+        <a:spcBef>
+          <a:spcPct val="0"/>
+        </a:spcBef>
+        <a:buNone/>
+        <a:defRPr sz="4400" kern="1200">
+          <a:solidFill>
+            <a:schemeClr val="tx1"/>
+          </a:solidFill>
+          <a:latin typeface="+mj-lt"/>
+          <a:ea typeface="+mj-ea"/>
+          <a:cs typeface="+mj-cs"/>
+        </a:defRPr>
+      </a:lvl1pPr>
+    </p:titleStyle>
+    <p:bodyStyle>
+      <a:lvl1pPr marL="228600" indent="-228600" algn="l" defTabSz="914400" rtl="0" eaLnBrk="1" latinLnBrk="0" hangingPunct="1">
+        <a:lnSpc>
+          <a:spcPct val="90000"/>
+        </a:lnSpc>
+        <a:spcBef>
+          <a:spcPts val="1000"/>
+        </a:spcBef>
+        <a:buFont typeface="Arial" panose="020B0604020202020204" pitchFamily="34" charset="0"/>
+        <a:buChar char="•"/>
+        <a:defRPr sz="2800" kern="1200">
+          <a:solidFill>
+            <a:schemeClr val="tx1"/>
+          </a:solidFill>
+          <a:latin typeface="+mn-lt"/>
+          <a:ea typeface="+mn-ea"/>
+          <a:cs typeface="+mn-cs"/>
+        </a:defRPr>
+      </a:lvl1pPr>
+      <a:lvl2pPr marL="685800" indent="-228600" algn="l" defTabSz="914400" rtl="0" eaLnBrk="1" latinLnBrk="0" hangingPunct="1">
+        <a:lnSpc>
+          <a:spcPct val="90000"/>
+        </a:lnSpc>
+        <a:spcBef>
+          <a:spcPts val="500"/>
+        </a:spcBef>
+        <a:buFont typeface="Arial" panose="020B0604020202020204" pitchFamily="34" charset="0"/>
+        <a:buChar char="•"/>
+        <a:defRPr sz="2400" kern="1200">
+          <a:solidFill>
+            <a:schemeClr val="tx1"/>
+          </a:solidFill>
+          <a:latin typeface="+mn-lt"/>
+          <a:ea typeface="+mn-ea"/>
+          <a:cs typeface="+mn-cs"/>
+        </a:defRPr>
+      </a:lvl2pPr>
+      <a:lvl3pPr marL="1143000" indent="-228600" algn="l" defTabSz="914400" rtl="0" eaLnBrk="1" latinLnBrk="0" hangingPunct="1">
+        <a:lnSpc>
+          <a:spcPct val="90000"/>
+        </a:lnSpc>
+        <a:spcBef>
+          <a:spcPts val="500"/>
+        </a:spcBef>
+        <a:buFont typeface="Arial" panose="020B0604020202020204" pitchFamily="34" charset="0"/>
+        <a:buChar char="•"/>
+        <a:defRPr sz="2000" kern="1200">
+          <a:solidFill>
+            <a:schemeClr val="tx1"/>
+          </a:solidFill>
+          <a:latin typeface="+mn-lt"/>
+          <a:ea typeface="+mn-ea"/>
+          <a:cs typeface="+mn-cs"/>
+        </a:defRPr>
+      </a:lvl3pPr>
+      <a:lvl4pPr marL="1600200" indent="-228600" algn="l" defTabSz="914400" rtl="0" eaLnBrk="1" latinLnBrk="0" hangingPunct="1">
+        <a:lnSpc>
+          <a:spcPct val="90000"/>
+        </a:lnSpc>
+        <a:spcBef>
+          <a:spcPts val="500"/>
+        </a:spcBef>
+        <a:buFont typeface="Arial" panose="020B0604020202020204" pitchFamily="34" charset="0"/>
+        <a:buChar char="•"/>
+        <a:defRPr sz="1800" kern="1200">
+          <a:solidFill>
+            <a:schemeClr val="tx1"/>
+          </a:solidFill>
+          <a:latin typeface="+mn-lt"/>
+          <a:ea typeface="+mn-ea"/>
+          <a:cs typeface="+mn-cs"/>
+        </a:defRPr>
+      </a:lvl4pPr>
+      <a:lvl5pPr marL="2057400" indent="-228600" algn="l" defTabSz="914400" rtl="0" eaLnBrk="1" latinLnBrk="0" hangingPunct="1">
+        <a:lnSpc>
+          <a:spcPct val="90000"/>
+        </a:lnSpc>
+        <a:spcBef>
+          <a:spcPts val="500"/>
+        </a:spcBef>
+        <a:buFont typeface="Arial" panose="020B0604020202020204" pitchFamily="34" charset="0"/>
+        <a:buChar char="•"/>
+        <a:defRPr sz="1800" kern="1200">
+          <a:solidFill>
+            <a:schemeClr val="tx1"/>
+          </a:solidFill>
+          <a:latin typeface="+mn-lt"/>
+          <a:ea typeface="+mn-ea"/>
+          <a:cs typeface="+mn-cs"/>
+        </a:defRPr>
+      </a:lvl5pPr>
+      <a:lvl6pPr marL="2514600" indent="-228600" algn="l" defTabSz="914400" rtl="0" eaLnBrk="1" latinLnBrk="0" hangingPunct="1">
+        <a:lnSpc>
+          <a:spcPct val="90000"/>
+        </a:lnSpc>
+        <a:spcBef>
+          <a:spcPts val="500"/>
+        </a:spcBef>
+        <a:buFont typeface="Arial" panose="020B0604020202020204" pitchFamily="34" charset="0"/>
+        <a:buChar char="•"/>
+        <a:defRPr sz="1800" kern="1200">
+          <a:solidFill>
+            <a:schemeClr val="tx1"/>
+          </a:solidFill>
+          <a:latin typeface="+mn-lt"/>
+          <a:ea typeface="+mn-ea"/>
+          <a:cs typeface="+mn-cs"/>
+        </a:defRPr>
+      </a:lvl6pPr>
+      <a:lvl7pPr marL="2971800" indent="-228600" algn="l" defTabSz="914400" rtl="0" eaLnBrk="1" latinLnBrk="0" hangingPunct="1">
+        <a:lnSpc>
+          <a:spcPct val="90000"/>
+        </a:lnSpc>
+        <a:spcBef>
+          <a:spcPts val="500"/>
+        </a:spcBef>
+        <a:buFont typeface="Arial" panose="020B0604020202020204" pitchFamily="34" charset="0"/>
+        <a:buChar char="•"/>
+        <a:defRPr sz="1800" kern="1200">
+          <a:solidFill>
+            <a:schemeClr val="tx1"/>
+          </a:solidFill>
+          <a:latin typeface="+mn-lt"/>
+          <a:ea typeface="+mn-ea"/>
+          <a:cs typeface="+mn-cs"/>
+        </a:defRPr>
+      </a:lvl7pPr>
+      <a:lvl8pPr marL="3429000" indent="-228600" algn="l" defTabSz="914400" rtl="0" eaLnBrk="1" latinLnBrk="0" hangingPunct="1">
+        <a:lnSpc>
+          <a:spcPct val="90000"/>
+        </a:lnSpc>
+        <a:spcBef>
+          <a:spcPts val="500"/>
+        </a:spcBef>
+        <a:buFont typeface="Arial" panose="020B0604020202020204" pitchFamily="34" charset="0"/>
+        <a:buChar char="•"/>
+        <a:defRPr sz="1800" kern="1200">
+          <a:solidFill>
+            <a:schemeClr val="tx1"/>
+          </a:solidFill>
+          <a:latin typeface="+mn-lt"/>
+          <a:ea typeface="+mn-ea"/>
+          <a:cs typeface="+mn-cs"/>
+        </a:defRPr>
+      </a:lvl8pPr>
+      <a:lvl9pPr marL="3886200" indent="-228600" algn="l" defTabSz="914400" rtl="0" eaLnBrk="1" latinLnBrk="0" hangingPunct="1">
+        <a:lnSpc>
+          <a:spcPct val="90000"/>
+        </a:lnSpc>
+        <a:spcBef>
+          <a:spcPts val="500"/>
+        </a:spcBef>
+        <a:buFont typeface="Arial" panose="020B0604020202020204" pitchFamily="34" charset="0"/>
+        <a:buChar char="•"/>
+        <a:defRPr sz="1800" kern="1200">
+          <a:solidFill>
+            <a:schemeClr val="tx1"/>
+          </a:solidFill>
+          <a:latin typeface="+mn-lt"/>
+          <a:ea typeface="+mn-ea"/>
+          <a:cs typeface="+mn-cs"/>
+        </a:defRPr>
+      </a:lvl9pPr>
+    </p:bodyStyle>
+    <p:otherStyle>
+      <a:defPPr>
+        <a:defRPr lang="en-US"/>
+      </a:defPPr>
+      <a:lvl1pPr marL="0" algn="l" defTabSz="914400" rtl="0" eaLnBrk="1" latinLnBrk="0" hangingPunct="1">
+        <a:defRPr sz="1800" kern="1200">
+          <a:solidFill>
+            <a:schemeClr val="tx1"/>
+          </a:solidFill>
+          <a:latin typeface="+mn-lt"/>
+          <a:ea typeface="+mn-ea"/>
+          <a:cs typeface="+mn-cs"/>
+        </a:defRPr>
+      </a:lvl1pPr>
+      <a:lvl2pPr marL="457200" algn="l" defTabSz="914400" rtl="0" eaLnBrk="1" latinLnBrk="0" hangingPunct="1">
+        <a:defRPr sz="1800" kern="1200">
+          <a:solidFill>
+            <a:schemeClr val="tx1"/>
+          </a:solidFill>
+          <a:latin typeface="+mn-lt"/>
+          <a:ea typeface="+mn-ea"/>
+          <a:cs typeface="+mn-cs"/>
+        </a:defRPr>
+      </a:lvl2pPr>
+      <a:lvl3pPr marL="914400" algn="l" defTabSz="914400" rtl="0" eaLnBrk="1" latinLnBrk="0" hangingPunct="1">
+        <a:defRPr sz="1800" kern="1200">
+          <a:solidFill>
+            <a:schemeClr val="tx1"/>
+          </a:solidFill>
+          <a:latin typeface="+mn-lt"/>
+          <a:ea typeface="+mn-ea"/>
+          <a:cs typeface="+mn-cs"/>
+        </a:defRPr>
+      </a:lvl3pPr>
+      <a:lvl4pPr marL="1371600" algn="l" defTabSz="914400" rtl="0" eaLnBrk="1" latinLnBrk="0" hangingPunct="1">
+        <a:defRPr sz="1800" kern="1200">
+          <a:solidFill>
+            <a:schemeClr val="tx1"/>
+          </a:solidFill>
+          <a:latin typeface="+mn-lt"/>
+          <a:ea typeface="+mn-ea"/>
+          <a:cs typeface="+mn-cs"/>
+        </a:defRPr>
+      </a:lvl4pPr>
+      <a:lvl5pPr marL="1828800" algn="l" defTabSz="914400" rtl="0" eaLnBrk="1" latinLnBrk="0" hangingPunct="1">
+        <a:defRPr sz="1800" kern="1200">
+          <a:solidFill>
+            <a:schemeClr val="tx1"/>
+          </a:solidFill>
+          <a:latin typeface="+mn-lt"/>
+          <a:ea typeface="+mn-ea"/>
+          <a:cs typeface="+mn-cs"/>
+        </a:defRPr>
+      </a:lvl5pPr>
+      <a:lvl6pPr marL="2286000" algn="l" defTabSz="914400" rtl="0" eaLnBrk="1" latinLnBrk="0" hangingPunct="1">
+        <a:defRPr sz="1800" kern="1200">
+          <a:solidFill>
+            <a:schemeClr val="tx1"/>
+          </a:solidFill>
+          <a:latin typeface="+mn-lt"/>
+          <a:ea typeface="+mn-ea"/>
+          <a:cs typeface="+mn-cs"/>
+        </a:defRPr>
+      </a:lvl6pPr>
+      <a:lvl7pPr marL="2743200" algn="l" defTabSz="914400" rtl="0" eaLnBrk="1" latinLnBrk="0" hangingPunct="1">
+        <a:defRPr sz="1800" kern="1200">
+          <a:solidFill>
+            <a:schemeClr val="tx1"/>
+          </a:solidFill>
+          <a:latin typeface="+mn-lt"/>
+          <a:ea typeface="+mn-ea"/>
+          <a:cs typeface="+mn-cs"/>
+        </a:defRPr>
+      </a:lvl7pPr>
+      <a:lvl8pPr marL="3200400" algn="l" defTabSz="914400" rtl="0" eaLnBrk="1" latinLnBrk="0" hangingPunct="1">
+        <a:defRPr sz="1800" kern="1200">
+          <a:solidFill>
+            <a:schemeClr val="tx1"/>
+          </a:solidFill>
+          <a:latin typeface="+mn-lt"/>
+          <a:ea typeface="+mn-ea"/>
+          <a:cs typeface="+mn-cs"/>
+        </a:defRPr>
+      </a:lvl8pPr>
+      <a:lvl9pPr marL="3657600" algn="l" defTabSz="914400" rtl="0" eaLnBrk="1" latinLnBrk="0" hangingPunct="1">
+        <a:defRPr sz="1800" kern="1200">
+          <a:solidFill>
+            <a:schemeClr val="tx1"/>
+          </a:solidFill>
+          <a:latin typeface="+mn-lt"/>
+          <a:ea typeface="+mn-ea"/>
+          <a:cs typeface="+mn-cs"/>
+        </a:defRPr>
+      </a:lvl9pPr>
+    </p:otherStyle>
+  </p:txStyles>
 </p:sldMaster>
 </file>
 
 <file path=ppt/slides/slide1.xml><?xml version="1.0" encoding="utf-8"?>
-<p:sld xmlns:a="http://schemas.openxmlformats.org/drawingml/2006/main" xmlns:p="http://schemas.openxmlformats.org/presentationml/2006/main" xmlns:r="http://schemas.openxmlformats.org/officeDocument/2006/relationships" xmlns:p14="http://schemas.microsoft.com/office/powerpoint/2010/main" xmlns:p15="http://schemas.microsoft.com/office/powerpoint/2012/main" xmlns:mc="http://schemas.openxmlformats.org/markup-compatibility/2006">
+<p:sld xmlns:a="http://schemas.openxmlformats.org/drawingml/2006/main" xmlns:r="http://schemas.openxmlformats.org/officeDocument/2006/relationships" xmlns:p="http://schemas.openxmlformats.org/presentationml/2006/main">
   <p:cSld>
     <p:spTree>
       <p:nvGrpSpPr>
@@ -1735,9 +2021,10 @@
           </a:ln>
         </p:spPr>
         <p:txBody>
-          <a:bodyPr lIns="0" rIns="0" tIns="0" bIns="0" anchor="ctr">
+          <a:bodyPr lIns="0" tIns="0" rIns="0" bIns="0" anchor="ctr">
             <a:spAutoFit/>
           </a:bodyPr>
+          <a:lstStyle/>
           <a:p>
             <a:pPr indent="0" algn="ctr">
               <a:lnSpc>
@@ -1745,11 +2032,11 @@
               </a:lnSpc>
               <a:buNone/>
               <a:tabLst>
-                <a:tab algn="l" pos="0"/>
+                <a:tab pos="0" algn="l"/>
               </a:tabLst>
             </a:pPr>
             <a:r>
-              <a:rPr b="0" lang="en-US" sz="4400" strike="noStrike" u="none">
+              <a:rPr lang="en-US" sz="4400" b="0" u="none" strike="noStrike">
                 <a:solidFill>
                   <a:srgbClr val="000000"/>
                 </a:solidFill>
@@ -1759,14 +2046,6 @@
               </a:rPr>
               <a:t>Grover search for 1101 marked state</a:t>
             </a:r>
-            <a:endParaRPr b="0" lang="en-US" sz="4400" strike="noStrike" u="none">
-              <a:solidFill>
-                <a:srgbClr val="000000"/>
-              </a:solidFill>
-              <a:effectLst/>
-              <a:uFillTx/>
-              <a:latin typeface="Arial"/>
-            </a:endParaRPr>
           </a:p>
         </p:txBody>
       </p:sp>
@@ -1794,9 +2073,10 @@
           </a:ln>
         </p:spPr>
         <p:txBody>
-          <a:bodyPr lIns="0" rIns="0" tIns="0" bIns="0" anchor="ctr">
+          <a:bodyPr lIns="0" tIns="0" rIns="0" bIns="0" anchor="ctr">
             <a:spAutoFit/>
           </a:bodyPr>
+          <a:lstStyle/>
           <a:p>
             <a:pPr indent="0">
               <a:lnSpc>
@@ -1804,11 +2084,11 @@
               </a:lnSpc>
               <a:buNone/>
               <a:tabLst>
-                <a:tab algn="l" pos="0"/>
+                <a:tab pos="0" algn="l"/>
               </a:tabLst>
             </a:pPr>
             <a:r>
-              <a:rPr b="1" lang="en-US" sz="1800" strike="noStrike" u="none">
+              <a:rPr lang="en-US" sz="1800" b="1" u="none" strike="noStrike">
                 <a:solidFill>
                   <a:srgbClr val="000000"/>
                 </a:solidFill>
@@ -1818,7 +2098,7 @@
               </a:rPr>
               <a:t>Members:</a:t>
             </a:r>
-            <a:endParaRPr b="0" lang="en-US" sz="1800" strike="noStrike" u="none">
+            <a:endParaRPr lang="en-US" sz="1800" b="0" u="none" strike="noStrike">
               <a:solidFill>
                 <a:srgbClr val="000000"/>
               </a:solidFill>
@@ -1845,11 +2125,11 @@
               <a:buFont typeface="Wingdings" charset="2"/>
               <a:buChar char=""/>
               <a:tabLst>
-                <a:tab algn="l" pos="0"/>
+                <a:tab pos="0" algn="l"/>
               </a:tabLst>
             </a:pPr>
             <a:r>
-              <a:rPr b="0" lang="en-US" sz="1800" strike="noStrike" u="none">
+              <a:rPr lang="en-US" sz="1800" b="0" u="none" strike="noStrike">
                 <a:solidFill>
                   <a:srgbClr val="000000"/>
                 </a:solidFill>
@@ -1859,14 +2139,6 @@
               </a:rPr>
               <a:t>Yugandhara Sherkar</a:t>
             </a:r>
-            <a:endParaRPr b="0" lang="en-US" sz="1800" strike="noStrike" u="none">
-              <a:solidFill>
-                <a:srgbClr val="000000"/>
-              </a:solidFill>
-              <a:effectLst/>
-              <a:uFillTx/>
-              <a:latin typeface="Arial"/>
-            </a:endParaRPr>
           </a:p>
           <a:p>
             <a:pPr marL="216000" indent="-216000">
@@ -1886,11 +2158,11 @@
               <a:buFont typeface="Wingdings" charset="2"/>
               <a:buChar char=""/>
               <a:tabLst>
-                <a:tab algn="l" pos="0"/>
+                <a:tab pos="0" algn="l"/>
               </a:tabLst>
             </a:pPr>
             <a:r>
-              <a:rPr b="0" lang="en-US" sz="1800" strike="noStrike" u="none">
+              <a:rPr lang="en-US" sz="1800" b="0" u="none" strike="noStrike">
                 <a:solidFill>
                   <a:srgbClr val="000000"/>
                 </a:solidFill>
@@ -1900,14 +2172,6 @@
               </a:rPr>
               <a:t>Gaurav Mohol</a:t>
             </a:r>
-            <a:endParaRPr b="0" lang="en-US" sz="1800" strike="noStrike" u="none">
-              <a:solidFill>
-                <a:srgbClr val="000000"/>
-              </a:solidFill>
-              <a:effectLst/>
-              <a:uFillTx/>
-              <a:latin typeface="Arial"/>
-            </a:endParaRPr>
           </a:p>
           <a:p>
             <a:pPr marL="216000" indent="-216000">
@@ -1927,11 +2191,11 @@
               <a:buFont typeface="Wingdings" charset="2"/>
               <a:buChar char=""/>
               <a:tabLst>
-                <a:tab algn="l" pos="0"/>
+                <a:tab pos="0" algn="l"/>
               </a:tabLst>
             </a:pPr>
             <a:r>
-              <a:rPr b="0" lang="en-US" sz="1800" strike="noStrike" u="none">
+              <a:rPr lang="en-US" sz="1800" b="0" u="none" strike="noStrike">
                 <a:solidFill>
                   <a:srgbClr val="000000"/>
                 </a:solidFill>
@@ -1941,14 +2205,6 @@
               </a:rPr>
               <a:t>Ayush Agrawal</a:t>
             </a:r>
-            <a:endParaRPr b="0" lang="en-US" sz="1800" strike="noStrike" u="none">
-              <a:solidFill>
-                <a:srgbClr val="000000"/>
-              </a:solidFill>
-              <a:effectLst/>
-              <a:uFillTx/>
-              <a:latin typeface="Arial"/>
-            </a:endParaRPr>
           </a:p>
           <a:p>
             <a:pPr marL="216000" indent="-216000">
@@ -1968,11 +2224,11 @@
               <a:buFont typeface="Wingdings" charset="2"/>
               <a:buChar char=""/>
               <a:tabLst>
-                <a:tab algn="l" pos="0"/>
+                <a:tab pos="0" algn="l"/>
               </a:tabLst>
             </a:pPr>
             <a:r>
-              <a:rPr b="0" lang="en-US" sz="1800" strike="noStrike" u="none">
+              <a:rPr lang="en-US" sz="1800" b="0" u="none" strike="noStrike">
                 <a:solidFill>
                   <a:srgbClr val="000000"/>
                 </a:solidFill>
@@ -1982,32 +2238,19 @@
               </a:rPr>
               <a:t>Sharad Pratap</a:t>
             </a:r>
-            <a:endParaRPr b="0" lang="en-US" sz="1800" strike="noStrike" u="none">
-              <a:solidFill>
-                <a:srgbClr val="000000"/>
-              </a:solidFill>
-              <a:effectLst/>
-              <a:uFillTx/>
-              <a:latin typeface="Arial"/>
-            </a:endParaRPr>
           </a:p>
         </p:txBody>
       </p:sp>
     </p:spTree>
   </p:cSld>
-  <mc:AlternateContent>
-    <mc:Choice Requires="p14">
-      <p:transition spd="slow" p14:dur="2000"/>
-    </mc:Choice>
-    <mc:Fallback>
-      <p:transition spd="slow"/>
-    </mc:Fallback>
-  </mc:AlternateContent>
+  <p:clrMapOvr>
+    <a:masterClrMapping/>
+  </p:clrMapOvr>
 </p:sld>
 </file>
 
 <file path=ppt/slides/slide10.xml><?xml version="1.0" encoding="utf-8"?>
-<p:sld xmlns:a="http://schemas.openxmlformats.org/drawingml/2006/main" xmlns:p="http://schemas.openxmlformats.org/presentationml/2006/main" xmlns:r="http://schemas.openxmlformats.org/officeDocument/2006/relationships" xmlns:p14="http://schemas.microsoft.com/office/powerpoint/2010/main" xmlns:p15="http://schemas.microsoft.com/office/powerpoint/2012/main" xmlns:mc="http://schemas.openxmlformats.org/markup-compatibility/2006">
+<p:sld xmlns:a="http://schemas.openxmlformats.org/drawingml/2006/main" xmlns:r="http://schemas.openxmlformats.org/officeDocument/2006/relationships" xmlns:p="http://schemas.openxmlformats.org/presentationml/2006/main">
   <p:cSld>
     <p:spTree>
       <p:nvGrpSpPr>
@@ -2047,9 +2290,10 @@
           </a:ln>
         </p:spPr>
         <p:txBody>
-          <a:bodyPr lIns="0" rIns="0" tIns="0" bIns="0" anchor="ctr">
+          <a:bodyPr lIns="0" tIns="0" rIns="0" bIns="0" anchor="ctr">
             <a:spAutoFit/>
           </a:bodyPr>
+          <a:lstStyle/>
           <a:p>
             <a:pPr indent="0" algn="ctr">
               <a:lnSpc>
@@ -2057,11 +2301,11 @@
               </a:lnSpc>
               <a:buNone/>
               <a:tabLst>
-                <a:tab algn="l" pos="0"/>
+                <a:tab pos="0" algn="l"/>
               </a:tabLst>
             </a:pPr>
             <a:r>
-              <a:rPr b="0" lang="en-US" sz="4400" strike="noStrike" u="none">
+              <a:rPr lang="en-US" sz="4400" b="0" u="none" strike="noStrike">
                 <a:solidFill>
                   <a:srgbClr val="000000"/>
                 </a:solidFill>
@@ -2071,14 +2315,6 @@
               </a:rPr>
               <a:t>Probability, Real Amplitudes and Imaginary Components</a:t>
             </a:r>
-            <a:endParaRPr b="0" lang="en-US" sz="4400" strike="noStrike" u="none">
-              <a:solidFill>
-                <a:srgbClr val="000000"/>
-              </a:solidFill>
-              <a:effectLst/>
-              <a:uFillTx/>
-              <a:latin typeface="Arial"/>
-            </a:endParaRPr>
           </a:p>
         </p:txBody>
       </p:sp>
@@ -2106,9 +2342,10 @@
           </a:ln>
         </p:spPr>
         <p:txBody>
-          <a:bodyPr lIns="0" rIns="0" tIns="0" bIns="0" anchor="t">
-            <a:normAutofit fontScale="55000" lnSpcReduction="19999"/>
+          <a:bodyPr lIns="0" tIns="0" rIns="0" bIns="0" anchor="t">
+            <a:normAutofit fontScale="47500" lnSpcReduction="20000"/>
           </a:bodyPr>
+          <a:lstStyle/>
           <a:p>
             <a:pPr marL="432000" indent="-324000">
               <a:lnSpc>
@@ -2125,7 +2362,7 @@
               <a:buChar char=""/>
             </a:pPr>
             <a:r>
-              <a:rPr b="0" lang="en-US" sz="3200" strike="noStrike" u="none">
+              <a:rPr lang="en-US" sz="3200" b="0" u="none" strike="noStrike">
                 <a:solidFill>
                   <a:srgbClr val="000000"/>
                 </a:solidFill>
@@ -2135,14 +2372,6 @@
               </a:rPr>
               <a:t>The green curve represents the probability of measuring the marked state (|1101&gt;).</a:t>
             </a:r>
-            <a:endParaRPr b="0" lang="en-US" sz="3200" strike="noStrike" u="none">
-              <a:solidFill>
-                <a:srgbClr val="000000"/>
-              </a:solidFill>
-              <a:effectLst/>
-              <a:uFillTx/>
-              <a:latin typeface="Arial"/>
-            </a:endParaRPr>
           </a:p>
           <a:p>
             <a:pPr marL="432000" indent="-324000">
@@ -2160,7 +2389,7 @@
               <a:buChar char=""/>
             </a:pPr>
             <a:r>
-              <a:rPr b="0" lang="en-US" sz="3200" strike="noStrike" u="none">
+              <a:rPr lang="en-US" sz="3200" b="0" u="none" strike="noStrike">
                 <a:solidFill>
                   <a:srgbClr val="000000"/>
                 </a:solidFill>
@@ -2170,14 +2399,6 @@
               </a:rPr>
               <a:t>The red curve represents the real amplitude of the marked state.</a:t>
             </a:r>
-            <a:endParaRPr b="0" lang="en-US" sz="3200" strike="noStrike" u="none">
-              <a:solidFill>
-                <a:srgbClr val="000000"/>
-              </a:solidFill>
-              <a:effectLst/>
-              <a:uFillTx/>
-              <a:latin typeface="Arial"/>
-            </a:endParaRPr>
           </a:p>
           <a:p>
             <a:pPr marL="432000" indent="-324000">
@@ -2195,7 +2416,7 @@
               <a:buChar char=""/>
             </a:pPr>
             <a:r>
-              <a:rPr b="0" lang="en-US" sz="3200" strike="noStrike" u="none">
+              <a:rPr lang="en-US" sz="3200" b="0" u="none" strike="noStrike">
                 <a:solidFill>
                   <a:srgbClr val="000000"/>
                 </a:solidFill>
@@ -2205,14 +2426,6 @@
               </a:rPr>
               <a:t>The purple curve represents the average real amplitude of the search register.</a:t>
             </a:r>
-            <a:endParaRPr b="0" lang="en-US" sz="3200" strike="noStrike" u="none">
-              <a:solidFill>
-                <a:srgbClr val="000000"/>
-              </a:solidFill>
-              <a:effectLst/>
-              <a:uFillTx/>
-              <a:latin typeface="Arial"/>
-            </a:endParaRPr>
           </a:p>
           <a:p>
             <a:pPr marL="432000" indent="-324000">
@@ -2230,7 +2443,7 @@
               <a:buChar char=""/>
             </a:pPr>
             <a:r>
-              <a:rPr b="0" lang="en-US" sz="3200" strike="noStrike" u="none">
+              <a:rPr lang="en-US" sz="3200" b="0" u="none" strike="noStrike">
                 <a:solidFill>
                   <a:srgbClr val="000000"/>
                 </a:solidFill>
@@ -2240,14 +2453,6 @@
               </a:rPr>
               <a:t>The probability of the marked state increases rapidly after successive Grover iterations.</a:t>
             </a:r>
-            <a:endParaRPr b="0" lang="en-US" sz="3200" strike="noStrike" u="none">
-              <a:solidFill>
-                <a:srgbClr val="000000"/>
-              </a:solidFill>
-              <a:effectLst/>
-              <a:uFillTx/>
-              <a:latin typeface="Arial"/>
-            </a:endParaRPr>
           </a:p>
           <a:p>
             <a:pPr marL="432000" indent="-324000">
@@ -2265,7 +2470,7 @@
               <a:buChar char=""/>
             </a:pPr>
             <a:r>
-              <a:rPr b="0" lang="en-US" sz="3200" strike="noStrike" u="none">
+              <a:rPr lang="en-US" sz="3200" b="0" u="none" strike="noStrike">
                 <a:solidFill>
                   <a:srgbClr val="000000"/>
                 </a:solidFill>
@@ -2275,14 +2480,6 @@
               </a:rPr>
               <a:t>Beyond the optimal number of iterations, the probability decreases due to the oscillatory nature of Grover's algorithm.</a:t>
             </a:r>
-            <a:endParaRPr b="0" lang="en-US" sz="3200" strike="noStrike" u="none">
-              <a:solidFill>
-                <a:srgbClr val="000000"/>
-              </a:solidFill>
-              <a:effectLst/>
-              <a:uFillTx/>
-              <a:latin typeface="Arial"/>
-            </a:endParaRPr>
           </a:p>
           <a:p>
             <a:pPr marL="432000" indent="-324000">
@@ -2300,7 +2497,7 @@
               <a:buChar char=""/>
             </a:pPr>
             <a:r>
-              <a:rPr b="0" lang="en-US" sz="3200" strike="noStrike" u="none">
+              <a:rPr lang="en-US" sz="3200" b="0" u="none" strike="noStrike">
                 <a:solidFill>
                   <a:srgbClr val="000000"/>
                 </a:solidFill>
@@ -2310,14 +2507,6 @@
               </a:rPr>
               <a:t>Imaginary amplitudes remain approximately zero throughout the computation.</a:t>
             </a:r>
-            <a:endParaRPr b="0" lang="en-US" sz="3200" strike="noStrike" u="none">
-              <a:solidFill>
-                <a:srgbClr val="000000"/>
-              </a:solidFill>
-              <a:effectLst/>
-              <a:uFillTx/>
-              <a:latin typeface="Arial"/>
-            </a:endParaRPr>
           </a:p>
           <a:p>
             <a:pPr marL="432000" indent="-324000">
@@ -2335,7 +2524,7 @@
               <a:buChar char=""/>
             </a:pPr>
             <a:r>
-              <a:rPr b="0" lang="en-US" sz="3200" strike="noStrike" u="none">
+              <a:rPr lang="en-US" sz="3200" b="0" u="none" strike="noStrike">
                 <a:solidFill>
                   <a:srgbClr val="000000"/>
                 </a:solidFill>
@@ -2345,14 +2534,6 @@
               </a:rPr>
               <a:t>This confirms that the implementation behaves as expected.</a:t>
             </a:r>
-            <a:endParaRPr b="0" lang="en-US" sz="3200" strike="noStrike" u="none">
-              <a:solidFill>
-                <a:srgbClr val="000000"/>
-              </a:solidFill>
-              <a:effectLst/>
-              <a:uFillTx/>
-              <a:latin typeface="Arial"/>
-            </a:endParaRPr>
           </a:p>
           <a:p>
             <a:pPr marL="432000" indent="-324000">
@@ -2370,7 +2551,7 @@
               <a:buChar char=""/>
             </a:pPr>
             <a:r>
-              <a:rPr b="0" lang="en-US" sz="3200" strike="noStrike" u="none">
+              <a:rPr lang="en-US" sz="3200" b="0" u="none" strike="noStrike">
                 <a:solidFill>
                   <a:srgbClr val="000000"/>
                 </a:solidFill>
@@ -2380,32 +2561,19 @@
               </a:rPr>
               <a:t>The evolution occurs almost entirely in the real amplitude space.</a:t>
             </a:r>
-            <a:endParaRPr b="0" lang="en-US" sz="3200" strike="noStrike" u="none">
-              <a:solidFill>
-                <a:srgbClr val="000000"/>
-              </a:solidFill>
-              <a:effectLst/>
-              <a:uFillTx/>
-              <a:latin typeface="Arial"/>
-            </a:endParaRPr>
           </a:p>
         </p:txBody>
       </p:sp>
     </p:spTree>
   </p:cSld>
-  <mc:AlternateContent>
-    <mc:Choice Requires="p14">
-      <p:transition spd="slow" p14:dur="2000"/>
-    </mc:Choice>
-    <mc:Fallback>
-      <p:transition spd="slow"/>
-    </mc:Fallback>
-  </mc:AlternateContent>
+  <p:clrMapOvr>
+    <a:masterClrMapping/>
+  </p:clrMapOvr>
 </p:sld>
 </file>
 
 <file path=ppt/slides/slide11.xml><?xml version="1.0" encoding="utf-8"?>
-<p:sld xmlns:a="http://schemas.openxmlformats.org/drawingml/2006/main" xmlns:p="http://schemas.openxmlformats.org/presentationml/2006/main" xmlns:r="http://schemas.openxmlformats.org/officeDocument/2006/relationships" xmlns:p14="http://schemas.microsoft.com/office/powerpoint/2010/main" xmlns:p15="http://schemas.microsoft.com/office/powerpoint/2012/main" xmlns:mc="http://schemas.openxmlformats.org/markup-compatibility/2006">
+<p:sld xmlns:a="http://schemas.openxmlformats.org/drawingml/2006/main" xmlns:r="http://schemas.openxmlformats.org/officeDocument/2006/relationships" xmlns:p="http://schemas.openxmlformats.org/presentationml/2006/main">
   <p:cSld>
     <p:spTree>
       <p:nvGrpSpPr>
@@ -2445,9 +2613,10 @@
           </a:ln>
         </p:spPr>
         <p:txBody>
-          <a:bodyPr lIns="0" rIns="0" tIns="0" bIns="0" anchor="ctr">
+          <a:bodyPr lIns="0" tIns="0" rIns="0" bIns="0" anchor="ctr">
             <a:spAutoFit/>
           </a:bodyPr>
+          <a:lstStyle/>
           <a:p>
             <a:pPr indent="0" algn="ctr">
               <a:lnSpc>
@@ -2455,11 +2624,11 @@
               </a:lnSpc>
               <a:buNone/>
               <a:tabLst>
-                <a:tab algn="l" pos="0"/>
+                <a:tab pos="0" algn="l"/>
               </a:tabLst>
             </a:pPr>
             <a:r>
-              <a:rPr b="0" lang="en-US" sz="4400" strike="noStrike" u="none">
+              <a:rPr lang="en-US" sz="4400" b="0" u="none" strike="noStrike">
                 <a:solidFill>
                   <a:srgbClr val="000000"/>
                 </a:solidFill>
@@ -2469,14 +2638,6 @@
               </a:rPr>
               <a:t>Way Forward and Learning outcomes</a:t>
             </a:r>
-            <a:endParaRPr b="0" lang="en-US" sz="4400" strike="noStrike" u="none">
-              <a:solidFill>
-                <a:srgbClr val="000000"/>
-              </a:solidFill>
-              <a:effectLst/>
-              <a:uFillTx/>
-              <a:latin typeface="Arial"/>
-            </a:endParaRPr>
           </a:p>
         </p:txBody>
       </p:sp>
@@ -2504,9 +2665,10 @@
           </a:ln>
         </p:spPr>
         <p:txBody>
-          <a:bodyPr lIns="0" rIns="0" tIns="0" bIns="0" anchor="t">
+          <a:bodyPr lIns="0" tIns="0" rIns="0" bIns="0" anchor="t">
             <a:normAutofit/>
           </a:bodyPr>
+          <a:lstStyle/>
           <a:p>
             <a:pPr marL="432000" indent="-324000">
               <a:lnSpc>
@@ -2519,7 +2681,7 @@
               <a:buChar char=""/>
             </a:pPr>
             <a:r>
-              <a:rPr b="0" lang="en-US" sz="1800" strike="noStrike" u="none">
+              <a:rPr lang="en-US" sz="1800" b="0" u="none" strike="noStrike">
                 <a:solidFill>
                   <a:srgbClr val="000000"/>
                 </a:solidFill>
@@ -2529,7 +2691,110 @@
               </a:rPr>
               <a:t>Understood the working principle of Grover's Search Algorithm.</a:t>
             </a:r>
-            <a:endParaRPr b="0" lang="en-US" sz="1800" strike="noStrike" u="none">
+          </a:p>
+          <a:p>
+            <a:pPr marL="432000" indent="-324000">
+              <a:lnSpc>
+                <a:spcPct val="100000"/>
+              </a:lnSpc>
+              <a:buClr>
+                <a:srgbClr val="000000"/>
+              </a:buClr>
+              <a:buFont typeface="Wingdings" charset="2"/>
+              <a:buChar char=""/>
+            </a:pPr>
+            <a:r>
+              <a:rPr lang="en-US" sz="1800" b="0" u="none" strike="noStrike">
+                <a:solidFill>
+                  <a:srgbClr val="000000"/>
+                </a:solidFill>
+                <a:effectLst/>
+                <a:uFillTx/>
+                <a:latin typeface="Arial"/>
+              </a:rPr>
+              <a:t>Learned Oracle construction.</a:t>
+            </a:r>
+          </a:p>
+          <a:p>
+            <a:pPr marL="432000" indent="-324000">
+              <a:lnSpc>
+                <a:spcPct val="100000"/>
+              </a:lnSpc>
+              <a:buClr>
+                <a:srgbClr val="000000"/>
+              </a:buClr>
+              <a:buFont typeface="Wingdings" charset="2"/>
+              <a:buChar char=""/>
+            </a:pPr>
+            <a:r>
+              <a:rPr lang="en-US" sz="1800" b="0" u="none" strike="noStrike">
+                <a:solidFill>
+                  <a:srgbClr val="000000"/>
+                </a:solidFill>
+                <a:effectLst/>
+                <a:uFillTx/>
+                <a:latin typeface="Arial"/>
+              </a:rPr>
+              <a:t>Learned the Diffusion operator.</a:t>
+            </a:r>
+          </a:p>
+          <a:p>
+            <a:pPr marL="432000" indent="-324000">
+              <a:lnSpc>
+                <a:spcPct val="100000"/>
+              </a:lnSpc>
+              <a:buClr>
+                <a:srgbClr val="000000"/>
+              </a:buClr>
+              <a:buFont typeface="Wingdings" charset="2"/>
+              <a:buChar char=""/>
+            </a:pPr>
+            <a:r>
+              <a:rPr lang="en-US" sz="1800" b="0" u="none" strike="noStrike">
+                <a:solidFill>
+                  <a:srgbClr val="000000"/>
+                </a:solidFill>
+                <a:effectLst/>
+                <a:uFillTx/>
+                <a:latin typeface="Arial"/>
+              </a:rPr>
+              <a:t>Understood amplitude amplification.</a:t>
+            </a:r>
+          </a:p>
+          <a:p>
+            <a:pPr marL="432000" indent="-324000">
+              <a:lnSpc>
+                <a:spcPct val="100000"/>
+              </a:lnSpc>
+              <a:buClr>
+                <a:srgbClr val="000000"/>
+              </a:buClr>
+              <a:buFont typeface="Wingdings" charset="2"/>
+              <a:buChar char=""/>
+            </a:pPr>
+            <a:r>
+              <a:rPr lang="en-US" sz="1800" b="0" u="none" strike="noStrike">
+                <a:solidFill>
+                  <a:srgbClr val="000000"/>
+                </a:solidFill>
+                <a:effectLst/>
+                <a:uFillTx/>
+                <a:latin typeface="Arial"/>
+              </a:rPr>
+              <a:t>Analysed measurement statistics.</a:t>
+            </a:r>
+          </a:p>
+          <a:p>
+            <a:pPr indent="0">
+              <a:lnSpc>
+                <a:spcPct val="100000"/>
+              </a:lnSpc>
+              <a:buNone/>
+              <a:tabLst>
+                <a:tab pos="0" algn="l"/>
+              </a:tabLst>
+            </a:pPr>
+            <a:endParaRPr lang="en-US" sz="1800" b="0" u="none" strike="noStrike">
               <a:solidFill>
                 <a:srgbClr val="000000"/>
               </a:solidFill>
@@ -2539,28 +2804,16 @@
             </a:endParaRPr>
           </a:p>
           <a:p>
-            <a:pPr marL="432000" indent="-324000">
-              <a:lnSpc>
-                <a:spcPct val="100000"/>
-              </a:lnSpc>
-              <a:buClr>
-                <a:srgbClr val="000000"/>
-              </a:buClr>
-              <a:buFont typeface="Wingdings" charset="2"/>
-              <a:buChar char=""/>
-            </a:pPr>
-            <a:r>
-              <a:rPr b="0" lang="en-US" sz="1800" strike="noStrike" u="none">
-                <a:solidFill>
-                  <a:srgbClr val="000000"/>
-                </a:solidFill>
-                <a:effectLst/>
-                <a:uFillTx/>
-                <a:latin typeface="Arial"/>
-              </a:rPr>
-              <a:t>Learned Oracle construction.</a:t>
-            </a:r>
-            <a:endParaRPr b="0" lang="en-US" sz="1800" strike="noStrike" u="none">
+            <a:pPr indent="0">
+              <a:lnSpc>
+                <a:spcPct val="100000"/>
+              </a:lnSpc>
+              <a:buNone/>
+              <a:tabLst>
+                <a:tab pos="0" algn="l"/>
+              </a:tabLst>
+            </a:pPr>
+            <a:endParaRPr lang="en-US" sz="1800" b="0" u="none" strike="noStrike">
               <a:solidFill>
                 <a:srgbClr val="000000"/>
               </a:solidFill>
@@ -2579,126 +2832,21 @@
               </a:buClr>
               <a:buFont typeface="Wingdings" charset="2"/>
               <a:buChar char=""/>
-            </a:pPr>
-            <a:r>
-              <a:rPr b="0" lang="en-US" sz="1800" strike="noStrike" u="none">
-                <a:solidFill>
-                  <a:srgbClr val="000000"/>
-                </a:solidFill>
-                <a:effectLst/>
-                <a:uFillTx/>
-                <a:latin typeface="Arial"/>
-              </a:rPr>
-              <a:t>Learned the Diffusion operator.</a:t>
-            </a:r>
-            <a:endParaRPr b="0" lang="en-US" sz="1800" strike="noStrike" u="none">
-              <a:solidFill>
-                <a:srgbClr val="000000"/>
-              </a:solidFill>
-              <a:effectLst/>
-              <a:uFillTx/>
-              <a:latin typeface="Arial"/>
-            </a:endParaRPr>
-          </a:p>
-          <a:p>
-            <a:pPr marL="432000" indent="-324000">
-              <a:lnSpc>
-                <a:spcPct val="100000"/>
-              </a:lnSpc>
-              <a:buClr>
-                <a:srgbClr val="000000"/>
-              </a:buClr>
-              <a:buFont typeface="Wingdings" charset="2"/>
-              <a:buChar char=""/>
-            </a:pPr>
-            <a:r>
-              <a:rPr b="0" lang="en-US" sz="1800" strike="noStrike" u="none">
-                <a:solidFill>
-                  <a:srgbClr val="000000"/>
-                </a:solidFill>
-                <a:effectLst/>
-                <a:uFillTx/>
-                <a:latin typeface="Arial"/>
-              </a:rPr>
-              <a:t>Understood amplitude amplification.</a:t>
-            </a:r>
-            <a:endParaRPr b="0" lang="en-US" sz="1800" strike="noStrike" u="none">
-              <a:solidFill>
-                <a:srgbClr val="000000"/>
-              </a:solidFill>
-              <a:effectLst/>
-              <a:uFillTx/>
-              <a:latin typeface="Arial"/>
-            </a:endParaRPr>
-          </a:p>
-          <a:p>
-            <a:pPr marL="432000" indent="-324000">
-              <a:lnSpc>
-                <a:spcPct val="100000"/>
-              </a:lnSpc>
-              <a:buClr>
-                <a:srgbClr val="000000"/>
-              </a:buClr>
-              <a:buFont typeface="Wingdings" charset="2"/>
-              <a:buChar char=""/>
-            </a:pPr>
-            <a:r>
-              <a:rPr b="0" lang="en-US" sz="1800" strike="noStrike" u="none">
-                <a:solidFill>
-                  <a:srgbClr val="000000"/>
-                </a:solidFill>
-                <a:effectLst/>
-                <a:uFillTx/>
-                <a:latin typeface="Arial"/>
-              </a:rPr>
-              <a:t>Analysed measurement statistics.</a:t>
-            </a:r>
-            <a:endParaRPr b="0" lang="en-US" sz="1800" strike="noStrike" u="none">
-              <a:solidFill>
-                <a:srgbClr val="000000"/>
-              </a:solidFill>
-              <a:effectLst/>
-              <a:uFillTx/>
-              <a:latin typeface="Arial"/>
-            </a:endParaRPr>
-          </a:p>
-          <a:p>
-            <a:pPr indent="0">
-              <a:lnSpc>
-                <a:spcPct val="100000"/>
-              </a:lnSpc>
-              <a:buNone/>
               <a:tabLst>
-                <a:tab algn="l" pos="0"/>
+                <a:tab pos="0" algn="l"/>
               </a:tabLst>
             </a:pPr>
-            <a:endParaRPr b="0" lang="en-US" sz="1800" strike="noStrike" u="none">
-              <a:solidFill>
-                <a:srgbClr val="000000"/>
-              </a:solidFill>
-              <a:effectLst/>
-              <a:uFillTx/>
-              <a:latin typeface="Arial"/>
-            </a:endParaRPr>
-          </a:p>
-          <a:p>
-            <a:pPr indent="0">
-              <a:lnSpc>
-                <a:spcPct val="100000"/>
-              </a:lnSpc>
-              <a:buNone/>
-              <a:tabLst>
-                <a:tab algn="l" pos="0"/>
-              </a:tabLst>
-            </a:pPr>
-            <a:endParaRPr b="0" lang="en-US" sz="1800" strike="noStrike" u="none">
-              <a:solidFill>
-                <a:srgbClr val="000000"/>
-              </a:solidFill>
-              <a:effectLst/>
-              <a:uFillTx/>
-              <a:latin typeface="Arial"/>
-            </a:endParaRPr>
+            <a:r>
+              <a:rPr lang="en-US" sz="1800" b="0" u="none" strike="noStrike">
+                <a:solidFill>
+                  <a:srgbClr val="000000"/>
+                </a:solidFill>
+                <a:effectLst/>
+                <a:uFillTx/>
+                <a:latin typeface="Arial"/>
+              </a:rPr>
+              <a:t>Extend the implementation to multiple marked states.</a:t>
+            </a:r>
           </a:p>
           <a:p>
             <a:pPr marL="432000" indent="-324000">
@@ -2711,28 +2859,20 @@
               <a:buFont typeface="Wingdings" charset="2"/>
               <a:buChar char=""/>
               <a:tabLst>
-                <a:tab algn="l" pos="0"/>
+                <a:tab pos="0" algn="l"/>
               </a:tabLst>
             </a:pPr>
             <a:r>
-              <a:rPr b="0" lang="en-US" sz="1800" strike="noStrike" u="none">
-                <a:solidFill>
-                  <a:srgbClr val="000000"/>
-                </a:solidFill>
-                <a:effectLst/>
-                <a:uFillTx/>
-                <a:latin typeface="Arial"/>
-              </a:rPr>
-              <a:t>Extend the implementation to multiple marked states.</a:t>
-            </a:r>
-            <a:endParaRPr b="0" lang="en-US" sz="1800" strike="noStrike" u="none">
-              <a:solidFill>
-                <a:srgbClr val="000000"/>
-              </a:solidFill>
-              <a:effectLst/>
-              <a:uFillTx/>
-              <a:latin typeface="Arial"/>
-            </a:endParaRPr>
+              <a:rPr lang="en-US" sz="1800" b="0" u="none" strike="noStrike">
+                <a:solidFill>
+                  <a:srgbClr val="000000"/>
+                </a:solidFill>
+                <a:effectLst/>
+                <a:uFillTx/>
+                <a:latin typeface="Arial"/>
+              </a:rPr>
+              <a:t>Increase the search space using more qubits.</a:t>
+            </a:r>
           </a:p>
           <a:p>
             <a:pPr marL="432000" indent="-324000">
@@ -2745,45 +2885,11 @@
               <a:buFont typeface="Wingdings" charset="2"/>
               <a:buChar char=""/>
               <a:tabLst>
-                <a:tab algn="l" pos="0"/>
+                <a:tab pos="0" algn="l"/>
               </a:tabLst>
             </a:pPr>
             <a:r>
-              <a:rPr b="0" lang="en-US" sz="1800" strike="noStrike" u="none">
-                <a:solidFill>
-                  <a:srgbClr val="000000"/>
-                </a:solidFill>
-                <a:effectLst/>
-                <a:uFillTx/>
-                <a:latin typeface="Arial"/>
-              </a:rPr>
-              <a:t>Increase the search space using more qubits.</a:t>
-            </a:r>
-            <a:endParaRPr b="0" lang="en-US" sz="1800" strike="noStrike" u="none">
-              <a:solidFill>
-                <a:srgbClr val="000000"/>
-              </a:solidFill>
-              <a:effectLst/>
-              <a:uFillTx/>
-              <a:latin typeface="Arial"/>
-            </a:endParaRPr>
-          </a:p>
-          <a:p>
-            <a:pPr marL="432000" indent="-324000">
-              <a:lnSpc>
-                <a:spcPct val="100000"/>
-              </a:lnSpc>
-              <a:buClr>
-                <a:srgbClr val="000000"/>
-              </a:buClr>
-              <a:buFont typeface="Wingdings" charset="2"/>
-              <a:buChar char=""/>
-              <a:tabLst>
-                <a:tab algn="l" pos="0"/>
-              </a:tabLst>
-            </a:pPr>
-            <a:r>
-              <a:rPr b="0" lang="en-US" sz="1800" strike="noStrike" u="none">
+              <a:rPr lang="en-US" sz="1800" b="0" u="none" strike="noStrike">
                 <a:solidFill>
                   <a:srgbClr val="000000"/>
                 </a:solidFill>
@@ -2793,32 +2899,19 @@
               </a:rPr>
               <a:t>Compare the algorithm with classical search methods.</a:t>
             </a:r>
-            <a:endParaRPr b="0" lang="en-US" sz="1800" strike="noStrike" u="none">
-              <a:solidFill>
-                <a:srgbClr val="000000"/>
-              </a:solidFill>
-              <a:effectLst/>
-              <a:uFillTx/>
-              <a:latin typeface="Arial"/>
-            </a:endParaRPr>
           </a:p>
         </p:txBody>
       </p:sp>
     </p:spTree>
   </p:cSld>
-  <mc:AlternateContent>
-    <mc:Choice Requires="p14">
-      <p:transition spd="slow" p14:dur="2000"/>
-    </mc:Choice>
-    <mc:Fallback>
-      <p:transition spd="slow"/>
-    </mc:Fallback>
-  </mc:AlternateContent>
+  <p:clrMapOvr>
+    <a:masterClrMapping/>
+  </p:clrMapOvr>
 </p:sld>
 </file>
 
 <file path=ppt/slides/slide12.xml><?xml version="1.0" encoding="utf-8"?>
-<p:sld xmlns:a="http://schemas.openxmlformats.org/drawingml/2006/main" xmlns:p="http://schemas.openxmlformats.org/presentationml/2006/main" xmlns:r="http://schemas.openxmlformats.org/officeDocument/2006/relationships" xmlns:p14="http://schemas.microsoft.com/office/powerpoint/2010/main" xmlns:p15="http://schemas.microsoft.com/office/powerpoint/2012/main" xmlns:mc="http://schemas.openxmlformats.org/markup-compatibility/2006">
+<p:sld xmlns:a="http://schemas.openxmlformats.org/drawingml/2006/main" xmlns:r="http://schemas.openxmlformats.org/officeDocument/2006/relationships" xmlns:p="http://schemas.openxmlformats.org/presentationml/2006/main">
   <p:cSld>
     <p:spTree>
       <p:nvGrpSpPr>
@@ -2858,9 +2951,10 @@
           </a:ln>
         </p:spPr>
         <p:txBody>
-          <a:bodyPr lIns="0" rIns="0" tIns="0" bIns="0" anchor="ctr">
+          <a:bodyPr lIns="0" tIns="0" rIns="0" bIns="0" anchor="ctr">
             <a:spAutoFit/>
           </a:bodyPr>
+          <a:lstStyle/>
           <a:p>
             <a:pPr indent="0" algn="ctr">
               <a:lnSpc>
@@ -2868,11 +2962,11 @@
               </a:lnSpc>
               <a:buNone/>
               <a:tabLst>
-                <a:tab algn="l" pos="0"/>
+                <a:tab pos="0" algn="l"/>
               </a:tabLst>
             </a:pPr>
             <a:r>
-              <a:rPr b="0" lang="en-US" sz="4400" strike="noStrike" u="none">
+              <a:rPr lang="en-US" sz="4400" b="0" u="none" strike="noStrike">
                 <a:solidFill>
                   <a:srgbClr val="000000"/>
                 </a:solidFill>
@@ -2882,14 +2976,6 @@
               </a:rPr>
               <a:t>References</a:t>
             </a:r>
-            <a:endParaRPr b="0" lang="en-US" sz="4400" strike="noStrike" u="none">
-              <a:solidFill>
-                <a:srgbClr val="000000"/>
-              </a:solidFill>
-              <a:effectLst/>
-              <a:uFillTx/>
-              <a:latin typeface="Arial"/>
-            </a:endParaRPr>
           </a:p>
         </p:txBody>
       </p:sp>
@@ -2917,9 +3003,10 @@
           </a:ln>
         </p:spPr>
         <p:txBody>
-          <a:bodyPr lIns="0" rIns="0" tIns="0" bIns="0" anchor="t">
+          <a:bodyPr lIns="0" tIns="0" rIns="0" bIns="0" anchor="t">
             <a:normAutofit/>
           </a:bodyPr>
+          <a:lstStyle/>
           <a:p>
             <a:pPr indent="0">
               <a:lnSpc>
@@ -2927,10 +3014,10 @@
               </a:lnSpc>
               <a:buNone/>
               <a:tabLst>
-                <a:tab algn="l" pos="0"/>
+                <a:tab pos="0" algn="l"/>
               </a:tabLst>
             </a:pPr>
-            <a:endParaRPr b="0" lang="en-US" sz="2200" strike="noStrike" u="none">
+            <a:endParaRPr lang="en-US" sz="2200" b="0" u="none" strike="noStrike">
               <a:solidFill>
                 <a:srgbClr val="000000"/>
               </a:solidFill>
@@ -2946,10 +3033,10 @@
               </a:lnSpc>
               <a:buNone/>
               <a:tabLst>
-                <a:tab algn="l" pos="0"/>
+                <a:tab pos="0" algn="l"/>
               </a:tabLst>
             </a:pPr>
-            <a:endParaRPr b="0" lang="en-US" sz="2200" strike="noStrike" u="none">
+            <a:endParaRPr lang="en-US" sz="2200" b="0" u="none" strike="noStrike">
               <a:solidFill>
                 <a:srgbClr val="000000"/>
               </a:solidFill>
@@ -2969,11 +3056,11 @@
               <a:buFont typeface="Wingdings" charset="2"/>
               <a:buChar char=""/>
               <a:tabLst>
-                <a:tab algn="l" pos="0"/>
+                <a:tab pos="0" algn="l"/>
               </a:tabLst>
             </a:pPr>
             <a:r>
-              <a:rPr b="0" lang="en-US" sz="2200" strike="noStrike" u="none">
+              <a:rPr lang="en-US" sz="2200" b="0" u="none" strike="noStrike">
                 <a:solidFill>
                   <a:srgbClr val="000000"/>
                 </a:solidFill>
@@ -2983,7 +3070,18 @@
               </a:rPr>
               <a:t>Qiskit Documentation.</a:t>
             </a:r>
-            <a:endParaRPr b="0" lang="en-US" sz="2200" strike="noStrike" u="none">
+          </a:p>
+          <a:p>
+            <a:pPr indent="0">
+              <a:lnSpc>
+                <a:spcPct val="100000"/>
+              </a:lnSpc>
+              <a:buNone/>
+              <a:tabLst>
+                <a:tab pos="0" algn="l"/>
+              </a:tabLst>
+            </a:pPr>
+            <a:endParaRPr lang="en-US" sz="2200" b="0" u="none" strike="noStrike">
               <a:solidFill>
                 <a:srgbClr val="000000"/>
               </a:solidFill>
@@ -2993,16 +3091,42 @@
             </a:endParaRPr>
           </a:p>
           <a:p>
+            <a:pPr marL="432000" indent="-324000">
+              <a:lnSpc>
+                <a:spcPct val="100000"/>
+              </a:lnSpc>
+              <a:buClr>
+                <a:srgbClr val="000000"/>
+              </a:buClr>
+              <a:buFont typeface="Wingdings" charset="2"/>
+              <a:buChar char=""/>
+              <a:tabLst>
+                <a:tab pos="0" algn="l"/>
+              </a:tabLst>
+            </a:pPr>
+            <a:r>
+              <a:rPr lang="en-US" sz="2200" b="0" u="none" strike="noStrike">
+                <a:solidFill>
+                  <a:srgbClr val="000000"/>
+                </a:solidFill>
+                <a:effectLst/>
+                <a:uFillTx/>
+                <a:latin typeface="Arial"/>
+              </a:rPr>
+              <a:t>Lov Grover, A Fast Quantum Mechanical Algorithm for Database Search.</a:t>
+            </a:r>
+          </a:p>
+          <a:p>
             <a:pPr indent="0">
               <a:lnSpc>
                 <a:spcPct val="100000"/>
               </a:lnSpc>
               <a:buNone/>
               <a:tabLst>
-                <a:tab algn="l" pos="0"/>
+                <a:tab pos="0" algn="l"/>
               </a:tabLst>
             </a:pPr>
-            <a:endParaRPr b="0" lang="en-US" sz="2200" strike="noStrike" u="none">
+            <a:endParaRPr lang="en-US" sz="2200" b="0" u="none" strike="noStrike">
               <a:solidFill>
                 <a:srgbClr val="000000"/>
               </a:solidFill>
@@ -3011,76 +3135,18 @@
               <a:latin typeface="Arial"/>
             </a:endParaRPr>
           </a:p>
-          <a:p>
-            <a:pPr marL="432000" indent="-324000">
-              <a:lnSpc>
-                <a:spcPct val="100000"/>
-              </a:lnSpc>
-              <a:buClr>
-                <a:srgbClr val="000000"/>
-              </a:buClr>
-              <a:buFont typeface="Wingdings" charset="2"/>
-              <a:buChar char=""/>
-              <a:tabLst>
-                <a:tab algn="l" pos="0"/>
-              </a:tabLst>
-            </a:pPr>
-            <a:r>
-              <a:rPr b="0" lang="en-US" sz="2200" strike="noStrike" u="none">
-                <a:solidFill>
-                  <a:srgbClr val="000000"/>
-                </a:solidFill>
-                <a:effectLst/>
-                <a:uFillTx/>
-                <a:latin typeface="Arial"/>
-              </a:rPr>
-              <a:t>Lov Grover, A Fast Quantum Mechanical Algorithm for Database Search.</a:t>
-            </a:r>
-            <a:endParaRPr b="0" lang="en-US" sz="2200" strike="noStrike" u="none">
-              <a:solidFill>
-                <a:srgbClr val="000000"/>
-              </a:solidFill>
-              <a:effectLst/>
-              <a:uFillTx/>
-              <a:latin typeface="Arial"/>
-            </a:endParaRPr>
-          </a:p>
-          <a:p>
-            <a:pPr indent="0">
-              <a:lnSpc>
-                <a:spcPct val="100000"/>
-              </a:lnSpc>
-              <a:buNone/>
-              <a:tabLst>
-                <a:tab algn="l" pos="0"/>
-              </a:tabLst>
-            </a:pPr>
-            <a:endParaRPr b="0" lang="en-US" sz="2200" strike="noStrike" u="none">
-              <a:solidFill>
-                <a:srgbClr val="000000"/>
-              </a:solidFill>
-              <a:effectLst/>
-              <a:uFillTx/>
-              <a:latin typeface="Arial"/>
-            </a:endParaRPr>
-          </a:p>
         </p:txBody>
       </p:sp>
     </p:spTree>
   </p:cSld>
-  <mc:AlternateContent>
-    <mc:Choice Requires="p14">
-      <p:transition spd="slow" p14:dur="2000"/>
-    </mc:Choice>
-    <mc:Fallback>
-      <p:transition spd="slow"/>
-    </mc:Fallback>
-  </mc:AlternateContent>
+  <p:clrMapOvr>
+    <a:masterClrMapping/>
+  </p:clrMapOvr>
 </p:sld>
 </file>
 
 <file path=ppt/slides/slide2.xml><?xml version="1.0" encoding="utf-8"?>
-<p:sld xmlns:a="http://schemas.openxmlformats.org/drawingml/2006/main" xmlns:p="http://schemas.openxmlformats.org/presentationml/2006/main" xmlns:r="http://schemas.openxmlformats.org/officeDocument/2006/relationships" xmlns:p14="http://schemas.microsoft.com/office/powerpoint/2010/main" xmlns:p15="http://schemas.microsoft.com/office/powerpoint/2012/main" xmlns:mc="http://schemas.openxmlformats.org/markup-compatibility/2006">
+<p:sld xmlns:a="http://schemas.openxmlformats.org/drawingml/2006/main" xmlns:r="http://schemas.openxmlformats.org/officeDocument/2006/relationships" xmlns:p="http://schemas.openxmlformats.org/presentationml/2006/main">
   <p:cSld>
     <p:spTree>
       <p:nvGrpSpPr>
@@ -3120,9 +3186,10 @@
           </a:ln>
         </p:spPr>
         <p:txBody>
-          <a:bodyPr lIns="0" rIns="0" tIns="0" bIns="0" anchor="ctr">
+          <a:bodyPr lIns="0" tIns="0" rIns="0" bIns="0" anchor="ctr">
             <a:spAutoFit/>
           </a:bodyPr>
+          <a:lstStyle/>
           <a:p>
             <a:pPr indent="0" algn="ctr">
               <a:lnSpc>
@@ -3130,11 +3197,11 @@
               </a:lnSpc>
               <a:buNone/>
               <a:tabLst>
-                <a:tab algn="l" pos="0"/>
+                <a:tab pos="0" algn="l"/>
               </a:tabLst>
             </a:pPr>
             <a:r>
-              <a:rPr b="0" lang="en-US" sz="4400" strike="noStrike" u="none">
+              <a:rPr lang="en-US" sz="4400" b="0" u="none" strike="noStrike">
                 <a:solidFill>
                   <a:srgbClr val="000000"/>
                 </a:solidFill>
@@ -3144,14 +3211,6 @@
               </a:rPr>
               <a:t>Searching the marked Quantum State ∣1101⟩</a:t>
             </a:r>
-            <a:endParaRPr b="0" lang="en-US" sz="4400" strike="noStrike" u="none">
-              <a:solidFill>
-                <a:srgbClr val="000000"/>
-              </a:solidFill>
-              <a:effectLst/>
-              <a:uFillTx/>
-              <a:latin typeface="Arial"/>
-            </a:endParaRPr>
           </a:p>
         </p:txBody>
       </p:sp>
@@ -3179,9 +3238,10 @@
           </a:ln>
         </p:spPr>
         <p:txBody>
-          <a:bodyPr lIns="0" rIns="0" tIns="0" bIns="0" anchor="t">
-            <a:normAutofit fontScale="92500" lnSpcReduction="9999"/>
+          <a:bodyPr lIns="0" tIns="0" rIns="0" bIns="0" anchor="t">
+            <a:normAutofit fontScale="92500" lnSpcReduction="10000"/>
           </a:bodyPr>
+          <a:lstStyle/>
           <a:p>
             <a:pPr marL="432000" indent="-324000">
               <a:lnSpc>
@@ -3198,7 +3258,7 @@
               <a:buChar char=""/>
             </a:pPr>
             <a:r>
-              <a:rPr b="0" lang="en-US" sz="2600" strike="noStrike" u="none">
+              <a:rPr lang="en-US" sz="2600" b="0" u="none" strike="noStrike" dirty="0">
                 <a:solidFill>
                   <a:srgbClr val="000000"/>
                 </a:solidFill>
@@ -3208,7 +3268,129 @@
               </a:rPr>
               <a:t>Given a 4-qubit search space containing 2^4=16 possible quantum basis states.</a:t>
             </a:r>
-            <a:endParaRPr b="0" lang="en-US" sz="2600" strike="noStrike" u="none">
+          </a:p>
+          <a:p>
+            <a:pPr marL="432000" indent="-324000">
+              <a:lnSpc>
+                <a:spcPct val="100000"/>
+              </a:lnSpc>
+              <a:spcBef>
+                <a:spcPts val="1417"/>
+              </a:spcBef>
+              <a:buClr>
+                <a:srgbClr val="000000"/>
+              </a:buClr>
+              <a:buSzPct val="45000"/>
+              <a:buFont typeface="Wingdings" charset="2"/>
+              <a:buChar char=""/>
+            </a:pPr>
+            <a:r>
+              <a:rPr lang="en-US" sz="2600" b="0" u="none" strike="noStrike" dirty="0">
+                <a:solidFill>
+                  <a:srgbClr val="000000"/>
+                </a:solidFill>
+                <a:effectLst/>
+                <a:uFillTx/>
+                <a:latin typeface="Arial"/>
+              </a:rPr>
+              <a:t>The objective is to search the marked state ∣1101⟩ using Grover's quantum search algorithm.</a:t>
+            </a:r>
+          </a:p>
+          <a:p>
+            <a:pPr marL="432000" indent="-324000">
+              <a:lnSpc>
+                <a:spcPct val="100000"/>
+              </a:lnSpc>
+              <a:spcBef>
+                <a:spcPts val="1417"/>
+              </a:spcBef>
+              <a:buClr>
+                <a:srgbClr val="000000"/>
+              </a:buClr>
+              <a:buSzPct val="45000"/>
+              <a:buFont typeface="Wingdings" charset="2"/>
+              <a:buChar char=""/>
+            </a:pPr>
+            <a:r>
+              <a:rPr lang="en-US" sz="2600" b="0" u="none" strike="noStrike" dirty="0">
+                <a:solidFill>
+                  <a:srgbClr val="000000"/>
+                </a:solidFill>
+                <a:effectLst/>
+                <a:uFillTx/>
+                <a:latin typeface="Arial"/>
+              </a:rPr>
+              <a:t>Classical search requires checking elements one by one.</a:t>
+            </a:r>
+          </a:p>
+          <a:p>
+            <a:pPr marL="432000" indent="-324000">
+              <a:lnSpc>
+                <a:spcPct val="100000"/>
+              </a:lnSpc>
+              <a:spcBef>
+                <a:spcPts val="1417"/>
+              </a:spcBef>
+              <a:buClr>
+                <a:srgbClr val="000000"/>
+              </a:buClr>
+              <a:buSzPct val="45000"/>
+              <a:buFont typeface="Wingdings" charset="2"/>
+              <a:buChar char=""/>
+            </a:pPr>
+            <a:r>
+              <a:rPr lang="en-US" sz="2800" b="0" u="none" strike="noStrike" dirty="0">
+                <a:solidFill>
+                  <a:srgbClr val="000000"/>
+                </a:solidFill>
+                <a:effectLst/>
+                <a:uFillTx/>
+                <a:latin typeface="Arial"/>
+              </a:rPr>
+              <a:t>Average classical complexity: O(N)</a:t>
+            </a:r>
+          </a:p>
+          <a:p>
+            <a:pPr marL="432000" indent="-324000">
+              <a:lnSpc>
+                <a:spcPct val="100000"/>
+              </a:lnSpc>
+              <a:spcBef>
+                <a:spcPts val="1417"/>
+              </a:spcBef>
+              <a:buClr>
+                <a:srgbClr val="000000"/>
+              </a:buClr>
+              <a:buSzPct val="45000"/>
+              <a:buFont typeface="Wingdings" charset="2"/>
+              <a:buChar char=""/>
+            </a:pPr>
+            <a:r>
+              <a:rPr lang="en-US" sz="2800" b="0" u="none" strike="noStrike" dirty="0">
+                <a:solidFill>
+                  <a:srgbClr val="000000"/>
+                </a:solidFill>
+                <a:effectLst/>
+                <a:uFillTx/>
+                <a:latin typeface="Arial"/>
+              </a:rPr>
+              <a:t>Grover's algorithm performs search in O(N) oracle queries.</a:t>
+            </a:r>
+          </a:p>
+          <a:p>
+            <a:pPr marL="432000" indent="0">
+              <a:lnSpc>
+                <a:spcPct val="100000"/>
+              </a:lnSpc>
+              <a:spcBef>
+                <a:spcPts val="1417"/>
+              </a:spcBef>
+              <a:buNone/>
+              <a:tabLst>
+                <a:tab pos="0" algn="l"/>
+              </a:tabLst>
+            </a:pPr>
+            <a:endParaRPr lang="en-US" sz="3200" b="0" u="none" strike="noStrike" dirty="0">
               <a:solidFill>
                 <a:srgbClr val="000000"/>
               </a:solidFill>
@@ -3217,185 +3399,18 @@
               <a:latin typeface="Arial"/>
             </a:endParaRPr>
           </a:p>
-          <a:p>
-            <a:pPr marL="432000" indent="-324000">
-              <a:lnSpc>
-                <a:spcPct val="100000"/>
-              </a:lnSpc>
-              <a:spcBef>
-                <a:spcPts val="1417"/>
-              </a:spcBef>
-              <a:buClr>
-                <a:srgbClr val="000000"/>
-              </a:buClr>
-              <a:buSzPct val="45000"/>
-              <a:buFont typeface="Wingdings" charset="2"/>
-              <a:buChar char=""/>
-            </a:pPr>
-            <a:r>
-              <a:rPr b="0" lang="en-US" sz="2600" strike="noStrike" u="none">
-                <a:solidFill>
-                  <a:srgbClr val="000000"/>
-                </a:solidFill>
-                <a:effectLst/>
-                <a:uFillTx/>
-                <a:latin typeface="Arial"/>
-              </a:rPr>
-              <a:t>The objective is to search the marked state ∣1101⟩ using Grover's quantum search algorithm.</a:t>
-            </a:r>
-            <a:endParaRPr b="0" lang="en-US" sz="2600" strike="noStrike" u="none">
-              <a:solidFill>
-                <a:srgbClr val="000000"/>
-              </a:solidFill>
-              <a:effectLst/>
-              <a:uFillTx/>
-              <a:latin typeface="Arial"/>
-            </a:endParaRPr>
-          </a:p>
-          <a:p>
-            <a:pPr marL="432000" indent="-324000">
-              <a:lnSpc>
-                <a:spcPct val="100000"/>
-              </a:lnSpc>
-              <a:spcBef>
-                <a:spcPts val="1417"/>
-              </a:spcBef>
-              <a:buClr>
-                <a:srgbClr val="000000"/>
-              </a:buClr>
-              <a:buSzPct val="45000"/>
-              <a:buFont typeface="Wingdings" charset="2"/>
-              <a:buChar char=""/>
-            </a:pPr>
-            <a:r>
-              <a:rPr b="0" lang="en-US" sz="2600" strike="noStrike" u="none">
-                <a:solidFill>
-                  <a:srgbClr val="000000"/>
-                </a:solidFill>
-                <a:effectLst/>
-                <a:uFillTx/>
-                <a:latin typeface="Arial"/>
-              </a:rPr>
-              <a:t>Classical search requires checking elements one by one.</a:t>
-            </a:r>
-            <a:endParaRPr b="0" lang="en-US" sz="2600" strike="noStrike" u="none">
-              <a:solidFill>
-                <a:srgbClr val="000000"/>
-              </a:solidFill>
-              <a:effectLst/>
-              <a:uFillTx/>
-              <a:latin typeface="Arial"/>
-            </a:endParaRPr>
-          </a:p>
-          <a:p>
-            <a:pPr marL="432000" indent="-324000">
-              <a:lnSpc>
-                <a:spcPct val="100000"/>
-              </a:lnSpc>
-              <a:spcBef>
-                <a:spcPts val="1417"/>
-              </a:spcBef>
-              <a:buClr>
-                <a:srgbClr val="000000"/>
-              </a:buClr>
-              <a:buSzPct val="45000"/>
-              <a:buFont typeface="Wingdings" charset="2"/>
-              <a:buChar char=""/>
-            </a:pPr>
-            <a:r>
-              <a:rPr b="0" lang="en-US" sz="2800" strike="noStrike" u="none">
-                <a:solidFill>
-                  <a:srgbClr val="000000"/>
-                </a:solidFill>
-                <a:effectLst/>
-                <a:uFillTx/>
-                <a:latin typeface="Arial"/>
-              </a:rPr>
-              <a:t>Average classical complexity: O(N)</a:t>
-            </a:r>
-            <a:endParaRPr b="0" lang="en-US" sz="2800" strike="noStrike" u="none">
-              <a:solidFill>
-                <a:srgbClr val="000000"/>
-              </a:solidFill>
-              <a:effectLst/>
-              <a:uFillTx/>
-              <a:latin typeface="Arial"/>
-            </a:endParaRPr>
-          </a:p>
-          <a:p>
-            <a:pPr marL="432000" indent="-324000">
-              <a:lnSpc>
-                <a:spcPct val="100000"/>
-              </a:lnSpc>
-              <a:spcBef>
-                <a:spcPts val="1417"/>
-              </a:spcBef>
-              <a:buClr>
-                <a:srgbClr val="000000"/>
-              </a:buClr>
-              <a:buSzPct val="45000"/>
-              <a:buFont typeface="Wingdings" charset="2"/>
-              <a:buChar char=""/>
-            </a:pPr>
-            <a:r>
-              <a:rPr b="0" lang="en-US" sz="2800" strike="noStrike" u="none">
-                <a:solidFill>
-                  <a:srgbClr val="000000"/>
-                </a:solidFill>
-                <a:effectLst/>
-                <a:uFillTx/>
-                <a:latin typeface="Arial"/>
-              </a:rPr>
-              <a:t>Grover's algorithm performs search in O(N) oracle queries.</a:t>
-            </a:r>
-            <a:endParaRPr b="0" lang="en-US" sz="2800" strike="noStrike" u="none">
-              <a:solidFill>
-                <a:srgbClr val="000000"/>
-              </a:solidFill>
-              <a:effectLst/>
-              <a:uFillTx/>
-              <a:latin typeface="Arial"/>
-            </a:endParaRPr>
-          </a:p>
-          <a:p>
-            <a:pPr marL="432000" indent="0">
-              <a:lnSpc>
-                <a:spcPct val="100000"/>
-              </a:lnSpc>
-              <a:spcBef>
-                <a:spcPts val="1417"/>
-              </a:spcBef>
-              <a:buNone/>
-              <a:tabLst>
-                <a:tab algn="l" pos="0"/>
-              </a:tabLst>
-            </a:pPr>
-            <a:endParaRPr b="0" lang="en-US" sz="3200" strike="noStrike" u="none">
-              <a:solidFill>
-                <a:srgbClr val="000000"/>
-              </a:solidFill>
-              <a:effectLst/>
-              <a:uFillTx/>
-              <a:latin typeface="Arial"/>
-            </a:endParaRPr>
-          </a:p>
         </p:txBody>
       </p:sp>
     </p:spTree>
   </p:cSld>
-  <mc:AlternateContent>
-    <mc:Choice Requires="p14">
-      <p:transition spd="slow" p14:dur="2000"/>
-    </mc:Choice>
-    <mc:Fallback>
-      <p:transition spd="slow"/>
-    </mc:Fallback>
-  </mc:AlternateContent>
+  <p:clrMapOvr>
+    <a:masterClrMapping/>
+  </p:clrMapOvr>
 </p:sld>
 </file>
 
 <file path=ppt/slides/slide3.xml><?xml version="1.0" encoding="utf-8"?>
-<p:sld xmlns:a="http://schemas.openxmlformats.org/drawingml/2006/main" xmlns:p="http://schemas.openxmlformats.org/presentationml/2006/main" xmlns:r="http://schemas.openxmlformats.org/officeDocument/2006/relationships" xmlns:p14="http://schemas.microsoft.com/office/powerpoint/2010/main" xmlns:p15="http://schemas.microsoft.com/office/powerpoint/2012/main" xmlns:mc="http://schemas.openxmlformats.org/markup-compatibility/2006">
+<p:sld xmlns:a="http://schemas.openxmlformats.org/drawingml/2006/main" xmlns:r="http://schemas.openxmlformats.org/officeDocument/2006/relationships" xmlns:p="http://schemas.openxmlformats.org/presentationml/2006/main">
   <p:cSld>
     <p:spTree>
       <p:nvGrpSpPr>
@@ -3435,9 +3450,10 @@
           </a:ln>
         </p:spPr>
         <p:txBody>
-          <a:bodyPr lIns="0" rIns="0" tIns="0" bIns="0" anchor="ctr">
+          <a:bodyPr lIns="0" tIns="0" rIns="0" bIns="0" anchor="ctr">
             <a:spAutoFit/>
           </a:bodyPr>
+          <a:lstStyle/>
           <a:p>
             <a:pPr indent="0" algn="ctr">
               <a:lnSpc>
@@ -3445,11 +3461,11 @@
               </a:lnSpc>
               <a:buNone/>
               <a:tabLst>
-                <a:tab algn="l" pos="0"/>
+                <a:tab pos="0" algn="l"/>
               </a:tabLst>
             </a:pPr>
             <a:r>
-              <a:rPr b="0" lang="en-US" sz="4400" strike="noStrike" u="none">
+              <a:rPr lang="en-US" sz="4400" b="0" u="none" strike="noStrike">
                 <a:solidFill>
                   <a:srgbClr val="000000"/>
                 </a:solidFill>
@@ -3459,555 +3475,675 @@
               </a:rPr>
               <a:t>Grover's Algorithm?</a:t>
             </a:r>
-            <a:endParaRPr b="0" lang="en-US" sz="4400" strike="noStrike" u="none">
-              <a:solidFill>
-                <a:srgbClr val="000000"/>
-              </a:solidFill>
-              <a:effectLst/>
-              <a:uFillTx/>
-              <a:latin typeface="Arial"/>
-            </a:endParaRPr>
           </a:p>
         </p:txBody>
       </p:sp>
-      <p:sp>
-        <p:nvSpPr>
-          <p:cNvPr id="15" name="PlaceHolder 2"/>
-          <p:cNvSpPr>
-            <a:spLocks noGrp="1"/>
-          </p:cNvSpPr>
-          <p:nvPr>
-            <p:ph/>
-          </p:nvPr>
-        </p:nvSpPr>
-        <p:spPr>
-          <a:xfrm>
-            <a:off x="504000" y="1326600"/>
-            <a:ext cx="9071280" cy="3287880"/>
-          </a:xfrm>
-          <a:prstGeom prst="rect">
-            <a:avLst/>
-          </a:prstGeom>
-          <a:noFill/>
-          <a:ln w="0">
-            <a:noFill/>
-          </a:ln>
-        </p:spPr>
-        <p:txBody>
-          <a:bodyPr lIns="0" rIns="0" tIns="0" bIns="0" anchor="t">
-            <a:normAutofit fontScale="92500" lnSpcReduction="19999"/>
-          </a:bodyPr>
-          <a:p>
-            <a:pPr marL="432000" indent="-324000">
-              <a:lnSpc>
-                <a:spcPct val="100000"/>
-              </a:lnSpc>
-              <a:spcBef>
-                <a:spcPts val="1417"/>
-              </a:spcBef>
-              <a:buClr>
-                <a:srgbClr val="000000"/>
-              </a:buClr>
-              <a:buSzPct val="45000"/>
-              <a:buFont typeface="Wingdings" charset="2"/>
-              <a:buChar char=""/>
-            </a:pPr>
-            <a:r>
-              <a:rPr b="0" lang="en-US" sz="1600" strike="noStrike" u="none">
-                <a:solidFill>
-                  <a:srgbClr val="000000"/>
-                </a:solidFill>
-                <a:effectLst/>
-                <a:uFillTx/>
-                <a:latin typeface="Arial"/>
-              </a:rPr>
-              <a:t>Grover's algorithm is a quantum search algorithm for finding a marked item inside an unstructured database.</a:t>
-            </a:r>
-            <a:endParaRPr b="0" lang="en-US" sz="1600" strike="noStrike" u="none">
-              <a:solidFill>
-                <a:srgbClr val="000000"/>
-              </a:solidFill>
-              <a:effectLst/>
-              <a:uFillTx/>
-              <a:latin typeface="Arial"/>
-            </a:endParaRPr>
-          </a:p>
-          <a:p>
-            <a:pPr marL="432000" indent="-324000">
-              <a:lnSpc>
-                <a:spcPct val="100000"/>
-              </a:lnSpc>
-              <a:spcBef>
-                <a:spcPts val="1417"/>
-              </a:spcBef>
-              <a:buClr>
-                <a:srgbClr val="000000"/>
-              </a:buClr>
-              <a:buSzPct val="45000"/>
-              <a:buFont typeface="Wingdings" charset="2"/>
-              <a:buChar char=""/>
-            </a:pPr>
-            <a:r>
-              <a:rPr b="0" lang="en-US" sz="1600" strike="noStrike" u="none">
-                <a:solidFill>
-                  <a:srgbClr val="000000"/>
-                </a:solidFill>
-                <a:effectLst/>
-                <a:uFillTx/>
-                <a:latin typeface="Arial"/>
-              </a:rPr>
-              <a:t>It consists of two main operations:</a:t>
-            </a:r>
-            <a:endParaRPr b="0" lang="en-US" sz="1600" strike="noStrike" u="none">
-              <a:solidFill>
-                <a:srgbClr val="000000"/>
-              </a:solidFill>
-              <a:effectLst/>
-              <a:uFillTx/>
-              <a:latin typeface="Arial"/>
-            </a:endParaRPr>
-          </a:p>
-          <a:p>
-            <a:pPr marL="360000" indent="-324000">
-              <a:lnSpc>
-                <a:spcPct val="100000"/>
-              </a:lnSpc>
-              <a:spcBef>
-                <a:spcPts val="1417"/>
-              </a:spcBef>
-              <a:buClr>
-                <a:srgbClr val="000000"/>
-              </a:buClr>
-              <a:buSzPct val="45000"/>
-              <a:buFont typeface="Source Code Pro"/>
-              <a:buChar char="▶"/>
-            </a:pPr>
-            <a:r>
-              <a:rPr b="0" lang="en-US" sz="1600" strike="noStrike" u="none">
-                <a:solidFill>
-                  <a:srgbClr val="000000"/>
-                </a:solidFill>
-                <a:effectLst/>
-                <a:uFillTx/>
-                <a:latin typeface="Arial"/>
-              </a:rPr>
-              <a:t>Oracle</a:t>
-            </a:r>
-            <a:endParaRPr b="0" lang="en-US" sz="1600" strike="noStrike" u="none">
-              <a:solidFill>
-                <a:srgbClr val="000000"/>
-              </a:solidFill>
-              <a:effectLst/>
-              <a:uFillTx/>
-              <a:latin typeface="Arial"/>
-            </a:endParaRPr>
-          </a:p>
-          <a:p>
-            <a:pPr marL="360000" indent="-324000">
-              <a:lnSpc>
-                <a:spcPct val="100000"/>
-              </a:lnSpc>
-              <a:spcBef>
-                <a:spcPts val="1417"/>
-              </a:spcBef>
-              <a:buClr>
-                <a:srgbClr val="000000"/>
-              </a:buClr>
-              <a:buSzPct val="45000"/>
-              <a:buFont typeface="Source Code Pro"/>
-              <a:buChar char="▶"/>
-            </a:pPr>
-            <a:r>
-              <a:rPr b="0" lang="en-US" sz="1600" strike="noStrike" u="none">
-                <a:solidFill>
-                  <a:srgbClr val="000000"/>
-                </a:solidFill>
-                <a:effectLst/>
-                <a:uFillTx/>
-                <a:latin typeface="Arial"/>
-              </a:rPr>
-              <a:t>Diffusion Operator</a:t>
-            </a:r>
-            <a:endParaRPr b="0" lang="en-US" sz="1600" strike="noStrike" u="none">
-              <a:solidFill>
-                <a:srgbClr val="000000"/>
-              </a:solidFill>
-              <a:effectLst/>
-              <a:uFillTx/>
-              <a:latin typeface="Arial"/>
-            </a:endParaRPr>
-          </a:p>
-          <a:p>
-            <a:pPr marL="432000" indent="-324000">
-              <a:lnSpc>
-                <a:spcPct val="100000"/>
-              </a:lnSpc>
-              <a:spcBef>
-                <a:spcPts val="1417"/>
-              </a:spcBef>
-              <a:buClr>
-                <a:srgbClr val="000000"/>
-              </a:buClr>
-              <a:buFont typeface="Symbol" charset="2"/>
-              <a:buChar char=""/>
-            </a:pPr>
-            <a:r>
-              <a:rPr b="0" lang="en-US" sz="1600" strike="noStrike" u="none">
-                <a:solidFill>
-                  <a:srgbClr val="000000"/>
-                </a:solidFill>
-                <a:effectLst/>
-                <a:uFillTx/>
-                <a:latin typeface="Arial"/>
-              </a:rPr>
-              <a:t>Repeated application amplifies the amplitude of the marked state.</a:t>
-            </a:r>
-            <a:endParaRPr b="0" lang="en-US" sz="1600" strike="noStrike" u="none">
-              <a:solidFill>
-                <a:srgbClr val="000000"/>
-              </a:solidFill>
-              <a:effectLst/>
-              <a:uFillTx/>
-              <a:latin typeface="Arial"/>
-            </a:endParaRPr>
-          </a:p>
-          <a:p>
-            <a:pPr marL="432000" indent="-324000">
-              <a:lnSpc>
-                <a:spcPct val="100000"/>
-              </a:lnSpc>
-              <a:spcBef>
-                <a:spcPts val="1417"/>
-              </a:spcBef>
-              <a:buClr>
-                <a:srgbClr val="000000"/>
-              </a:buClr>
-              <a:buFont typeface="Symbol" charset="2"/>
-              <a:buChar char=""/>
-            </a:pPr>
-            <a:r>
-              <a:rPr b="0" lang="en-US" sz="1600" strike="noStrike" u="none">
-                <a:solidFill>
-                  <a:srgbClr val="000000"/>
-                </a:solidFill>
-                <a:effectLst/>
-                <a:uFillTx/>
-                <a:latin typeface="Arial"/>
-              </a:rPr>
-              <a:t>Initail state ∣0000⟩</a:t>
-            </a:r>
-            <a:endParaRPr b="0" lang="en-US" sz="1600" strike="noStrike" u="none">
-              <a:solidFill>
-                <a:srgbClr val="000000"/>
-              </a:solidFill>
-              <a:effectLst/>
-              <a:uFillTx/>
-              <a:latin typeface="Arial"/>
-            </a:endParaRPr>
-          </a:p>
-          <a:p>
-            <a:pPr marL="432000" indent="-324000">
-              <a:lnSpc>
-                <a:spcPct val="100000"/>
-              </a:lnSpc>
-              <a:spcBef>
-                <a:spcPts val="1191"/>
-              </a:spcBef>
-              <a:spcAft>
-                <a:spcPts val="992"/>
-              </a:spcAft>
-              <a:buClr>
-                <a:srgbClr val="000000"/>
-              </a:buClr>
-              <a:buFont typeface="Symbol" charset="2"/>
-              <a:buChar char=""/>
-            </a:pPr>
-            <a:r>
-              <a:rPr b="0" lang="en-US" sz="1600" strike="noStrike" u="none">
-                <a:solidFill>
-                  <a:srgbClr val="000000"/>
-                </a:solidFill>
-                <a:effectLst/>
-                <a:uFillTx/>
-                <a:latin typeface="Arial"/>
-              </a:rPr>
-              <a:t>After Hadamard gates</a:t>
-            </a:r>
-            <a:br>
-              <a:rPr sz="1600"/>
-            </a:br>
-            <a:br>
-              <a:rPr sz="1600"/>
-            </a:br>
-            <a:r>
-              <a:rPr b="0" lang="en-US" sz="1600" strike="noStrike" u="none">
-                <a:solidFill>
-                  <a:srgbClr val="000000"/>
-                </a:solidFill>
-                <a:effectLst/>
-                <a:uFillTx/>
-                <a:latin typeface="Arial"/>
-              </a:rPr>
-              <a:t> </a:t>
-            </a:r>
-            <a:endParaRPr b="0" lang="en-US" sz="1600" strike="noStrike" u="none">
-              <a:solidFill>
-                <a:srgbClr val="000000"/>
-              </a:solidFill>
-              <a:effectLst/>
-              <a:uFillTx/>
-              <a:latin typeface="Arial"/>
-            </a:endParaRPr>
-          </a:p>
-          <a:p>
-            <a:pPr marL="432000" indent="0">
-              <a:lnSpc>
-                <a:spcPct val="100000"/>
-              </a:lnSpc>
-              <a:spcBef>
-                <a:spcPts val="1417"/>
-              </a:spcBef>
-              <a:buNone/>
-              <a:tabLst>
-                <a:tab algn="l" pos="0"/>
-              </a:tabLst>
-            </a:pPr>
-            <a:r>
-              <a:rPr b="0" lang="en-US" sz="1600" strike="noStrike" u="none">
-                <a:solidFill>
-                  <a:srgbClr val="000000"/>
-                </a:solidFill>
-                <a:effectLst/>
-                <a:uFillTx/>
-                <a:latin typeface="Arial"/>
-              </a:rPr>
-              <a:t> Every basis state initially has equal probability.</a:t>
-            </a:r>
-            <a:endParaRPr b="0" lang="en-US" sz="1600" strike="noStrike" u="none">
-              <a:solidFill>
-                <a:srgbClr val="000000"/>
-              </a:solidFill>
-              <a:effectLst/>
-              <a:uFillTx/>
-              <a:latin typeface="Arial"/>
-            </a:endParaRPr>
-          </a:p>
-          <a:p>
-            <a:pPr marL="432000" indent="0">
-              <a:lnSpc>
-                <a:spcPct val="100000"/>
-              </a:lnSpc>
-              <a:spcBef>
-                <a:spcPts val="1417"/>
-              </a:spcBef>
-              <a:buNone/>
-              <a:tabLst>
-                <a:tab algn="l" pos="0"/>
-              </a:tabLst>
-            </a:pPr>
-            <a:endParaRPr b="0" lang="en-US" sz="3200" strike="noStrike" u="none">
-              <a:solidFill>
-                <a:srgbClr val="000000"/>
-              </a:solidFill>
-              <a:effectLst/>
-              <a:uFillTx/>
-              <a:latin typeface="Arial"/>
-            </a:endParaRPr>
-          </a:p>
-          <a:p>
-            <a:pPr marL="432000" indent="0">
-              <a:lnSpc>
-                <a:spcPct val="100000"/>
-              </a:lnSpc>
-              <a:spcBef>
-                <a:spcPts val="1417"/>
-              </a:spcBef>
-              <a:buNone/>
-              <a:tabLst>
-                <a:tab algn="l" pos="0"/>
-              </a:tabLst>
-            </a:pPr>
-            <a:endParaRPr b="0" lang="en-US" sz="3200" strike="noStrike" u="none">
-              <a:solidFill>
-                <a:srgbClr val="000000"/>
-              </a:solidFill>
-              <a:effectLst/>
-              <a:uFillTx/>
-              <a:latin typeface="Arial"/>
-            </a:endParaRPr>
-          </a:p>
-          <a:p>
-            <a:pPr marL="432000" indent="0">
-              <a:lnSpc>
-                <a:spcPct val="100000"/>
-              </a:lnSpc>
-              <a:spcBef>
-                <a:spcPts val="1417"/>
-              </a:spcBef>
-              <a:buNone/>
-              <a:tabLst>
-                <a:tab algn="l" pos="0"/>
-              </a:tabLst>
-            </a:pPr>
-            <a:endParaRPr b="0" lang="en-US" sz="3200" strike="noStrike" u="none">
-              <a:solidFill>
-                <a:srgbClr val="000000"/>
-              </a:solidFill>
-              <a:effectLst/>
-              <a:uFillTx/>
-              <a:latin typeface="Arial"/>
-            </a:endParaRPr>
-          </a:p>
-          <a:p>
-            <a:pPr marL="432000" indent="0">
-              <a:lnSpc>
-                <a:spcPct val="100000"/>
-              </a:lnSpc>
-              <a:spcBef>
-                <a:spcPts val="1417"/>
-              </a:spcBef>
-              <a:buNone/>
-              <a:tabLst>
-                <a:tab algn="l" pos="0"/>
-              </a:tabLst>
-            </a:pPr>
-            <a:endParaRPr b="0" lang="en-US" sz="3200" strike="noStrike" u="none">
-              <a:solidFill>
-                <a:srgbClr val="000000"/>
-              </a:solidFill>
-              <a:effectLst/>
-              <a:uFillTx/>
-              <a:latin typeface="Arial"/>
-            </a:endParaRPr>
-          </a:p>
-          <a:p>
-            <a:pPr marL="432000" indent="0">
-              <a:lnSpc>
-                <a:spcPct val="100000"/>
-              </a:lnSpc>
-              <a:spcBef>
-                <a:spcPts val="1417"/>
-              </a:spcBef>
-              <a:buNone/>
-              <a:tabLst>
-                <a:tab algn="l" pos="0"/>
-              </a:tabLst>
-            </a:pPr>
-            <a:endParaRPr b="0" lang="en-US" sz="3200" strike="noStrike" u="none">
-              <a:solidFill>
-                <a:srgbClr val="000000"/>
-              </a:solidFill>
-              <a:effectLst/>
-              <a:uFillTx/>
-              <a:latin typeface="Arial"/>
-            </a:endParaRPr>
-          </a:p>
-          <a:p>
-            <a:pPr marL="432000" indent="0">
-              <a:lnSpc>
-                <a:spcPct val="100000"/>
-              </a:lnSpc>
-              <a:spcBef>
-                <a:spcPts val="1417"/>
-              </a:spcBef>
-              <a:buNone/>
-              <a:tabLst>
-                <a:tab algn="l" pos="0"/>
-              </a:tabLst>
-            </a:pPr>
-            <a:endParaRPr b="0" lang="en-US" sz="3200" strike="noStrike" u="none">
-              <a:solidFill>
-                <a:srgbClr val="000000"/>
-              </a:solidFill>
-              <a:effectLst/>
-              <a:uFillTx/>
-              <a:latin typeface="Arial"/>
-            </a:endParaRPr>
-          </a:p>
-          <a:p>
-            <a:pPr marL="432000" indent="0">
-              <a:lnSpc>
-                <a:spcPct val="100000"/>
-              </a:lnSpc>
-              <a:spcBef>
-                <a:spcPts val="1417"/>
-              </a:spcBef>
-              <a:buNone/>
-              <a:tabLst>
-                <a:tab algn="l" pos="0"/>
-              </a:tabLst>
-            </a:pPr>
-            <a:endParaRPr b="0" lang="en-US" sz="3200" strike="noStrike" u="none">
-              <a:solidFill>
-                <a:srgbClr val="000000"/>
-              </a:solidFill>
-              <a:effectLst/>
-              <a:uFillTx/>
-              <a:latin typeface="Arial"/>
-            </a:endParaRPr>
-          </a:p>
-        </p:txBody>
-      </p:sp>
-      <p:sp>
-        <p:nvSpPr>
-          <p:cNvPr id="16" name=""/>
-          <p:cNvSpPr/>
-          <p:nvPr/>
-        </p:nvSpPr>
-        <p:spPr>
-          <a:xfrm>
-            <a:off x="2161080" y="3769920"/>
-            <a:ext cx="663480" cy="410760"/>
-          </a:xfrm>
-          <a:prstGeom prst="rect">
-            <a:avLst/>
-          </a:prstGeom>
-          <a:blipFill rotWithShape="0">
-            <a:blip r:embed="rId1"/>
-            <a:srcRect/>
-            <a:stretch/>
-          </a:blipFill>
-          <a:ln w="0">
-            <a:noFill/>
-          </a:ln>
-        </p:spPr>
-        <p:style>
-          <a:lnRef idx="0"/>
-          <a:fillRef idx="0"/>
-          <a:effectRef idx="0"/>
-          <a:fontRef idx="minor"/>
-        </p:style>
-        <p:txBody>
-          <a:bodyPr lIns="90000" rIns="90000" tIns="45000" bIns="45000" anchor="t">
-            <a:noAutofit/>
-          </a:bodyPr>
-          <a:p>
-            <a:endParaRPr b="0" lang="en-US" sz="1800" strike="noStrike" u="none">
-              <a:solidFill>
-                <a:srgbClr val="000000"/>
-              </a:solidFill>
-              <a:effectLst/>
-              <a:uFillTx/>
-              <a:latin typeface="Arial"/>
-            </a:endParaRPr>
-          </a:p>
-        </p:txBody>
-      </p:sp>
+      <mc:AlternateContent xmlns:mc="http://schemas.openxmlformats.org/markup-compatibility/2006">
+        <mc:Choice xmlns:a14="http://schemas.microsoft.com/office/drawing/2010/main" Requires="a14">
+          <p:sp>
+            <p:nvSpPr>
+              <p:cNvPr id="15" name="PlaceHolder 2"/>
+              <p:cNvSpPr>
+                <a:spLocks noGrp="1"/>
+              </p:cNvSpPr>
+              <p:nvPr>
+                <p:ph/>
+              </p:nvPr>
+            </p:nvSpPr>
+            <p:spPr>
+              <a:xfrm>
+                <a:off x="504000" y="1326600"/>
+                <a:ext cx="9071280" cy="3287880"/>
+              </a:xfrm>
+              <a:prstGeom prst="rect">
+                <a:avLst/>
+              </a:prstGeom>
+              <a:noFill/>
+              <a:ln w="0">
+                <a:noFill/>
+              </a:ln>
+            </p:spPr>
+            <p:txBody>
+              <a:bodyPr lIns="0" tIns="0" rIns="0" bIns="0" anchor="t">
+                <a:normAutofit fontScale="85000" lnSpcReduction="19999"/>
+              </a:bodyPr>
+              <a:lstStyle/>
+              <a:p>
+                <a:pPr marL="432000" indent="-324000">
+                  <a:lnSpc>
+                    <a:spcPct val="100000"/>
+                  </a:lnSpc>
+                  <a:spcBef>
+                    <a:spcPts val="1417"/>
+                  </a:spcBef>
+                  <a:buClr>
+                    <a:srgbClr val="000000"/>
+                  </a:buClr>
+                  <a:buSzPct val="45000"/>
+                  <a:buFont typeface="Wingdings" charset="2"/>
+                  <a:buChar char=""/>
+                </a:pPr>
+                <a:r>
+                  <a:rPr lang="en-US" sz="1600" b="0" u="none" strike="noStrike" dirty="0">
+                    <a:solidFill>
+                      <a:srgbClr val="000000"/>
+                    </a:solidFill>
+                    <a:effectLst/>
+                    <a:uFillTx/>
+                    <a:latin typeface="Arial"/>
+                  </a:rPr>
+                  <a:t>Grover's algorithm is a quantum search algorithm for finding a marked item inside an unstructured database.</a:t>
+                </a:r>
+              </a:p>
+              <a:p>
+                <a:pPr marL="432000" indent="-324000">
+                  <a:lnSpc>
+                    <a:spcPct val="100000"/>
+                  </a:lnSpc>
+                  <a:spcBef>
+                    <a:spcPts val="1417"/>
+                  </a:spcBef>
+                  <a:buClr>
+                    <a:srgbClr val="000000"/>
+                  </a:buClr>
+                  <a:buSzPct val="45000"/>
+                  <a:buFont typeface="Wingdings" charset="2"/>
+                  <a:buChar char=""/>
+                </a:pPr>
+                <a:r>
+                  <a:rPr lang="en-US" sz="1600" b="0" u="none" strike="noStrike" dirty="0">
+                    <a:solidFill>
+                      <a:srgbClr val="000000"/>
+                    </a:solidFill>
+                    <a:effectLst/>
+                    <a:uFillTx/>
+                    <a:latin typeface="Arial"/>
+                  </a:rPr>
+                  <a:t>It consists of two main operations:</a:t>
+                </a:r>
+              </a:p>
+              <a:p>
+                <a:pPr marL="360000" indent="-324000">
+                  <a:lnSpc>
+                    <a:spcPct val="100000"/>
+                  </a:lnSpc>
+                  <a:spcBef>
+                    <a:spcPts val="1417"/>
+                  </a:spcBef>
+                  <a:buClr>
+                    <a:srgbClr val="000000"/>
+                  </a:buClr>
+                  <a:buSzPct val="45000"/>
+                  <a:buFont typeface="Source Code Pro"/>
+                  <a:buChar char="▶"/>
+                </a:pPr>
+                <a:r>
+                  <a:rPr lang="en-US" sz="1600" b="0" u="none" strike="noStrike" dirty="0">
+                    <a:solidFill>
+                      <a:srgbClr val="000000"/>
+                    </a:solidFill>
+                    <a:effectLst/>
+                    <a:uFillTx/>
+                    <a:latin typeface="Arial"/>
+                  </a:rPr>
+                  <a:t>Oracle</a:t>
+                </a:r>
+              </a:p>
+              <a:p>
+                <a:pPr marL="360000" indent="-324000">
+                  <a:lnSpc>
+                    <a:spcPct val="100000"/>
+                  </a:lnSpc>
+                  <a:spcBef>
+                    <a:spcPts val="1417"/>
+                  </a:spcBef>
+                  <a:buClr>
+                    <a:srgbClr val="000000"/>
+                  </a:buClr>
+                  <a:buSzPct val="45000"/>
+                  <a:buFont typeface="Source Code Pro"/>
+                  <a:buChar char="▶"/>
+                </a:pPr>
+                <a:r>
+                  <a:rPr lang="en-US" sz="1600" b="0" u="none" strike="noStrike" dirty="0">
+                    <a:solidFill>
+                      <a:srgbClr val="000000"/>
+                    </a:solidFill>
+                    <a:effectLst/>
+                    <a:uFillTx/>
+                    <a:latin typeface="Arial"/>
+                  </a:rPr>
+                  <a:t>Diffusion Operator</a:t>
+                </a:r>
+              </a:p>
+              <a:p>
+                <a:pPr marL="432000" indent="-324000">
+                  <a:lnSpc>
+                    <a:spcPct val="100000"/>
+                  </a:lnSpc>
+                  <a:spcBef>
+                    <a:spcPts val="1417"/>
+                  </a:spcBef>
+                  <a:buClr>
+                    <a:srgbClr val="000000"/>
+                  </a:buClr>
+                  <a:buFont typeface="Symbol" charset="2"/>
+                  <a:buChar char=""/>
+                </a:pPr>
+                <a:r>
+                  <a:rPr lang="en-US" sz="1600" b="0" u="none" strike="noStrike" dirty="0">
+                    <a:solidFill>
+                      <a:srgbClr val="000000"/>
+                    </a:solidFill>
+                    <a:effectLst/>
+                    <a:uFillTx/>
+                    <a:latin typeface="Arial"/>
+                  </a:rPr>
+                  <a:t>Repeated application amplifies the amplitude of the marked state.</a:t>
+                </a:r>
+              </a:p>
+              <a:p>
+                <a:pPr marL="432000" indent="-324000">
+                  <a:lnSpc>
+                    <a:spcPct val="100000"/>
+                  </a:lnSpc>
+                  <a:spcBef>
+                    <a:spcPts val="1417"/>
+                  </a:spcBef>
+                  <a:buClr>
+                    <a:srgbClr val="000000"/>
+                  </a:buClr>
+                  <a:buFont typeface="Symbol" charset="2"/>
+                  <a:buChar char=""/>
+                </a:pPr>
+                <a:r>
+                  <a:rPr lang="en-US" sz="1600" b="0" u="none" strike="noStrike" dirty="0">
+                    <a:solidFill>
+                      <a:srgbClr val="000000"/>
+                    </a:solidFill>
+                    <a:effectLst/>
+                    <a:uFillTx/>
+                    <a:latin typeface="Arial"/>
+                  </a:rPr>
+                  <a:t>Initial state ∣0000⟩</a:t>
+                </a:r>
+              </a:p>
+              <a:p>
+                <a:pPr marL="432000" indent="-324000">
+                  <a:lnSpc>
+                    <a:spcPct val="100000"/>
+                  </a:lnSpc>
+                  <a:spcBef>
+                    <a:spcPts val="1191"/>
+                  </a:spcBef>
+                  <a:spcAft>
+                    <a:spcPts val="992"/>
+                  </a:spcAft>
+                  <a:buClr>
+                    <a:srgbClr val="000000"/>
+                  </a:buClr>
+                  <a:buFont typeface="Symbol" charset="2"/>
+                  <a:buChar char=""/>
+                </a:pPr>
+                <a:r>
+                  <a:rPr lang="en-US" sz="1600" b="0" u="none" strike="noStrike" dirty="0">
+                    <a:solidFill>
+                      <a:srgbClr val="000000"/>
+                    </a:solidFill>
+                    <a:effectLst/>
+                    <a:uFillTx/>
+                    <a:latin typeface="Arial"/>
+                  </a:rPr>
+                  <a:t>After Hadamard gates</a:t>
+                </a:r>
+                <a:br>
+                  <a:rPr lang="en-US" sz="1600" dirty="0"/>
+                </a:br>
+                <a:br>
+                  <a:rPr lang="en-US" sz="1600" dirty="0"/>
+                </a:br>
+                <a:r>
+                  <a:rPr lang="en-US" sz="1600" dirty="0"/>
+                  <a:t>	</a:t>
+                </a:r>
+                <a:r>
+                  <a:rPr lang="en-US" sz="1600" b="0" u="none" strike="noStrike" dirty="0">
+                    <a:solidFill>
+                      <a:srgbClr val="000000"/>
+                    </a:solidFill>
+                    <a:effectLst/>
+                    <a:uFillTx/>
+                    <a:latin typeface="Arial"/>
+                  </a:rPr>
+                  <a:t> </a:t>
+                </a:r>
+                <a14:m>
+                  <m:oMath xmlns:m="http://schemas.openxmlformats.org/officeDocument/2006/math">
+                    <m:f>
+                      <m:fPr>
+                        <m:ctrlPr>
+                          <a:rPr lang="ar-AE" sz="1600" b="0" i="1" u="none" strike="noStrike" smtClean="0">
+                            <a:solidFill>
+                              <a:srgbClr val="000000"/>
+                            </a:solidFill>
+                            <a:effectLst/>
+                            <a:uFillTx/>
+                            <a:latin typeface="Cambria Math" panose="02040503050406030204" pitchFamily="18" charset="0"/>
+                          </a:rPr>
+                        </m:ctrlPr>
+                      </m:fPr>
+                      <m:num>
+                        <m:r>
+                          <a:rPr lang="en-GB" sz="1600" b="0" i="1" u="none" strike="noStrike" smtClean="0">
+                            <a:solidFill>
+                              <a:srgbClr val="000000"/>
+                            </a:solidFill>
+                            <a:effectLst/>
+                            <a:uFillTx/>
+                            <a:latin typeface="Cambria Math" panose="02040503050406030204" pitchFamily="18" charset="0"/>
+                          </a:rPr>
+                          <m:t>1</m:t>
+                        </m:r>
+                      </m:num>
+                      <m:den>
+                        <m:rad>
+                          <m:radPr>
+                            <m:degHide m:val="on"/>
+                            <m:ctrlPr>
+                              <a:rPr lang="ar-AE" sz="1600" b="0" i="1" u="none" strike="noStrike" smtClean="0">
+                                <a:solidFill>
+                                  <a:srgbClr val="000000"/>
+                                </a:solidFill>
+                                <a:effectLst/>
+                                <a:uFillTx/>
+                                <a:latin typeface="Cambria Math" panose="02040503050406030204" pitchFamily="18" charset="0"/>
+                              </a:rPr>
+                            </m:ctrlPr>
+                          </m:radPr>
+                          <m:deg/>
+                          <m:e>
+                            <m:r>
+                              <a:rPr lang="ar-AE" sz="1600" b="0" i="1" u="none" strike="noStrike" smtClean="0">
+                                <a:solidFill>
+                                  <a:srgbClr val="000000"/>
+                                </a:solidFill>
+                                <a:effectLst/>
+                                <a:uFillTx/>
+                                <a:latin typeface="Cambria Math" panose="02040503050406030204" pitchFamily="18" charset="0"/>
+                              </a:rPr>
+                              <m:t>1</m:t>
+                            </m:r>
+                            <m:r>
+                              <a:rPr lang="en-GB" sz="1600" b="0" i="1" u="none" strike="noStrike" smtClean="0">
+                                <a:solidFill>
+                                  <a:srgbClr val="000000"/>
+                                </a:solidFill>
+                                <a:effectLst/>
+                                <a:uFillTx/>
+                                <a:latin typeface="Cambria Math" panose="02040503050406030204" pitchFamily="18" charset="0"/>
+                              </a:rPr>
+                              <m:t>6</m:t>
+                            </m:r>
+                          </m:e>
+                        </m:rad>
+                      </m:den>
+                    </m:f>
+                    <m:nary>
+                      <m:naryPr>
+                        <m:chr m:val="∑"/>
+                        <m:ctrlPr>
+                          <a:rPr lang="ar-AE" sz="1600" b="0" i="1" u="none" strike="noStrike" smtClean="0">
+                            <a:solidFill>
+                              <a:srgbClr val="000000"/>
+                            </a:solidFill>
+                            <a:effectLst/>
+                            <a:uFillTx/>
+                            <a:latin typeface="Cambria Math" panose="02040503050406030204" pitchFamily="18" charset="0"/>
+                          </a:rPr>
+                        </m:ctrlPr>
+                      </m:naryPr>
+                      <m:sub>
+                        <m:r>
+                          <m:rPr>
+                            <m:brk m:alnAt="23"/>
+                          </m:rPr>
+                          <a:rPr lang="en-GB" sz="1600" b="0" i="1" u="none" strike="noStrike" smtClean="0">
+                            <a:solidFill>
+                              <a:srgbClr val="000000"/>
+                            </a:solidFill>
+                            <a:effectLst/>
+                            <a:uFillTx/>
+                            <a:latin typeface="Cambria Math" panose="02040503050406030204" pitchFamily="18" charset="0"/>
+                          </a:rPr>
+                          <m:t>𝑥</m:t>
+                        </m:r>
+                        <m:r>
+                          <a:rPr lang="en-GB" sz="1600" b="0" i="1" u="none" strike="noStrike" smtClean="0">
+                            <a:solidFill>
+                              <a:srgbClr val="000000"/>
+                            </a:solidFill>
+                            <a:effectLst/>
+                            <a:uFillTx/>
+                            <a:latin typeface="Cambria Math" panose="02040503050406030204" pitchFamily="18" charset="0"/>
+                          </a:rPr>
+                          <m:t>=</m:t>
+                        </m:r>
+                        <m:r>
+                          <m:rPr>
+                            <m:brk m:alnAt="23"/>
+                          </m:rPr>
+                          <a:rPr lang="en-GB" sz="1600" b="0" i="1" u="none" strike="noStrike" smtClean="0">
+                            <a:solidFill>
+                              <a:srgbClr val="000000"/>
+                            </a:solidFill>
+                            <a:effectLst/>
+                            <a:uFillTx/>
+                            <a:latin typeface="Cambria Math" panose="02040503050406030204" pitchFamily="18" charset="0"/>
+                          </a:rPr>
+                          <m:t>0</m:t>
+                        </m:r>
+                      </m:sub>
+                      <m:sup>
+                        <m:r>
+                          <a:rPr lang="en-GB" sz="1600" b="0" i="1" u="none" strike="noStrike" smtClean="0">
+                            <a:solidFill>
+                              <a:srgbClr val="000000"/>
+                            </a:solidFill>
+                            <a:effectLst/>
+                            <a:uFillTx/>
+                            <a:latin typeface="Cambria Math" panose="02040503050406030204" pitchFamily="18" charset="0"/>
+                          </a:rPr>
+                          <m:t>15</m:t>
+                        </m:r>
+                      </m:sup>
+                      <m:e>
+                        <m:r>
+                          <a:rPr lang="en-US" sz="1600" i="1">
+                            <a:solidFill>
+                              <a:srgbClr val="000000"/>
+                            </a:solidFill>
+                            <a:latin typeface="Cambria Math" panose="02040503050406030204" pitchFamily="18" charset="0"/>
+                          </a:rPr>
+                          <m:t>|</m:t>
+                        </m:r>
+                        <m:r>
+                          <a:rPr lang="en-US" sz="1600" i="1">
+                            <a:solidFill>
+                              <a:srgbClr val="000000"/>
+                            </a:solidFill>
+                            <a:latin typeface="Cambria Math" panose="02040503050406030204" pitchFamily="18" charset="0"/>
+                          </a:rPr>
+                          <m:t>𝑥</m:t>
+                        </m:r>
+                        <m:r>
+                          <a:rPr lang="en-US" sz="1600" i="1">
+                            <a:solidFill>
+                              <a:srgbClr val="000000"/>
+                            </a:solidFill>
+                            <a:latin typeface="Cambria Math" panose="02040503050406030204" pitchFamily="18" charset="0"/>
+                          </a:rPr>
+                          <m:t>⟩</m:t>
+                        </m:r>
+                      </m:e>
+                    </m:nary>
+                  </m:oMath>
+                </a14:m>
+                <a:endParaRPr lang="ar-AE" sz="1600" b="0" u="none" strike="noStrike" dirty="0">
+                  <a:solidFill>
+                    <a:srgbClr val="000000"/>
+                  </a:solidFill>
+                  <a:effectLst/>
+                  <a:uFillTx/>
+                  <a:latin typeface="Arial"/>
+                </a:endParaRPr>
+              </a:p>
+              <a:p>
+                <a:pPr marL="432000" indent="0">
+                  <a:lnSpc>
+                    <a:spcPct val="100000"/>
+                  </a:lnSpc>
+                  <a:spcBef>
+                    <a:spcPts val="1417"/>
+                  </a:spcBef>
+                  <a:buNone/>
+                  <a:tabLst>
+                    <a:tab pos="0" algn="l"/>
+                  </a:tabLst>
+                </a:pPr>
+                <a:r>
+                  <a:rPr lang="ar-AE" sz="1600" b="0" u="none" strike="noStrike" dirty="0">
+                    <a:solidFill>
+                      <a:srgbClr val="000000"/>
+                    </a:solidFill>
+                    <a:effectLst/>
+                    <a:uFillTx/>
+                    <a:latin typeface="Arial"/>
+                  </a:rPr>
+                  <a:t> </a:t>
+                </a:r>
+                <a:r>
+                  <a:rPr lang="en-US" sz="1600" b="0" u="none" strike="noStrike" dirty="0">
+                    <a:solidFill>
+                      <a:srgbClr val="000000"/>
+                    </a:solidFill>
+                    <a:effectLst/>
+                    <a:uFillTx/>
+                    <a:latin typeface="Arial"/>
+                  </a:rPr>
+                  <a:t>Every basis state initially has equal probability.</a:t>
+                </a:r>
+              </a:p>
+              <a:p>
+                <a:pPr marL="432000" indent="0">
+                  <a:lnSpc>
+                    <a:spcPct val="100000"/>
+                  </a:lnSpc>
+                  <a:spcBef>
+                    <a:spcPts val="1417"/>
+                  </a:spcBef>
+                  <a:buNone/>
+                  <a:tabLst>
+                    <a:tab pos="0" algn="l"/>
+                  </a:tabLst>
+                </a:pPr>
+                <a:endParaRPr lang="en-US" sz="3200" b="0" u="none" strike="noStrike" dirty="0">
+                  <a:solidFill>
+                    <a:srgbClr val="000000"/>
+                  </a:solidFill>
+                  <a:effectLst/>
+                  <a:uFillTx/>
+                  <a:latin typeface="Arial"/>
+                </a:endParaRPr>
+              </a:p>
+              <a:p>
+                <a:pPr marL="432000" indent="0">
+                  <a:lnSpc>
+                    <a:spcPct val="100000"/>
+                  </a:lnSpc>
+                  <a:spcBef>
+                    <a:spcPts val="1417"/>
+                  </a:spcBef>
+                  <a:buNone/>
+                  <a:tabLst>
+                    <a:tab pos="0" algn="l"/>
+                  </a:tabLst>
+                </a:pPr>
+                <a:endParaRPr lang="en-US" sz="3200" b="0" u="none" strike="noStrike" dirty="0">
+                  <a:solidFill>
+                    <a:srgbClr val="000000"/>
+                  </a:solidFill>
+                  <a:effectLst/>
+                  <a:uFillTx/>
+                  <a:latin typeface="Arial"/>
+                </a:endParaRPr>
+              </a:p>
+              <a:p>
+                <a:pPr marL="432000" indent="0">
+                  <a:lnSpc>
+                    <a:spcPct val="100000"/>
+                  </a:lnSpc>
+                  <a:spcBef>
+                    <a:spcPts val="1417"/>
+                  </a:spcBef>
+                  <a:buNone/>
+                  <a:tabLst>
+                    <a:tab pos="0" algn="l"/>
+                  </a:tabLst>
+                </a:pPr>
+                <a:endParaRPr lang="en-US" sz="3200" b="0" u="none" strike="noStrike" dirty="0">
+                  <a:solidFill>
+                    <a:srgbClr val="000000"/>
+                  </a:solidFill>
+                  <a:effectLst/>
+                  <a:uFillTx/>
+                  <a:latin typeface="Arial"/>
+                </a:endParaRPr>
+              </a:p>
+              <a:p>
+                <a:pPr marL="432000" indent="0">
+                  <a:lnSpc>
+                    <a:spcPct val="100000"/>
+                  </a:lnSpc>
+                  <a:spcBef>
+                    <a:spcPts val="1417"/>
+                  </a:spcBef>
+                  <a:buNone/>
+                  <a:tabLst>
+                    <a:tab pos="0" algn="l"/>
+                  </a:tabLst>
+                </a:pPr>
+                <a:endParaRPr lang="en-US" sz="3200" b="0" u="none" strike="noStrike" dirty="0">
+                  <a:solidFill>
+                    <a:srgbClr val="000000"/>
+                  </a:solidFill>
+                  <a:effectLst/>
+                  <a:uFillTx/>
+                  <a:latin typeface="Arial"/>
+                </a:endParaRPr>
+              </a:p>
+              <a:p>
+                <a:pPr marL="432000" indent="0">
+                  <a:lnSpc>
+                    <a:spcPct val="100000"/>
+                  </a:lnSpc>
+                  <a:spcBef>
+                    <a:spcPts val="1417"/>
+                  </a:spcBef>
+                  <a:buNone/>
+                  <a:tabLst>
+                    <a:tab pos="0" algn="l"/>
+                  </a:tabLst>
+                </a:pPr>
+                <a:endParaRPr lang="en-US" sz="3200" b="0" u="none" strike="noStrike" dirty="0">
+                  <a:solidFill>
+                    <a:srgbClr val="000000"/>
+                  </a:solidFill>
+                  <a:effectLst/>
+                  <a:uFillTx/>
+                  <a:latin typeface="Arial"/>
+                </a:endParaRPr>
+              </a:p>
+              <a:p>
+                <a:pPr marL="432000" indent="0">
+                  <a:lnSpc>
+                    <a:spcPct val="100000"/>
+                  </a:lnSpc>
+                  <a:spcBef>
+                    <a:spcPts val="1417"/>
+                  </a:spcBef>
+                  <a:buNone/>
+                  <a:tabLst>
+                    <a:tab pos="0" algn="l"/>
+                  </a:tabLst>
+                </a:pPr>
+                <a:endParaRPr lang="en-US" sz="3200" b="0" u="none" strike="noStrike" dirty="0">
+                  <a:solidFill>
+                    <a:srgbClr val="000000"/>
+                  </a:solidFill>
+                  <a:effectLst/>
+                  <a:uFillTx/>
+                  <a:latin typeface="Arial"/>
+                </a:endParaRPr>
+              </a:p>
+              <a:p>
+                <a:pPr marL="432000" indent="0">
+                  <a:lnSpc>
+                    <a:spcPct val="100000"/>
+                  </a:lnSpc>
+                  <a:spcBef>
+                    <a:spcPts val="1417"/>
+                  </a:spcBef>
+                  <a:buNone/>
+                  <a:tabLst>
+                    <a:tab pos="0" algn="l"/>
+                  </a:tabLst>
+                </a:pPr>
+                <a:endParaRPr lang="en-US" sz="3200" b="0" u="none" strike="noStrike" dirty="0">
+                  <a:solidFill>
+                    <a:srgbClr val="000000"/>
+                  </a:solidFill>
+                  <a:effectLst/>
+                  <a:uFillTx/>
+                  <a:latin typeface="Arial"/>
+                </a:endParaRPr>
+              </a:p>
+            </p:txBody>
+          </p:sp>
+        </mc:Choice>
+        <mc:Fallback>
+          <p:sp>
+            <p:nvSpPr>
+              <p:cNvPr id="15" name="PlaceHolder 2"/>
+              <p:cNvSpPr>
+                <a:spLocks noGrp="1" noRot="1" noChangeAspect="1" noMove="1" noResize="1" noEditPoints="1" noAdjustHandles="1" noChangeArrowheads="1" noChangeShapeType="1" noTextEdit="1"/>
+              </p:cNvSpPr>
+              <p:nvPr>
+                <p:ph/>
+              </p:nvPr>
+            </p:nvSpPr>
+            <p:spPr>
+              <a:xfrm>
+                <a:off x="504000" y="1326600"/>
+                <a:ext cx="9071280" cy="3287880"/>
+              </a:xfrm>
+              <a:prstGeom prst="rect">
+                <a:avLst/>
+              </a:prstGeom>
+              <a:blipFill>
+                <a:blip r:embed="rId2"/>
+                <a:stretch>
+                  <a:fillRect l="-202" t="-3154"/>
+                </a:stretch>
+              </a:blipFill>
+              <a:ln w="0">
+                <a:noFill/>
+              </a:ln>
+            </p:spPr>
+            <p:txBody>
+              <a:bodyPr/>
+              <a:lstStyle/>
+              <a:p>
+                <a:r>
+                  <a:rPr lang="en-US">
+                    <a:noFill/>
+                  </a:rPr>
+                  <a:t> </a:t>
+                </a:r>
+              </a:p>
+            </p:txBody>
+          </p:sp>
+        </mc:Fallback>
+      </mc:AlternateContent>
     </p:spTree>
   </p:cSld>
-  <mc:AlternateContent>
-    <mc:Choice Requires="p14">
-      <p:transition spd="slow" p14:dur="2000"/>
-    </mc:Choice>
-    <mc:Fallback>
-      <p:transition spd="slow"/>
-    </mc:Fallback>
-  </mc:AlternateContent>
+  <p:clrMapOvr>
+    <a:masterClrMapping/>
+  </p:clrMapOvr>
 </p:sld>
 </file>
 
 <file path=ppt/slides/slide4.xml><?xml version="1.0" encoding="utf-8"?>
-<p:sld xmlns:a="http://schemas.openxmlformats.org/drawingml/2006/main" xmlns:p="http://schemas.openxmlformats.org/presentationml/2006/main" xmlns:r="http://schemas.openxmlformats.org/officeDocument/2006/relationships" xmlns:p14="http://schemas.microsoft.com/office/powerpoint/2010/main" xmlns:p15="http://schemas.microsoft.com/office/powerpoint/2012/main" xmlns:mc="http://schemas.openxmlformats.org/markup-compatibility/2006">
+<p:sld xmlns:a="http://schemas.openxmlformats.org/drawingml/2006/main" xmlns:r="http://schemas.openxmlformats.org/officeDocument/2006/relationships" xmlns:p="http://schemas.openxmlformats.org/presentationml/2006/main">
   <p:cSld>
     <p:spTree>
       <p:nvGrpSpPr>
@@ -4047,9 +4183,10 @@
           </a:ln>
         </p:spPr>
         <p:txBody>
-          <a:bodyPr lIns="0" rIns="0" tIns="0" bIns="0" anchor="ctr">
+          <a:bodyPr lIns="0" tIns="0" rIns="0" bIns="0" anchor="ctr">
             <a:spAutoFit/>
           </a:bodyPr>
+          <a:lstStyle/>
           <a:p>
             <a:pPr indent="0" algn="ctr">
               <a:lnSpc>
@@ -4057,11 +4194,11 @@
               </a:lnSpc>
               <a:buNone/>
               <a:tabLst>
-                <a:tab algn="l" pos="0"/>
+                <a:tab pos="0" algn="l"/>
               </a:tabLst>
             </a:pPr>
             <a:r>
-              <a:rPr b="0" lang="en-US" sz="4400" strike="noStrike" u="none">
+              <a:rPr lang="en-US" sz="4400" b="0" u="none" strike="noStrike">
                 <a:solidFill>
                   <a:srgbClr val="000000"/>
                 </a:solidFill>
@@ -4071,14 +4208,6 @@
               </a:rPr>
               <a:t>Algorithm Steps </a:t>
             </a:r>
-            <a:endParaRPr b="0" lang="en-US" sz="4400" strike="noStrike" u="none">
-              <a:solidFill>
-                <a:srgbClr val="000000"/>
-              </a:solidFill>
-              <a:effectLst/>
-              <a:uFillTx/>
-              <a:latin typeface="Arial"/>
-            </a:endParaRPr>
           </a:p>
         </p:txBody>
       </p:sp>
@@ -4094,7 +4223,7 @@
         </p:nvSpPr>
         <p:spPr>
           <a:xfrm>
-            <a:off x="504000" y="1326600"/>
+            <a:off x="504000" y="1162831"/>
             <a:ext cx="9071280" cy="3287880"/>
           </a:xfrm>
           <a:prstGeom prst="rect">
@@ -4106,9 +4235,10 @@
           </a:ln>
         </p:spPr>
         <p:txBody>
-          <a:bodyPr lIns="0" rIns="0" tIns="0" bIns="0" anchor="t">
-            <a:normAutofit fontScale="70000" lnSpcReduction="19999"/>
+          <a:bodyPr lIns="0" tIns="0" rIns="0" bIns="0" anchor="t">
+            <a:noAutofit/>
           </a:bodyPr>
+          <a:lstStyle/>
           <a:p>
             <a:pPr marL="360000" indent="-324000">
               <a:lnSpc>
@@ -4127,7 +4257,7 @@
               <a:buChar char=""/>
             </a:pPr>
             <a:r>
-              <a:rPr b="0" lang="en-US" sz="1600" strike="noStrike" u="none">
+              <a:rPr lang="en-US" sz="1100" b="0" u="none" strike="noStrike" dirty="0">
                 <a:solidFill>
                   <a:srgbClr val="000000"/>
                 </a:solidFill>
@@ -4137,14 +4267,6 @@
               </a:rPr>
               <a:t>Initialize</a:t>
             </a:r>
-            <a:endParaRPr b="0" lang="en-US" sz="1600" strike="noStrike" u="none">
-              <a:solidFill>
-                <a:srgbClr val="000000"/>
-              </a:solidFill>
-              <a:effectLst/>
-              <a:uFillTx/>
-              <a:latin typeface="Arial"/>
-            </a:endParaRPr>
           </a:p>
           <a:p>
             <a:pPr marL="360000" indent="-324000">
@@ -4164,7 +4286,7 @@
               <a:buChar char=""/>
             </a:pPr>
             <a:r>
-              <a:rPr b="0" lang="en-US" sz="1600" strike="noStrike" u="none">
+              <a:rPr lang="en-US" sz="1100" b="0" u="none" strike="noStrike" dirty="0">
                 <a:solidFill>
                   <a:srgbClr val="000000"/>
                 </a:solidFill>
@@ -4174,14 +4296,6 @@
               </a:rPr>
               <a:t>Apply Hadamard Gates</a:t>
             </a:r>
-            <a:endParaRPr b="0" lang="en-US" sz="1600" strike="noStrike" u="none">
-              <a:solidFill>
-                <a:srgbClr val="000000"/>
-              </a:solidFill>
-              <a:effectLst/>
-              <a:uFillTx/>
-              <a:latin typeface="Arial"/>
-            </a:endParaRPr>
           </a:p>
           <a:p>
             <a:pPr marL="360000" indent="-324000">
@@ -4201,7 +4315,7 @@
               <a:buChar char=""/>
             </a:pPr>
             <a:r>
-              <a:rPr b="0" lang="en-US" sz="1600" strike="noStrike" u="none">
+              <a:rPr lang="en-US" sz="1100" b="0" u="none" strike="noStrike" dirty="0">
                 <a:solidFill>
                   <a:srgbClr val="000000"/>
                 </a:solidFill>
@@ -4211,14 +4325,6 @@
               </a:rPr>
               <a:t>Uniform Superposition</a:t>
             </a:r>
-            <a:endParaRPr b="0" lang="en-US" sz="1600" strike="noStrike" u="none">
-              <a:solidFill>
-                <a:srgbClr val="000000"/>
-              </a:solidFill>
-              <a:effectLst/>
-              <a:uFillTx/>
-              <a:latin typeface="Arial"/>
-            </a:endParaRPr>
           </a:p>
           <a:p>
             <a:pPr marL="360000" indent="-324000">
@@ -4238,7 +4344,7 @@
               <a:buChar char=""/>
             </a:pPr>
             <a:r>
-              <a:rPr b="0" lang="en-US" sz="1600" strike="noStrike" u="none">
+              <a:rPr lang="en-US" sz="1100" b="0" u="none" strike="noStrike" dirty="0">
                 <a:solidFill>
                   <a:srgbClr val="000000"/>
                 </a:solidFill>
@@ -4248,14 +4354,6 @@
               </a:rPr>
               <a:t>Oracle</a:t>
             </a:r>
-            <a:endParaRPr b="0" lang="en-US" sz="1600" strike="noStrike" u="none">
-              <a:solidFill>
-                <a:srgbClr val="000000"/>
-              </a:solidFill>
-              <a:effectLst/>
-              <a:uFillTx/>
-              <a:latin typeface="Arial"/>
-            </a:endParaRPr>
           </a:p>
           <a:p>
             <a:pPr marL="720000" indent="-324000">
@@ -4275,7 +4373,7 @@
               <a:buChar char="►"/>
             </a:pPr>
             <a:r>
-              <a:rPr b="0" lang="en-US" sz="1000" strike="noStrike" u="none">
+              <a:rPr lang="en-US" sz="1100" b="0" u="none" strike="noStrike" dirty="0">
                 <a:solidFill>
                   <a:srgbClr val="000000"/>
                 </a:solidFill>
@@ -4284,9 +4382,33 @@
                 <a:latin typeface="Arial"/>
                 <a:ea typeface="WenQuanYi Zen Hei"/>
               </a:rPr>
-              <a:t>Marks ∣1101⟩ by by phase inversion ∣1101⟩→−∣1101⟩</a:t>
-            </a:r>
-            <a:endParaRPr b="0" lang="en-US" sz="1000" strike="noStrike" u="none">
+              <a:t>Marks ∣1101⟩ by </a:t>
+            </a:r>
+            <a:r>
+              <a:rPr lang="en-US" sz="1100" b="0" u="none" strike="noStrike" dirty="0" err="1">
+                <a:solidFill>
+                  <a:srgbClr val="000000"/>
+                </a:solidFill>
+                <a:effectLst/>
+                <a:uFillTx/>
+                <a:latin typeface="Arial"/>
+                <a:ea typeface="WenQuanYi Zen Hei"/>
+              </a:rPr>
+              <a:t>by</a:t>
+            </a:r>
+            <a:r>
+              <a:rPr lang="en-US" sz="1100" b="0" u="none" strike="noStrike" dirty="0">
+                <a:solidFill>
+                  <a:srgbClr val="000000"/>
+                </a:solidFill>
+                <a:effectLst/>
+                <a:uFillTx/>
+                <a:latin typeface="Arial"/>
+                <a:ea typeface="WenQuanYi Zen Hei"/>
+              </a:rPr>
+              <a:t> phase inversion ∣1101⟩→−∣1101⟩</a:t>
+            </a:r>
+            <a:endParaRPr lang="en-US" sz="1100" b="0" u="none" strike="noStrike" dirty="0">
               <a:solidFill>
                 <a:srgbClr val="000000"/>
               </a:solidFill>
@@ -4313,7 +4435,7 @@
               <a:buChar char=""/>
             </a:pPr>
             <a:r>
-              <a:rPr b="0" lang="en-US" sz="1600" strike="noStrike" u="none">
+              <a:rPr lang="en-US" sz="1100" b="0" u="none" strike="noStrike" dirty="0">
                 <a:solidFill>
                   <a:srgbClr val="000000"/>
                 </a:solidFill>
@@ -4324,7 +4446,7 @@
               </a:rPr>
               <a:t>Diffusion</a:t>
             </a:r>
-            <a:endParaRPr b="0" lang="en-US" sz="1600" strike="noStrike" u="none">
+            <a:endParaRPr lang="en-US" sz="1100" b="0" u="none" strike="noStrike" dirty="0">
               <a:solidFill>
                 <a:srgbClr val="000000"/>
               </a:solidFill>
@@ -4351,7 +4473,7 @@
               <a:buChar char="►"/>
             </a:pPr>
             <a:r>
-              <a:rPr b="0" lang="en-US" sz="1000" strike="noStrike" u="none">
+              <a:rPr lang="en-US" sz="1100" b="0" u="none" strike="noStrike" dirty="0">
                 <a:solidFill>
                   <a:srgbClr val="000000"/>
                 </a:solidFill>
@@ -4362,7 +4484,7 @@
               </a:rPr>
               <a:t>Reflects amplitudes around the average amplitude.</a:t>
             </a:r>
-            <a:endParaRPr b="0" lang="en-US" sz="1000" strike="noStrike" u="none">
+            <a:endParaRPr lang="en-US" sz="1100" b="0" u="none" strike="noStrike" dirty="0">
               <a:solidFill>
                 <a:srgbClr val="000000"/>
               </a:solidFill>
@@ -4389,7 +4511,7 @@
               <a:buChar char="►"/>
             </a:pPr>
             <a:r>
-              <a:rPr b="0" lang="en-US" sz="1000" strike="noStrike" u="none">
+              <a:rPr lang="en-US" sz="1100" b="0" u="none" strike="noStrike" dirty="0">
                 <a:solidFill>
                   <a:srgbClr val="000000"/>
                 </a:solidFill>
@@ -4400,7 +4522,7 @@
               </a:rPr>
               <a:t>This increases the amplitude of the marked state.</a:t>
             </a:r>
-            <a:endParaRPr b="0" lang="en-US" sz="1000" strike="noStrike" u="none">
+            <a:endParaRPr lang="en-US" sz="1100" b="0" u="none" strike="noStrike" dirty="0">
               <a:solidFill>
                 <a:srgbClr val="000000"/>
               </a:solidFill>
@@ -4427,7 +4549,7 @@
               <a:buChar char=""/>
             </a:pPr>
             <a:r>
-              <a:rPr b="0" lang="en-US" sz="1600" strike="noStrike" u="none">
+              <a:rPr lang="en-US" sz="1100" b="0" u="none" strike="noStrike" dirty="0">
                 <a:solidFill>
                   <a:srgbClr val="000000"/>
                 </a:solidFill>
@@ -4438,7 +4560,7 @@
               </a:rPr>
               <a:t>Repeat k times</a:t>
             </a:r>
-            <a:endParaRPr b="0" lang="en-US" sz="1600" strike="noStrike" u="none">
+            <a:endParaRPr lang="en-US" sz="1100" b="0" u="none" strike="noStrike" dirty="0">
               <a:solidFill>
                 <a:srgbClr val="000000"/>
               </a:solidFill>
@@ -4465,7 +4587,7 @@
               <a:buChar char=""/>
             </a:pPr>
             <a:r>
-              <a:rPr b="0" lang="en-US" sz="1600" strike="noStrike" u="none">
+              <a:rPr lang="en-US" sz="1100" b="0" u="none" strike="noStrike" dirty="0">
                 <a:solidFill>
                   <a:srgbClr val="000000"/>
                 </a:solidFill>
@@ -4476,7 +4598,7 @@
               </a:rPr>
               <a:t>Measurement</a:t>
             </a:r>
-            <a:endParaRPr b="0" lang="en-US" sz="1600" strike="noStrike" u="none">
+            <a:endParaRPr lang="en-US" sz="1100" b="0" u="none" strike="noStrike" dirty="0">
               <a:solidFill>
                 <a:srgbClr val="000000"/>
               </a:solidFill>
@@ -4489,19 +4611,14 @@
       </p:sp>
     </p:spTree>
   </p:cSld>
-  <mc:AlternateContent>
-    <mc:Choice Requires="p14">
-      <p:transition spd="slow" p14:dur="2000"/>
-    </mc:Choice>
-    <mc:Fallback>
-      <p:transition spd="slow"/>
-    </mc:Fallback>
-  </mc:AlternateContent>
+  <p:clrMapOvr>
+    <a:masterClrMapping/>
+  </p:clrMapOvr>
 </p:sld>
 </file>
 
 <file path=ppt/slides/slide5.xml><?xml version="1.0" encoding="utf-8"?>
-<p:sld xmlns:a="http://schemas.openxmlformats.org/drawingml/2006/main" xmlns:p="http://schemas.openxmlformats.org/presentationml/2006/main" xmlns:r="http://schemas.openxmlformats.org/officeDocument/2006/relationships" xmlns:p14="http://schemas.microsoft.com/office/powerpoint/2010/main" xmlns:p15="http://schemas.microsoft.com/office/powerpoint/2012/main" xmlns:mc="http://schemas.openxmlformats.org/markup-compatibility/2006">
+<p:sld xmlns:a="http://schemas.openxmlformats.org/drawingml/2006/main" xmlns:r="http://schemas.openxmlformats.org/officeDocument/2006/relationships" xmlns:p="http://schemas.openxmlformats.org/presentationml/2006/main">
   <p:cSld>
     <p:spTree>
       <p:nvGrpSpPr>
@@ -4541,9 +4658,10 @@
           </a:ln>
         </p:spPr>
         <p:txBody>
-          <a:bodyPr lIns="0" rIns="0" tIns="0" bIns="0" anchor="ctr">
+          <a:bodyPr lIns="0" tIns="0" rIns="0" bIns="0" anchor="ctr">
             <a:spAutoFit/>
           </a:bodyPr>
+          <a:lstStyle/>
           <a:p>
             <a:pPr indent="0" algn="ctr">
               <a:lnSpc>
@@ -4551,11 +4669,11 @@
               </a:lnSpc>
               <a:buNone/>
               <a:tabLst>
-                <a:tab algn="l" pos="0"/>
+                <a:tab pos="0" algn="l"/>
               </a:tabLst>
             </a:pPr>
             <a:r>
-              <a:rPr b="0" lang="en-US" sz="4400" strike="noStrike" u="none">
+              <a:rPr lang="en-US" sz="4400" b="0" u="none" strike="noStrike">
                 <a:solidFill>
                   <a:srgbClr val="000000"/>
                 </a:solidFill>
@@ -4565,20 +4683,12 @@
               </a:rPr>
               <a:t>Circuit Implementation</a:t>
             </a:r>
-            <a:endParaRPr b="0" lang="en-US" sz="4400" strike="noStrike" u="none">
-              <a:solidFill>
-                <a:srgbClr val="000000"/>
-              </a:solidFill>
-              <a:effectLst/>
-              <a:uFillTx/>
-              <a:latin typeface="Arial"/>
-            </a:endParaRPr>
           </a:p>
         </p:txBody>
       </p:sp>
       <p:graphicFrame>
         <p:nvGraphicFramePr>
-          <p:cNvPr id="20" name=""/>
+          <p:cNvPr id="20" name="Chart 19"/>
           <p:cNvGraphicFramePr/>
           <p:nvPr/>
         </p:nvGraphicFramePr>
@@ -4588,18 +4698,18 @@
         </p:xfrm>
         <a:graphic>
           <a:graphicData uri="http://schemas.openxmlformats.org/drawingml/2006/chart">
-            <c:chart xmlns:c="http://schemas.openxmlformats.org/drawingml/2006/chart" xmlns:r="http://schemas.openxmlformats.org/officeDocument/2006/relationships" r:id="rId1"/>
+            <c:chart xmlns:c="http://schemas.openxmlformats.org/drawingml/2006/chart" xmlns:r="http://schemas.openxmlformats.org/officeDocument/2006/relationships" r:id="rId2"/>
           </a:graphicData>
         </a:graphic>
       </p:graphicFrame>
       <p:pic>
         <p:nvPicPr>
-          <p:cNvPr id="21" name="" descr=""/>
+          <p:cNvPr id="21" name="Picture 20"/>
           <p:cNvPicPr/>
           <p:nvPr/>
         </p:nvPicPr>
         <p:blipFill>
-          <a:blip r:embed="rId2"/>
+          <a:blip r:embed="rId3"/>
           <a:stretch/>
         </p:blipFill>
         <p:spPr>
@@ -4618,19 +4728,14 @@
       </p:pic>
     </p:spTree>
   </p:cSld>
-  <mc:AlternateContent>
-    <mc:Choice Requires="p14">
-      <p:transition spd="slow" p14:dur="2000"/>
-    </mc:Choice>
-    <mc:Fallback>
-      <p:transition spd="slow"/>
-    </mc:Fallback>
-  </mc:AlternateContent>
+  <p:clrMapOvr>
+    <a:masterClrMapping/>
+  </p:clrMapOvr>
 </p:sld>
 </file>
 
 <file path=ppt/slides/slide6.xml><?xml version="1.0" encoding="utf-8"?>
-<p:sld xmlns:a="http://schemas.openxmlformats.org/drawingml/2006/main" xmlns:p="http://schemas.openxmlformats.org/presentationml/2006/main" xmlns:r="http://schemas.openxmlformats.org/officeDocument/2006/relationships" xmlns:p14="http://schemas.microsoft.com/office/powerpoint/2010/main" xmlns:p15="http://schemas.microsoft.com/office/powerpoint/2012/main" xmlns:mc="http://schemas.openxmlformats.org/markup-compatibility/2006">
+<p:sld xmlns:a="http://schemas.openxmlformats.org/drawingml/2006/main" xmlns:r="http://schemas.openxmlformats.org/officeDocument/2006/relationships" xmlns:p="http://schemas.openxmlformats.org/presentationml/2006/main">
   <p:cSld>
     <p:spTree>
       <p:nvGrpSpPr>
@@ -4670,9 +4775,10 @@
           </a:ln>
         </p:spPr>
         <p:txBody>
-          <a:bodyPr lIns="0" rIns="0" tIns="0" bIns="0" anchor="ctr">
+          <a:bodyPr lIns="0" tIns="0" rIns="0" bIns="0" anchor="ctr">
             <a:spAutoFit/>
           </a:bodyPr>
+          <a:lstStyle/>
           <a:p>
             <a:pPr indent="0" algn="ctr">
               <a:lnSpc>
@@ -4680,11 +4786,11 @@
               </a:lnSpc>
               <a:buNone/>
               <a:tabLst>
-                <a:tab algn="l" pos="0"/>
+                <a:tab pos="0" algn="l"/>
               </a:tabLst>
             </a:pPr>
             <a:r>
-              <a:rPr b="0" lang="en-US" sz="4400" strike="noStrike" u="none">
+              <a:rPr lang="en-US" sz="4400" b="0" u="none" strike="noStrike">
                 <a:solidFill>
                   <a:srgbClr val="000000"/>
                 </a:solidFill>
@@ -4694,14 +4800,6 @@
               </a:rPr>
               <a:t>Circuit Implementation Next</a:t>
             </a:r>
-            <a:endParaRPr b="0" lang="en-US" sz="4400" strike="noStrike" u="none">
-              <a:solidFill>
-                <a:srgbClr val="000000"/>
-              </a:solidFill>
-              <a:effectLst/>
-              <a:uFillTx/>
-              <a:latin typeface="Arial"/>
-            </a:endParaRPr>
           </a:p>
         </p:txBody>
       </p:sp>
@@ -4729,9 +4827,10 @@
           </a:ln>
         </p:spPr>
         <p:txBody>
-          <a:bodyPr lIns="0" rIns="0" tIns="0" bIns="0" anchor="t">
-            <a:normAutofit fontScale="92500" lnSpcReduction="19999"/>
+          <a:bodyPr lIns="0" tIns="0" rIns="0" bIns="0" anchor="t">
+            <a:normAutofit fontScale="85000" lnSpcReduction="9999"/>
           </a:bodyPr>
+          <a:lstStyle/>
           <a:p>
             <a:pPr marL="432000" indent="-324000">
               <a:lnSpc>
@@ -4748,7 +4847,7 @@
               <a:buChar char=""/>
             </a:pPr>
             <a:r>
-              <a:rPr b="0" lang="en-US" sz="3200" strike="noStrike" u="none">
+              <a:rPr lang="en-US" sz="3200" b="0" u="none" strike="noStrike">
                 <a:solidFill>
                   <a:srgbClr val="000000"/>
                 </a:solidFill>
@@ -4758,14 +4857,6 @@
               </a:rPr>
               <a:t>4 search qubits</a:t>
             </a:r>
-            <a:endParaRPr b="0" lang="en-US" sz="3200" strike="noStrike" u="none">
-              <a:solidFill>
-                <a:srgbClr val="000000"/>
-              </a:solidFill>
-              <a:effectLst/>
-              <a:uFillTx/>
-              <a:latin typeface="Arial"/>
-            </a:endParaRPr>
           </a:p>
           <a:p>
             <a:pPr marL="432000" indent="-324000">
@@ -4783,7 +4874,7 @@
               <a:buChar char=""/>
             </a:pPr>
             <a:r>
-              <a:rPr b="0" lang="en-US" sz="3200" strike="noStrike" u="none">
+              <a:rPr lang="en-US" sz="3200" b="0" u="none" strike="noStrike">
                 <a:solidFill>
                   <a:srgbClr val="000000"/>
                 </a:solidFill>
@@ -4793,14 +4884,6 @@
               </a:rPr>
               <a:t>1 ancilla qubit</a:t>
             </a:r>
-            <a:endParaRPr b="0" lang="en-US" sz="3200" strike="noStrike" u="none">
-              <a:solidFill>
-                <a:srgbClr val="000000"/>
-              </a:solidFill>
-              <a:effectLst/>
-              <a:uFillTx/>
-              <a:latin typeface="Arial"/>
-            </a:endParaRPr>
           </a:p>
           <a:p>
             <a:pPr marL="432000" indent="-324000">
@@ -4818,7 +4901,7 @@
               <a:buChar char=""/>
             </a:pPr>
             <a:r>
-              <a:rPr b="0" lang="en-US" sz="3200" strike="noStrike" u="none">
+              <a:rPr lang="en-US" sz="3200" b="0" u="none" strike="noStrike">
                 <a:solidFill>
                   <a:srgbClr val="000000"/>
                 </a:solidFill>
@@ -4828,14 +4911,6 @@
               </a:rPr>
               <a:t>Auxiliary ancilla qubits for multi-controlled operations</a:t>
             </a:r>
-            <a:endParaRPr b="0" lang="en-US" sz="3200" strike="noStrike" u="none">
-              <a:solidFill>
-                <a:srgbClr val="000000"/>
-              </a:solidFill>
-              <a:effectLst/>
-              <a:uFillTx/>
-              <a:latin typeface="Arial"/>
-            </a:endParaRPr>
           </a:p>
           <a:p>
             <a:pPr marL="432000" indent="-324000">
@@ -4853,7 +4928,7 @@
               <a:buChar char=""/>
             </a:pPr>
             <a:r>
-              <a:rPr b="0" lang="en-US" sz="3200" strike="noStrike" u="none">
+              <a:rPr lang="en-US" sz="3200" b="0" u="none" strike="noStrike">
                 <a:solidFill>
                   <a:srgbClr val="000000"/>
                 </a:solidFill>
@@ -4863,14 +4938,6 @@
               </a:rPr>
               <a:t>Oracle circuit</a:t>
             </a:r>
-            <a:endParaRPr b="0" lang="en-US" sz="3200" strike="noStrike" u="none">
-              <a:solidFill>
-                <a:srgbClr val="000000"/>
-              </a:solidFill>
-              <a:effectLst/>
-              <a:uFillTx/>
-              <a:latin typeface="Arial"/>
-            </a:endParaRPr>
           </a:p>
           <a:p>
             <a:pPr marL="432000" indent="-324000">
@@ -4888,7 +4955,7 @@
               <a:buChar char=""/>
             </a:pPr>
             <a:r>
-              <a:rPr b="0" lang="en-US" sz="3200" strike="noStrike" u="none">
+              <a:rPr lang="en-US" sz="3200" b="0" u="none" strike="noStrike">
                 <a:solidFill>
                   <a:srgbClr val="000000"/>
                 </a:solidFill>
@@ -4898,14 +4965,6 @@
               </a:rPr>
               <a:t>Diffusion operator</a:t>
             </a:r>
-            <a:endParaRPr b="0" lang="en-US" sz="3200" strike="noStrike" u="none">
-              <a:solidFill>
-                <a:srgbClr val="000000"/>
-              </a:solidFill>
-              <a:effectLst/>
-              <a:uFillTx/>
-              <a:latin typeface="Arial"/>
-            </a:endParaRPr>
           </a:p>
           <a:p>
             <a:pPr marL="432000" indent="-324000">
@@ -4923,7 +4982,7 @@
               <a:buChar char=""/>
             </a:pPr>
             <a:r>
-              <a:rPr b="0" lang="en-US" sz="3200" strike="noStrike" u="none">
+              <a:rPr lang="en-US" sz="3200" b="0" u="none" strike="noStrike">
                 <a:solidFill>
                   <a:srgbClr val="000000"/>
                 </a:solidFill>
@@ -4933,32 +4992,114 @@
               </a:rPr>
               <a:t>Measurement circuit</a:t>
             </a:r>
-            <a:endParaRPr b="0" lang="en-US" sz="3200" strike="noStrike" u="none">
-              <a:solidFill>
-                <a:srgbClr val="000000"/>
-              </a:solidFill>
-              <a:effectLst/>
-              <a:uFillTx/>
-              <a:latin typeface="Arial"/>
-            </a:endParaRPr>
           </a:p>
         </p:txBody>
       </p:sp>
     </p:spTree>
   </p:cSld>
-  <mc:AlternateContent>
-    <mc:Choice Requires="p14">
-      <p:transition spd="slow" p14:dur="2000"/>
-    </mc:Choice>
-    <mc:Fallback>
-      <p:transition spd="slow"/>
-    </mc:Fallback>
-  </mc:AlternateContent>
+  <p:clrMapOvr>
+    <a:masterClrMapping/>
+  </p:clrMapOvr>
 </p:sld>
 </file>
 
 <file path=ppt/slides/slide7.xml><?xml version="1.0" encoding="utf-8"?>
-<p:sld xmlns:a="http://schemas.openxmlformats.org/drawingml/2006/main" xmlns:p="http://schemas.openxmlformats.org/presentationml/2006/main" xmlns:r="http://schemas.openxmlformats.org/officeDocument/2006/relationships" xmlns:p14="http://schemas.microsoft.com/office/powerpoint/2010/main" xmlns:p15="http://schemas.microsoft.com/office/powerpoint/2012/main" xmlns:mc="http://schemas.openxmlformats.org/markup-compatibility/2006">
+<p:sld xmlns:a="http://schemas.openxmlformats.org/drawingml/2006/main" xmlns:r="http://schemas.openxmlformats.org/officeDocument/2006/relationships" xmlns:p="http://schemas.openxmlformats.org/presentationml/2006/main">
+  <p:cSld>
+    <p:spTree>
+      <p:nvGrpSpPr>
+        <p:cNvPr id="1" name=""/>
+        <p:cNvGrpSpPr/>
+        <p:nvPr/>
+      </p:nvGrpSpPr>
+      <p:grpSpPr>
+        <a:xfrm>
+          <a:off x="0" y="0"/>
+          <a:ext cx="0" cy="0"/>
+          <a:chOff x="0" y="0"/>
+          <a:chExt cx="0" cy="0"/>
+        </a:xfrm>
+      </p:grpSpPr>
+      <p:sp>
+        <p:nvSpPr>
+          <p:cNvPr id="26" name="PlaceHolder 1"/>
+          <p:cNvSpPr>
+            <a:spLocks noGrp="1"/>
+          </p:cNvSpPr>
+          <p:nvPr>
+            <p:ph type="title"/>
+          </p:nvPr>
+        </p:nvSpPr>
+        <p:spPr>
+          <a:xfrm>
+            <a:off x="504000" y="476621"/>
+            <a:ext cx="9070200" cy="443198"/>
+          </a:xfrm>
+          <a:prstGeom prst="rect">
+            <a:avLst/>
+          </a:prstGeom>
+          <a:noFill/>
+          <a:ln w="0">
+            <a:noFill/>
+          </a:ln>
+        </p:spPr>
+        <p:txBody>
+          <a:bodyPr lIns="0" tIns="0" rIns="0" bIns="0" anchor="ctr">
+            <a:spAutoFit/>
+          </a:bodyPr>
+          <a:lstStyle/>
+          <a:p>
+            <a:pPr indent="0" algn="ctr">
+              <a:buNone/>
+            </a:pPr>
+            <a:r>
+              <a:rPr lang="en-US" sz="3200" b="0" u="none" strike="noStrike" dirty="0">
+                <a:solidFill>
+                  <a:srgbClr val="000000"/>
+                </a:solidFill>
+                <a:effectLst/>
+                <a:uFillTx/>
+                <a:latin typeface="Arial"/>
+              </a:rPr>
+              <a:t>Measurement Outcome at optimal 3 iterations</a:t>
+            </a:r>
+          </a:p>
+        </p:txBody>
+      </p:sp>
+      <p:pic>
+        <p:nvPicPr>
+          <p:cNvPr id="28" name="Picture 27"/>
+          <p:cNvPicPr/>
+          <p:nvPr/>
+        </p:nvPicPr>
+        <p:blipFill>
+          <a:blip r:embed="rId2"/>
+          <a:stretch/>
+        </p:blipFill>
+        <p:spPr>
+          <a:xfrm>
+            <a:off x="1766247" y="1171433"/>
+            <a:ext cx="6231340" cy="3850943"/>
+          </a:xfrm>
+          <a:prstGeom prst="rect">
+            <a:avLst/>
+          </a:prstGeom>
+          <a:noFill/>
+          <a:ln w="0">
+            <a:noFill/>
+          </a:ln>
+        </p:spPr>
+      </p:pic>
+    </p:spTree>
+  </p:cSld>
+  <p:clrMapOvr>
+    <a:masterClrMapping/>
+  </p:clrMapOvr>
+</p:sld>
+</file>
+
+<file path=ppt/slides/slide8.xml><?xml version="1.0" encoding="utf-8"?>
+<p:sld xmlns:a="http://schemas.openxmlformats.org/drawingml/2006/main" xmlns:r="http://schemas.openxmlformats.org/officeDocument/2006/relationships" xmlns:p="http://schemas.openxmlformats.org/presentationml/2006/main">
   <p:cSld>
     <p:spTree>
       <p:nvGrpSpPr>
@@ -4986,8 +5127,8 @@
         </p:nvSpPr>
         <p:spPr>
           <a:xfrm>
-            <a:off x="504000" y="385200"/>
-            <a:ext cx="9070200" cy="625680"/>
+            <a:off x="504000" y="359486"/>
+            <a:ext cx="9070200" cy="677108"/>
           </a:xfrm>
           <a:prstGeom prst="rect">
             <a:avLst/>
@@ -4998,9 +5139,10 @@
           </a:ln>
         </p:spPr>
         <p:txBody>
-          <a:bodyPr lIns="0" rIns="0" tIns="0" bIns="0" anchor="ctr">
+          <a:bodyPr lIns="0" tIns="0" rIns="0" bIns="0" anchor="ctr">
             <a:spAutoFit/>
           </a:bodyPr>
+          <a:lstStyle/>
           <a:p>
             <a:pPr indent="0" algn="ctr">
               <a:lnSpc>
@@ -5008,28 +5150,20 @@
               </a:lnSpc>
               <a:buNone/>
               <a:tabLst>
-                <a:tab algn="l" pos="0"/>
+                <a:tab pos="0" algn="l"/>
               </a:tabLst>
             </a:pPr>
             <a:r>
-              <a:rPr b="0" lang="en-US" sz="4400" strike="noStrike" u="none">
-                <a:solidFill>
-                  <a:srgbClr val="000000"/>
-                </a:solidFill>
-                <a:effectLst/>
-                <a:uFillTx/>
-                <a:latin typeface="Arial"/>
-              </a:rPr>
-              <a:t>Collected</a:t>
-            </a:r>
-            <a:endParaRPr b="0" lang="en-US" sz="4400" strike="noStrike" u="none">
-              <a:solidFill>
-                <a:srgbClr val="000000"/>
-              </a:solidFill>
-              <a:effectLst/>
-              <a:uFillTx/>
-              <a:latin typeface="Arial"/>
-            </a:endParaRPr>
+              <a:rPr lang="en-US" sz="4400" b="0" u="none" strike="noStrike" dirty="0">
+                <a:solidFill>
+                  <a:srgbClr val="000000"/>
+                </a:solidFill>
+                <a:effectLst/>
+                <a:uFillTx/>
+                <a:latin typeface="Arial"/>
+              </a:rPr>
+              <a:t>Simulator Collected</a:t>
+            </a:r>
           </a:p>
         </p:txBody>
       </p:sp>
@@ -5057,9 +5191,10 @@
           </a:ln>
         </p:spPr>
         <p:txBody>
-          <a:bodyPr lIns="0" rIns="0" tIns="0" bIns="0" anchor="t">
+          <a:bodyPr lIns="0" tIns="0" rIns="0" bIns="0" anchor="t">
             <a:normAutofit/>
           </a:bodyPr>
+          <a:lstStyle/>
           <a:p>
             <a:pPr marL="432000" indent="-324000">
               <a:lnSpc>
@@ -5076,7 +5211,7 @@
               <a:buChar char=""/>
             </a:pPr>
             <a:r>
-              <a:rPr b="0" lang="en-US" sz="3200" strike="noStrike" u="none">
+              <a:rPr lang="en-US" sz="3200" b="0" u="none" strike="noStrike">
                 <a:solidFill>
                   <a:srgbClr val="000000"/>
                 </a:solidFill>
@@ -5086,14 +5221,6 @@
               </a:rPr>
               <a:t>Probability of the marked state</a:t>
             </a:r>
-            <a:endParaRPr b="0" lang="en-US" sz="3200" strike="noStrike" u="none">
-              <a:solidFill>
-                <a:srgbClr val="000000"/>
-              </a:solidFill>
-              <a:effectLst/>
-              <a:uFillTx/>
-              <a:latin typeface="Arial"/>
-            </a:endParaRPr>
           </a:p>
           <a:p>
             <a:pPr marL="432000" indent="-324000">
@@ -5111,7 +5238,7 @@
               <a:buChar char=""/>
             </a:pPr>
             <a:r>
-              <a:rPr b="0" lang="en-US" sz="3200" strike="noStrike" u="none">
+              <a:rPr lang="en-US" sz="3200" b="0" u="none" strike="noStrike">
                 <a:solidFill>
                   <a:srgbClr val="000000"/>
                 </a:solidFill>
@@ -5121,14 +5248,6 @@
               </a:rPr>
               <a:t>Marked-state amplitude</a:t>
             </a:r>
-            <a:endParaRPr b="0" lang="en-US" sz="3200" strike="noStrike" u="none">
-              <a:solidFill>
-                <a:srgbClr val="000000"/>
-              </a:solidFill>
-              <a:effectLst/>
-              <a:uFillTx/>
-              <a:latin typeface="Arial"/>
-            </a:endParaRPr>
           </a:p>
           <a:p>
             <a:pPr marL="432000" indent="-324000">
@@ -5146,7 +5265,7 @@
               <a:buChar char=""/>
             </a:pPr>
             <a:r>
-              <a:rPr b="0" lang="en-US" sz="3200" strike="noStrike" u="none">
+              <a:rPr lang="en-US" sz="3200" b="0" u="none" strike="noStrike">
                 <a:solidFill>
                   <a:srgbClr val="000000"/>
                 </a:solidFill>
@@ -5156,14 +5275,6 @@
               </a:rPr>
               <a:t>Average amplitude of the search register</a:t>
             </a:r>
-            <a:endParaRPr b="0" lang="en-US" sz="3200" strike="noStrike" u="none">
-              <a:solidFill>
-                <a:srgbClr val="000000"/>
-              </a:solidFill>
-              <a:effectLst/>
-              <a:uFillTx/>
-              <a:latin typeface="Arial"/>
-            </a:endParaRPr>
           </a:p>
           <a:p>
             <a:pPr marL="432000" indent="-324000">
@@ -5181,7 +5292,7 @@
               <a:buChar char=""/>
             </a:pPr>
             <a:r>
-              <a:rPr b="0" lang="en-US" sz="3200" strike="noStrike" u="none">
+              <a:rPr lang="en-US" sz="3200" b="0" u="none" strike="noStrike">
                 <a:solidFill>
                   <a:srgbClr val="000000"/>
                 </a:solidFill>
@@ -5191,14 +5302,6 @@
               </a:rPr>
               <a:t>Real component</a:t>
             </a:r>
-            <a:endParaRPr b="0" lang="en-US" sz="3200" strike="noStrike" u="none">
-              <a:solidFill>
-                <a:srgbClr val="000000"/>
-              </a:solidFill>
-              <a:effectLst/>
-              <a:uFillTx/>
-              <a:latin typeface="Arial"/>
-            </a:endParaRPr>
           </a:p>
           <a:p>
             <a:pPr marL="432000" indent="-324000">
@@ -5216,7 +5319,7 @@
               <a:buChar char=""/>
             </a:pPr>
             <a:r>
-              <a:rPr b="0" lang="en-US" sz="3200" strike="noStrike" u="none">
+              <a:rPr lang="en-US" sz="3200" b="0" u="none" strike="noStrike">
                 <a:solidFill>
                   <a:srgbClr val="000000"/>
                 </a:solidFill>
@@ -5226,184 +5329,19 @@
               </a:rPr>
               <a:t>Imaginary component</a:t>
             </a:r>
-            <a:endParaRPr b="0" lang="en-US" sz="3200" strike="noStrike" u="none">
-              <a:solidFill>
-                <a:srgbClr val="000000"/>
-              </a:solidFill>
-              <a:effectLst/>
-              <a:uFillTx/>
-              <a:latin typeface="Arial"/>
-            </a:endParaRPr>
           </a:p>
         </p:txBody>
       </p:sp>
     </p:spTree>
   </p:cSld>
-  <mc:AlternateContent>
-    <mc:Choice Requires="p14">
-      <p:transition spd="slow" p14:dur="2000"/>
-    </mc:Choice>
-    <mc:Fallback>
-      <p:transition spd="slow"/>
-    </mc:Fallback>
-  </mc:AlternateContent>
-</p:sld>
-</file>
-
-<file path=ppt/slides/slide8.xml><?xml version="1.0" encoding="utf-8"?>
-<p:sld xmlns:a="http://schemas.openxmlformats.org/drawingml/2006/main" xmlns:p="http://schemas.openxmlformats.org/presentationml/2006/main" xmlns:r="http://schemas.openxmlformats.org/officeDocument/2006/relationships" xmlns:p14="http://schemas.microsoft.com/office/powerpoint/2010/main" xmlns:p15="http://schemas.microsoft.com/office/powerpoint/2012/main" xmlns:mc="http://schemas.openxmlformats.org/markup-compatibility/2006">
-  <p:cSld>
-    <p:spTree>
-      <p:nvGrpSpPr>
-        <p:cNvPr id="1" name=""/>
-        <p:cNvGrpSpPr/>
-        <p:nvPr/>
-      </p:nvGrpSpPr>
-      <p:grpSpPr>
-        <a:xfrm>
-          <a:off x="0" y="0"/>
-          <a:ext cx="0" cy="0"/>
-          <a:chOff x="0" y="0"/>
-          <a:chExt cx="0" cy="0"/>
-        </a:xfrm>
-      </p:grpSpPr>
-      <p:sp>
-        <p:nvSpPr>
-          <p:cNvPr id="26" name="PlaceHolder 1"/>
-          <p:cNvSpPr>
-            <a:spLocks noGrp="1"/>
-          </p:cNvSpPr>
-          <p:nvPr>
-            <p:ph type="title"/>
-          </p:nvPr>
-        </p:nvSpPr>
-        <p:spPr>
-          <a:xfrm>
-            <a:off x="504000" y="385560"/>
-            <a:ext cx="9070200" cy="625320"/>
-          </a:xfrm>
-          <a:prstGeom prst="rect">
-            <a:avLst/>
-          </a:prstGeom>
-          <a:noFill/>
-          <a:ln w="0">
-            <a:noFill/>
-          </a:ln>
-        </p:spPr>
-        <p:txBody>
-          <a:bodyPr lIns="0" rIns="0" tIns="0" bIns="0" anchor="ctr">
-            <a:spAutoFit/>
-          </a:bodyPr>
-          <a:p>
-            <a:pPr indent="0" algn="ctr">
-              <a:buNone/>
-            </a:pPr>
-            <a:r>
-              <a:rPr b="0" lang="en-US" sz="4400" strike="noStrike" u="none">
-                <a:solidFill>
-                  <a:srgbClr val="000000"/>
-                </a:solidFill>
-                <a:effectLst/>
-                <a:uFillTx/>
-                <a:latin typeface="Arial"/>
-              </a:rPr>
-              <a:t>Measurement Outcome</a:t>
-            </a:r>
-            <a:endParaRPr b="0" lang="en-US" sz="4400" strike="noStrike" u="none">
-              <a:solidFill>
-                <a:srgbClr val="000000"/>
-              </a:solidFill>
-              <a:effectLst/>
-              <a:uFillTx/>
-              <a:latin typeface="Arial"/>
-            </a:endParaRPr>
-          </a:p>
-        </p:txBody>
-      </p:sp>
-      <p:sp>
-        <p:nvSpPr>
-          <p:cNvPr id="27" name="PlaceHolder 2"/>
-          <p:cNvSpPr>
-            <a:spLocks noGrp="1"/>
-          </p:cNvSpPr>
-          <p:nvPr>
-            <p:ph/>
-          </p:nvPr>
-        </p:nvSpPr>
-        <p:spPr>
-          <a:xfrm>
-            <a:off x="1143000" y="1371600"/>
-            <a:ext cx="9071280" cy="3287880"/>
-          </a:xfrm>
-          <a:prstGeom prst="rect">
-            <a:avLst/>
-          </a:prstGeom>
-          <a:noFill/>
-          <a:ln w="0">
-            <a:noFill/>
-          </a:ln>
-        </p:spPr>
-        <p:txBody>
-          <a:bodyPr lIns="0" rIns="0" tIns="0" bIns="0" anchor="t">
-            <a:normAutofit/>
-          </a:bodyPr>
-          <a:p>
-            <a:pPr indent="0">
-              <a:spcBef>
-                <a:spcPts val="1417"/>
-              </a:spcBef>
-              <a:buNone/>
-            </a:pPr>
-            <a:endParaRPr b="1" lang="en-US" sz="3200" strike="noStrike" u="none">
-              <a:solidFill>
-                <a:srgbClr val="000000"/>
-              </a:solidFill>
-              <a:effectLst/>
-              <a:uFillTx/>
-              <a:latin typeface="Arial"/>
-            </a:endParaRPr>
-          </a:p>
-        </p:txBody>
-      </p:sp>
-      <p:pic>
-        <p:nvPicPr>
-          <p:cNvPr id="28" name="" descr=""/>
-          <p:cNvPicPr/>
-          <p:nvPr/>
-        </p:nvPicPr>
-        <p:blipFill>
-          <a:blip r:embed="rId1"/>
-          <a:stretch/>
-        </p:blipFill>
-        <p:spPr>
-          <a:xfrm>
-            <a:off x="228600" y="1371600"/>
-            <a:ext cx="9372600" cy="3657600"/>
-          </a:xfrm>
-          <a:prstGeom prst="rect">
-            <a:avLst/>
-          </a:prstGeom>
-          <a:noFill/>
-          <a:ln w="0">
-            <a:noFill/>
-          </a:ln>
-        </p:spPr>
-      </p:pic>
-    </p:spTree>
-  </p:cSld>
-  <mc:AlternateContent>
-    <mc:Choice Requires="p14">
-      <p:transition spd="slow" p14:dur="2000"/>
-    </mc:Choice>
-    <mc:Fallback>
-      <p:transition spd="slow"/>
-    </mc:Fallback>
-  </mc:AlternateContent>
+  <p:clrMapOvr>
+    <a:masterClrMapping/>
+  </p:clrMapOvr>
 </p:sld>
 </file>
 
 <file path=ppt/slides/slide9.xml><?xml version="1.0" encoding="utf-8"?>
-<p:sld xmlns:a="http://schemas.openxmlformats.org/drawingml/2006/main" xmlns:p="http://schemas.openxmlformats.org/presentationml/2006/main" xmlns:r="http://schemas.openxmlformats.org/officeDocument/2006/relationships" xmlns:p14="http://schemas.microsoft.com/office/powerpoint/2010/main" xmlns:p15="http://schemas.microsoft.com/office/powerpoint/2012/main" xmlns:mc="http://schemas.openxmlformats.org/markup-compatibility/2006">
+<p:sld xmlns:a="http://schemas.openxmlformats.org/drawingml/2006/main" xmlns:r="http://schemas.openxmlformats.org/officeDocument/2006/relationships" xmlns:p="http://schemas.openxmlformats.org/presentationml/2006/main">
   <p:cSld>
     <p:spTree>
       <p:nvGrpSpPr>
@@ -5431,8 +5369,8 @@
         </p:nvSpPr>
         <p:spPr>
           <a:xfrm>
-            <a:off x="504000" y="362880"/>
-            <a:ext cx="9070200" cy="671040"/>
+            <a:off x="504000" y="390624"/>
+            <a:ext cx="9070200" cy="615553"/>
           </a:xfrm>
           <a:prstGeom prst="rect">
             <a:avLst/>
@@ -5443,9 +5381,10 @@
           </a:ln>
         </p:spPr>
         <p:txBody>
-          <a:bodyPr lIns="0" rIns="0" tIns="0" bIns="0" anchor="ctr">
+          <a:bodyPr lIns="0" tIns="0" rIns="0" bIns="0" anchor="ctr">
             <a:spAutoFit/>
           </a:bodyPr>
+          <a:lstStyle/>
           <a:p>
             <a:pPr indent="0" algn="ctr">
               <a:lnSpc>
@@ -5453,28 +5392,20 @@
               </a:lnSpc>
               <a:buNone/>
               <a:tabLst>
-                <a:tab algn="l" pos="0"/>
+                <a:tab pos="0" algn="l"/>
               </a:tabLst>
             </a:pPr>
             <a:r>
-              <a:rPr b="0" lang="en-US" sz="4400" strike="noStrike" u="none">
-                <a:solidFill>
-                  <a:srgbClr val="000000"/>
-                </a:solidFill>
-                <a:effectLst/>
-                <a:uFillTx/>
-                <a:latin typeface="Arial"/>
-              </a:rPr>
-              <a:t>Results</a:t>
-            </a:r>
-            <a:endParaRPr b="0" lang="en-US" sz="4400" strike="noStrike" u="none">
-              <a:solidFill>
-                <a:srgbClr val="000000"/>
-              </a:solidFill>
-              <a:effectLst/>
-              <a:uFillTx/>
-              <a:latin typeface="Arial"/>
-            </a:endParaRPr>
+              <a:rPr lang="en-US" sz="4000" b="0" u="none" strike="noStrike" dirty="0">
+                <a:solidFill>
+                  <a:srgbClr val="000000"/>
+                </a:solidFill>
+                <a:effectLst/>
+                <a:uFillTx/>
+                <a:latin typeface="Arial"/>
+              </a:rPr>
+              <a:t>Simulator Results at various iterations</a:t>
+            </a:r>
           </a:p>
         </p:txBody>
       </p:sp>
@@ -5502,11 +5433,55 @@
           </a:ln>
         </p:spPr>
         <p:txBody>
-          <a:bodyPr lIns="0" rIns="0" tIns="0" bIns="0" anchor="t" anchorCtr="1">
+          <a:bodyPr lIns="0" tIns="0" rIns="0" bIns="0" anchor="t" anchorCtr="1">
             <a:normAutofit/>
           </a:bodyPr>
-          <a:p>
-            <a:pPr marL="432000" indent="0" algn="ctr">
+          <a:lstStyle/>
+          <a:p>
+            <a:pPr marL="432000" algn="ctr">
+              <a:lnSpc>
+                <a:spcPct val="100000"/>
+              </a:lnSpc>
+              <a:spcBef>
+                <a:spcPts val="1417"/>
+              </a:spcBef>
+              <a:tabLst>
+                <a:tab pos="0" algn="l"/>
+              </a:tabLst>
+            </a:pPr>
+            <a:r>
+              <a:rPr lang="en-US" sz="1300" b="0" u="none" strike="noStrike" dirty="0">
+                <a:solidFill>
+                  <a:srgbClr val="000000"/>
+                </a:solidFill>
+                <a:effectLst/>
+                <a:uFillTx/>
+                <a:latin typeface="Arial"/>
+              </a:rPr>
+              <a:t>Probability and </a:t>
+            </a:r>
+            <a:r>
+              <a:rPr lang="en-US" sz="1300" dirty="0">
+                <a:solidFill>
+                  <a:srgbClr val="000000"/>
+                </a:solidFill>
+              </a:rPr>
+              <a:t>Amplitudes(</a:t>
+            </a:r>
+            <a:r>
+              <a:rPr lang="en-US" sz="1300" b="0" u="none" strike="noStrike" dirty="0">
+                <a:solidFill>
+                  <a:srgbClr val="000000"/>
+                </a:solidFill>
+                <a:effectLst/>
+                <a:uFillTx/>
+                <a:latin typeface="Arial"/>
+              </a:rPr>
+              <a:t>Real and Imaginary Components)</a:t>
+            </a:r>
+          </a:p>
+          <a:p>
+            <a:pPr marL="432000" indent="0">
               <a:lnSpc>
                 <a:spcPct val="100000"/>
               </a:lnSpc>
@@ -5515,21 +5490,10 @@
               </a:spcBef>
               <a:buNone/>
               <a:tabLst>
-                <a:tab algn="l" pos="0"/>
+                <a:tab pos="0" algn="l"/>
               </a:tabLst>
             </a:pPr>
-            <a:r>
-              <a:rPr b="0" lang="en-US" sz="1300" strike="noStrike" u="none">
-                <a:solidFill>
-                  <a:srgbClr val="000000"/>
-                </a:solidFill>
-                <a:effectLst/>
-                <a:uFillTx/>
-                <a:latin typeface="Arial"/>
-              </a:rPr>
-              <a:t>Probability and Real Amplitudes and Imaginary Components</a:t>
-            </a:r>
-            <a:endParaRPr b="0" lang="en-US" sz="1300" strike="noStrike" u="none">
+            <a:endParaRPr lang="en-US" sz="3200" b="0" u="none" strike="noStrike" dirty="0">
               <a:solidFill>
                 <a:srgbClr val="000000"/>
               </a:solidFill>
@@ -5538,44 +5502,22 @@
               <a:latin typeface="Arial"/>
             </a:endParaRPr>
           </a:p>
-          <a:p>
-            <a:pPr marL="432000" indent="0">
-              <a:lnSpc>
-                <a:spcPct val="100000"/>
-              </a:lnSpc>
-              <a:spcBef>
-                <a:spcPts val="1417"/>
-              </a:spcBef>
-              <a:buNone/>
-              <a:tabLst>
-                <a:tab algn="l" pos="0"/>
-              </a:tabLst>
-            </a:pPr>
-            <a:endParaRPr b="0" lang="en-US" sz="3200" strike="noStrike" u="none">
-              <a:solidFill>
-                <a:srgbClr val="000000"/>
-              </a:solidFill>
-              <a:effectLst/>
-              <a:uFillTx/>
-              <a:latin typeface="Arial"/>
-            </a:endParaRPr>
-          </a:p>
         </p:txBody>
       </p:sp>
       <p:pic>
         <p:nvPicPr>
-          <p:cNvPr id="31" name="" descr=""/>
+          <p:cNvPr id="31" name="Picture 30"/>
           <p:cNvPicPr/>
           <p:nvPr/>
         </p:nvPicPr>
         <p:blipFill>
-          <a:blip r:embed="rId1"/>
+          <a:blip r:embed="rId2"/>
           <a:stretch/>
         </p:blipFill>
         <p:spPr>
           <a:xfrm>
             <a:off x="1641240" y="1600200"/>
-            <a:ext cx="6816600" cy="3200040"/>
+            <a:ext cx="6816600" cy="3713328"/>
           </a:xfrm>
           <a:prstGeom prst="rect">
             <a:avLst/>
@@ -5588,68 +5530,63 @@
       </p:pic>
     </p:spTree>
   </p:cSld>
-  <mc:AlternateContent>
-    <mc:Choice Requires="p14">
-      <p:transition spd="slow" p14:dur="2000"/>
-    </mc:Choice>
-    <mc:Fallback>
-      <p:transition spd="slow"/>
-    </mc:Fallback>
-  </mc:AlternateContent>
+  <p:clrMapOvr>
+    <a:masterClrMapping/>
+  </p:clrMapOvr>
 </p:sld>
 </file>
 
 <file path=ppt/theme/theme1.xml><?xml version="1.0" encoding="utf-8"?>
-<a:theme xmlns:a="http://schemas.openxmlformats.org/drawingml/2006/main" xmlns:r="http://schemas.openxmlformats.org/officeDocument/2006/relationships" name="Office">
+<a:theme xmlns:a="http://schemas.openxmlformats.org/drawingml/2006/main" name="Office">
   <a:themeElements>
     <a:clrScheme name="LibreOffice">
       <a:dk1>
         <a:srgbClr val="000000"/>
       </a:dk1>
       <a:lt1>
-        <a:srgbClr val="ffffff"/>
+        <a:srgbClr val="FFFFFF"/>
       </a:lt1>
       <a:dk2>
         <a:srgbClr val="000000"/>
       </a:dk2>
       <a:lt2>
-        <a:srgbClr val="ffffff"/>
+        <a:srgbClr val="FFFFFF"/>
       </a:lt2>
       <a:accent1>
-        <a:srgbClr val="18a303"/>
+        <a:srgbClr val="18A303"/>
       </a:accent1>
       <a:accent2>
-        <a:srgbClr val="0369a3"/>
+        <a:srgbClr val="0369A3"/>
       </a:accent2>
       <a:accent3>
-        <a:srgbClr val="a33e03"/>
+        <a:srgbClr val="A33E03"/>
       </a:accent3>
       <a:accent4>
-        <a:srgbClr val="8e03a3"/>
+        <a:srgbClr val="8E03A3"/>
       </a:accent4>
       <a:accent5>
-        <a:srgbClr val="c99c00"/>
+        <a:srgbClr val="C99C00"/>
       </a:accent5>
       <a:accent6>
-        <a:srgbClr val="c9211e"/>
+        <a:srgbClr val="C9211E"/>
       </a:accent6>
       <a:hlink>
-        <a:srgbClr val="0000ee"/>
+        <a:srgbClr val="0000EE"/>
       </a:hlink>
       <a:folHlink>
-        <a:srgbClr val="551a8b"/>
+        <a:srgbClr val="551A8B"/>
       </a:folHlink>
     </a:clrScheme>
     <a:fontScheme name="Office">
       <a:majorFont>
-        <a:latin typeface="Arial" pitchFamily="0" charset="1"/>
-        <a:ea typeface="DejaVu Sans" pitchFamily="0" charset="1"/>
-        <a:cs typeface="DejaVu Sans" pitchFamily="0" charset="1"/>
+        <a:latin typeface="Arial"/>
+        <a:ea typeface="DejaVu Sans"/>
+        <a:cs typeface="DejaVu Sans"/>
       </a:majorFont>
       <a:minorFont>
-        <a:latin typeface="Arial" pitchFamily="0" charset="1"/>
-        <a:ea typeface="DejaVu Sans" pitchFamily="0" charset="1"/>
-        <a:cs typeface="DejaVu Sans" pitchFamily="0" charset="1"/>
+        <a:latin typeface="Arial"/>
+        <a:ea typeface="DejaVu Sans"/>
+        <a:cs typeface="DejaVu Sans"/>
       </a:minorFont>
     </a:fontScheme>
     <a:fmtScheme>
@@ -5702,5 +5639,7 @@
       </a:bgFillStyleLst>
     </a:fmtScheme>
   </a:themeElements>
+  <a:objectDefaults/>
+  <a:extraClrSchemeLst/>
 </a:theme>
 </file>